--- a/docs/pitch/Gaskiyya-DemoDay-10X-Team.pptx
+++ b/docs/pitch/Gaskiyya-DemoDay-10X-Team.pptx
@@ -116,36 +116,36 @@
   <p:extLst>
     <p:ext uri="{521415D9-36F7-43E2-AB2F-B90AF26B5E84}">
       <p14:sectionLst xmlns:p14="http://schemas.microsoft.com/office/powerpoint/2010/main">
-        <p14:section name="Opening" id="{bd428175-30cb-484e-9d7f-3193f759ca2f}">
+        <p14:section name="Opening" id="{440287f1-9a39-f35e-c0c6-816cc2181a6c}">
           <p14:sldIdLst>
             <p14:sldId id="256"/>
             <p14:sldId id="257"/>
           </p14:sldIdLst>
         </p14:section>
-        <p14:section name="Problem" id="{dd1f24a5-d288-c6e4-0cad-a43f9daf4fe4}">
+        <p14:section name="Problem" id="{3bd560be-5603-d954-339a-97b930573f72}">
           <p14:sldIdLst>
             <p14:sldId id="258"/>
             <p14:sldId id="259"/>
           </p14:sldIdLst>
         </p14:section>
-        <p14:section name="Solution" id="{0cc4651e-8f92-e2cb-1c14-82f6b2411dbf}">
+        <p14:section name="Solution" id="{1eb32f9f-46c7-596b-3724-751f805801d2}">
           <p14:sldIdLst>
             <p14:sldId id="260"/>
           </p14:sldIdLst>
         </p14:section>
-        <p14:section name="Live demo" id="{a0125e98-06ff-f021-72f4-600c0c7ffbf7}">
+        <p14:section name="Impact and growth" id="{9e6e2d24-2281-5220-97ed-59b779c53a5a}">
           <p14:sldIdLst>
             <p14:sldId id="261"/>
+            <p14:sldId id="262"/>
+            <p14:sldId id="263"/>
           </p14:sldIdLst>
         </p14:section>
-        <p14:section name="Impact and growth" id="{ff795431-5411-4dba-7cad-c9ba2e8cc8d3}">
+        <p14:section name="Live demo" id="{2b1e66a0-a47b-32d1-cac6-adcdb23e5d1e}">
           <p14:sldIdLst>
-            <p14:sldId id="262"/>
-            <p14:sldId id="263"/>
             <p14:sldId id="264"/>
           </p14:sldIdLst>
         </p14:section>
-        <p14:section name="Close" id="{53bbae90-c0f1-2cfd-4e70-6bb72ddf4d31}">
+        <p14:section name="Close" id="{3c4fcc5a-3760-c91e-7dc2-330f16dcb068}">
           <p14:sldIdLst>
             <p14:sldId id="265"/>
           </p14:sldIdLst>
@@ -1378,14 +1378,13 @@
           <a:p>
             <a:r>
               <a:rPr lang="en-US" dirty="0"/>
-              <a:t>BOTH · 3 minutes. One drives the app and console, the other narrates (agree who does which before the pitch). Test data only. No real customer data, keys or tokens on screen.
-1. THE BANK SENDS (20s): “On the left is the bank’s side, our bank console. On the right, a customer’s phone with Gaskiyya.” Console, Messages, send a security alert.
-2. CUSTOMER SHARES IT (20s): On the phone, share the message to Gaskiyya.
-3. SENT BY YOUR BANK (30s): The app shows “Sent by your bank.” “That message is genuine. The bank registered it a moment ago.”
-4. TAMPERED COPY (40s): Paste the copy with the lookalike link (one hyphen added). Result: “Not confirmed”, plus what the bank actually sent in the last 24 hours and why this looks like a scam. Optional: paste the genuine message as a different customer. Also “Not confirmed”, because checks are bound to the recipient.
-5. BANK CALLS (40s): Console, Calls, announce and call. The same 4-digit code appears on the agent screen and the phone. Hang up: the app now says your bank is not calling you.
-Close (10s): “Each time, the customer got a clear answer before clicking a link, sharing a code, or trusting a caller.”
-If the live demo fails: switch to the backup screen recording and say clearly, “This is a recording of the same app.”</a:t>
+              <a:t>OLUWATOBI · 35 seconds
+Who benefits?
+Customers: a way to pause and check before clicking a link, calling back, or sharing a code.
+Traders and small businesses: check that a transfer is real before handing over goods. No more fake “I’ve paid you” receipts.
+Banks: customer reports of a fake message are grouped into a scam campaign, and a human approves every warning before it goes out. It complements the bank’s security. It doesn’t replace it.
+And it works on any phone: in the bank’s app or ours, on WhatsApp, and by USSD for basic phones without data, in English, Pidgin, Hausa, Yoruba and Igbo. The translations still need native-speaker review.
+Why it matters for inclusion: people only use digital banking if they feel confident in it. These are potential outcomes, and we want to measure them in a pilot.</a:t>
             </a:r>
             <a:endParaRPr lang="en-US" dirty="0"/>
           </a:p>
@@ -1473,13 +1472,9 @@
           <a:p>
             <a:r>
               <a:rPr lang="en-US" dirty="0"/>
-              <a:t>OLUWATOBI · 35 seconds
-Who benefits?
-Customers: a way to pause and check before clicking a link, calling back, or sharing a code.
-Traders and small businesses: check that a transfer is real before handing over goods. No more fake “I’ve paid you” receipts.
-Banks: customer reports of a fake message are grouped into a scam campaign, and a human approves every warning before it goes out. It complements the bank’s security. It doesn’t replace it.
-And it works on any phone: in the bank’s app or ours, on WhatsApp, and by USSD for basic phones without data, in English, Pidgin, Hausa, Yoruba and Igbo. The translations still need native-speaker review.
-Why it matters for inclusion: people only use digital banking if they feel confident in it. These are potential outcomes, and we want to measure them in a pilot.</a:t>
+              <a:t>JHMEEL · 20 seconds
+It scales by design. Every bank joins through the same API. Each bank keeps its own keys and its own records, isolated from the others. And customers get one place to check messages from every bank they use: in their bank’s app or ours, on WhatsApp, or by USSD on any phone.
+To get there we still need real bank integrations, a USSD short code with the telcos, security and privacy reviews, and operational support. Production scale isn’t proven yet. That’s what the pilot is for.</a:t>
             </a:r>
             <a:endParaRPr lang="en-US" dirty="0"/>
           </a:p>
@@ -1567,9 +1562,10 @@
           <a:p>
             <a:r>
               <a:rPr lang="en-US" dirty="0"/>
-              <a:t>JHMEEL · 20 seconds
-It scales by design. Every bank joins through the same API. Each bank keeps its own keys and its own records, isolated from the others. And customers get one place to check messages from every bank they use: in their bank’s app or ours, on WhatsApp, or by USSD on any phone.
-To get there we still need real bank integrations, a USSD short code with the telcos, security and privacy reviews, and operational support. Production scale isn’t proven yet. That’s what the pilot is for.</a:t>
+              <a:t>JHMEEL · 25 seconds
+We built this in three days. The registry is live on AWS, with the iOS and Android app, the bank console, WhatsApp and USSD, all deployed through CI/CD with automated tests.
+Next three months. Month one: put it in front of real users and make sure every result is clear. Month two: a security and privacy review, better error handling, and the real requirements for connecting to a bank. Month three: a controlled pilot, if a partner bank agrees, measured properly.
+The goal isn’t more features. It’s proving Gaskiyya is useful and reliable for real customers.</a:t>
             </a:r>
             <a:endParaRPr lang="en-US" dirty="0"/>
           </a:p>
@@ -1657,10 +1653,14 @@
           <a:p>
             <a:r>
               <a:rPr lang="en-US" dirty="0"/>
-              <a:t>JHMEEL · 25 seconds
-We built this in three days. The registry is live on AWS, with the iOS and Android app, the bank console, WhatsApp and USSD, all deployed through CI/CD with automated tests.
-Next three months. Month one: put it in front of real users and make sure every result is clear. Month two: a security and privacy review, better error handling, and the real requirements for connecting to a bank. Month three: a controlled pilot, if a partner bank agrees, measured properly.
-The goal isn’t more features. It’s proving Gaskiyya is useful and reliable for real customers.</a:t>
+              <a:t>BOTH · 3 minutes. One drives the app and console, the other narrates (agree who does which before the pitch). Test data only. No real customer data, keys or tokens on screen.
+1. THE BANK SENDS (20s): “On the left is the bank’s side, our bank console. On the right, a customer’s phone with Gaskiyya.” Console, Messages, send a security alert.
+2. CUSTOMER SHARES IT (20s): On the phone, share the message to Gaskiyya.
+3. SENT BY YOUR BANK (30s): The app shows “Sent by your bank.” “That message is genuine. The bank registered it a moment ago.”
+4. TAMPERED COPY (40s): Paste the copy with the lookalike link (one hyphen added). Result: “Not confirmed”, plus what the bank actually sent in the last 24 hours and why this looks like a scam. Optional: paste the genuine message as a different customer. Also “Not confirmed”, because checks are bound to the recipient.
+5. BANK CALLS (40s): Console, Calls, announce and call. The same 4-digit code appears on the agent screen and the phone. Hang up: the app now says your bank is not calling you.
+Close (10s): point at the QR codes: “Scan these to try the website and the bank sandbox yourself.” Then: “Each time, the customer got a clear answer before clicking a link, sharing a code, or trusting a caller.”
+If the live demo fails: switch to the backup screen recording and say clearly, “This is a recording of the same app.”</a:t>
             </a:r>
             <a:endParaRPr lang="en-US" dirty="0"/>
           </a:p>
@@ -5601,13 +5601,13 @@
             <a:r>
               <a:rPr lang="en-US" sz="3200" dirty="0">
                 <a:solidFill>
-                  <a:schemeClr val="bg1"/>
+                  <a:schemeClr val="tx1"/>
                 </a:solidFill>
                 <a:latin typeface="Inter Display SemiBold" pitchFamily="34" charset="0"/>
                 <a:ea typeface="Inter Display SemiBold" pitchFamily="34" charset="-122"/>
                 <a:cs typeface="Inter Display SemiBold" pitchFamily="34" charset="-120"/>
               </a:rPr>
-              <a:t>Live demo</a:t>
+              <a:t>Who it helps</a:t>
             </a:r>
             <a:endParaRPr lang="en-US" sz="3200" dirty="0"/>
           </a:p>
@@ -5615,14 +5615,37 @@
       </p:sp>
       <p:sp>
         <p:nvSpPr>
-          <p:cNvPr id="3" name="The bank sends"/>
+          <p:cNvPr id="3" name="Shape 1"/>
           <p:cNvSpPr/>
           <p:nvPr/>
         </p:nvSpPr>
         <p:spPr>
           <a:xfrm>
-            <a:off x="1485900" y="2676525"/>
-            <a:ext cx="1143000" cy="1143000"/>
+            <a:off x="2844800" y="2730500"/>
+            <a:ext cx="6502400" cy="0"/>
+          </a:xfrm>
+          <a:prstGeom prst="line">
+            <a:avLst/>
+          </a:prstGeom>
+          <a:noFill/>
+          <a:ln w="25400">
+            <a:solidFill>
+              <a:srgbClr val="DAD8D2"/>
+            </a:solidFill>
+            <a:prstDash val="dash"/>
+          </a:ln>
+        </p:spPr>
+      </p:sp>
+      <p:sp>
+        <p:nvSpPr>
+          <p:cNvPr id="4" name="Customers"/>
+          <p:cNvSpPr/>
+          <p:nvPr/>
+        </p:nvSpPr>
+        <p:spPr>
+          <a:xfrm>
+            <a:off x="2146300" y="2032000"/>
+            <a:ext cx="1397000" cy="1397000"/>
           </a:xfrm>
           <a:prstGeom prst="ellipse">
             <a:avLst/>
@@ -5642,7 +5665,7 @@
       </p:sp>
       <p:pic>
         <p:nvPicPr>
-          <p:cNvPr id="4" name="Image 0" descr="The bank sends">    </p:cNvPr>
+          <p:cNvPr id="5" name="Image 0" descr="Customers">    </p:cNvPr>
           <p:cNvPicPr>
             <a:picLocks noChangeAspect="1"/>
           </p:cNvPicPr>
@@ -5656,17 +5679,122 @@
         </p:blipFill>
         <p:spPr>
           <a:xfrm>
-            <a:off x="1790700" y="2981325"/>
-            <a:ext cx="533400" cy="533400"/>
+            <a:off x="2540000" y="2425700"/>
+            <a:ext cx="609600" cy="609600"/>
           </a:xfrm>
           <a:prstGeom prst="rect">
             <a:avLst/>
           </a:prstGeom>
         </p:spPr>
       </p:pic>
+      <p:sp>
+        <p:nvSpPr>
+          <p:cNvPr id="6" name="Text 3"/>
+          <p:cNvSpPr txBox="1"/>
+          <p:nvPr/>
+        </p:nvSpPr>
+        <p:spPr>
+          <a:xfrm>
+            <a:off x="1320800" y="3619500"/>
+            <a:ext cx="3048000" cy="254000"/>
+          </a:xfrm>
+          <a:prstGeom prst="rect">
+            <a:avLst/>
+          </a:prstGeom>
+          <a:noFill/>
+          <a:ln/>
+        </p:spPr>
+        <p:txBody>
+          <a:bodyPr wrap="square" lIns="0" tIns="0" rIns="0" bIns="0" rtlCol="0" anchor="t"/>
+          <a:lstStyle/>
+          <a:p>
+            <a:pPr algn="ctr" indent="0" marL="0">
+              <a:buNone/>
+            </a:pPr>
+            <a:r>
+              <a:rPr lang="en-US" sz="2000" dirty="0">
+                <a:solidFill>
+                  <a:schemeClr val="tx1"/>
+                </a:solidFill>
+                <a:latin typeface="Inter Display SemiBold" pitchFamily="34" charset="0"/>
+                <a:ea typeface="Inter Display SemiBold" pitchFamily="34" charset="-122"/>
+                <a:cs typeface="Inter Display SemiBold" pitchFamily="34" charset="-120"/>
+              </a:rPr>
+              <a:t>Customers</a:t>
+            </a:r>
+            <a:endParaRPr lang="en-US" sz="2000" dirty="0"/>
+          </a:p>
+        </p:txBody>
+      </p:sp>
+      <p:sp>
+        <p:nvSpPr>
+          <p:cNvPr id="7" name="Text 4"/>
+          <p:cNvSpPr txBox="1"/>
+          <p:nvPr/>
+        </p:nvSpPr>
+        <p:spPr>
+          <a:xfrm>
+            <a:off x="1320800" y="3911600"/>
+            <a:ext cx="3048000" cy="203200"/>
+          </a:xfrm>
+          <a:prstGeom prst="rect">
+            <a:avLst/>
+          </a:prstGeom>
+          <a:noFill/>
+          <a:ln/>
+        </p:spPr>
+        <p:txBody>
+          <a:bodyPr wrap="square" lIns="0" tIns="0" rIns="0" bIns="0" rtlCol="0" anchor="t"/>
+          <a:lstStyle/>
+          <a:p>
+            <a:pPr algn="ctr" indent="0" marL="0">
+              <a:buNone/>
+            </a:pPr>
+            <a:r>
+              <a:rPr lang="en-US" sz="1400" dirty="0">
+                <a:solidFill>
+                  <a:schemeClr val="tx2"/>
+                </a:solidFill>
+                <a:latin typeface="Inter" pitchFamily="34" charset="0"/>
+                <a:ea typeface="Inter" pitchFamily="34" charset="-122"/>
+                <a:cs typeface="Inter" pitchFamily="34" charset="-120"/>
+              </a:rPr>
+              <a:t>Check before acting</a:t>
+            </a:r>
+            <a:endParaRPr lang="en-US" sz="1400" dirty="0"/>
+          </a:p>
+        </p:txBody>
+      </p:sp>
+      <p:sp>
+        <p:nvSpPr>
+          <p:cNvPr id="8" name="Traders and SMEs"/>
+          <p:cNvSpPr/>
+          <p:nvPr/>
+        </p:nvSpPr>
+        <p:spPr>
+          <a:xfrm>
+            <a:off x="5397500" y="2032000"/>
+            <a:ext cx="1397000" cy="1397000"/>
+          </a:xfrm>
+          <a:prstGeom prst="ellipse">
+            <a:avLst/>
+          </a:prstGeom>
+          <a:solidFill>
+            <a:srgbClr val="0A7A55"/>
+          </a:solidFill>
+          <a:ln/>
+          <a:effectLst>
+            <a:outerShdw sx="100000" sy="100000" kx="0" ky="0" algn="bl" rotWithShape="0" blurRad="228600" dist="76200" dir="5400000">
+              <a:srgbClr val="0E1512">
+                <a:alpha val="15000"/>
+              </a:srgbClr>
+            </a:outerShdw>
+          </a:effectLst>
+        </p:spPr>
+      </p:sp>
       <p:pic>
         <p:nvPicPr>
-          <p:cNvPr id="5" name="App screenshot: Customer shares it" descr="Customer shares it">    </p:cNvPr>
+          <p:cNvPr id="9" name="Image 1" descr="Traders and SMEs">    </p:cNvPr>
           <p:cNvPicPr>
             <a:picLocks noChangeAspect="1"/>
           </p:cNvPicPr>
@@ -5680,17 +5808,122 @@
         </p:blipFill>
         <p:spPr>
           <a:xfrm>
-            <a:off x="3066256" y="1440656"/>
-            <a:ext cx="2008187" cy="3614738"/>
+            <a:off x="5791200" y="2425700"/>
+            <a:ext cx="609600" cy="609600"/>
           </a:xfrm>
           <a:prstGeom prst="rect">
             <a:avLst/>
           </a:prstGeom>
         </p:spPr>
       </p:pic>
+      <p:sp>
+        <p:nvSpPr>
+          <p:cNvPr id="10" name="Text 6"/>
+          <p:cNvSpPr txBox="1"/>
+          <p:nvPr/>
+        </p:nvSpPr>
+        <p:spPr>
+          <a:xfrm>
+            <a:off x="4572000" y="3619500"/>
+            <a:ext cx="3048000" cy="254000"/>
+          </a:xfrm>
+          <a:prstGeom prst="rect">
+            <a:avLst/>
+          </a:prstGeom>
+          <a:noFill/>
+          <a:ln/>
+        </p:spPr>
+        <p:txBody>
+          <a:bodyPr wrap="square" lIns="0" tIns="0" rIns="0" bIns="0" rtlCol="0" anchor="t"/>
+          <a:lstStyle/>
+          <a:p>
+            <a:pPr algn="ctr" indent="0" marL="0">
+              <a:buNone/>
+            </a:pPr>
+            <a:r>
+              <a:rPr lang="en-US" sz="2000" dirty="0">
+                <a:solidFill>
+                  <a:schemeClr val="tx1"/>
+                </a:solidFill>
+                <a:latin typeface="Inter Display SemiBold" pitchFamily="34" charset="0"/>
+                <a:ea typeface="Inter Display SemiBold" pitchFamily="34" charset="-122"/>
+                <a:cs typeface="Inter Display SemiBold" pitchFamily="34" charset="-120"/>
+              </a:rPr>
+              <a:t>Traders and SMEs</a:t>
+            </a:r>
+            <a:endParaRPr lang="en-US" sz="2000" dirty="0"/>
+          </a:p>
+        </p:txBody>
+      </p:sp>
+      <p:sp>
+        <p:nvSpPr>
+          <p:cNvPr id="11" name="Text 7"/>
+          <p:cNvSpPr txBox="1"/>
+          <p:nvPr/>
+        </p:nvSpPr>
+        <p:spPr>
+          <a:xfrm>
+            <a:off x="4572000" y="3911600"/>
+            <a:ext cx="3048000" cy="203200"/>
+          </a:xfrm>
+          <a:prstGeom prst="rect">
+            <a:avLst/>
+          </a:prstGeom>
+          <a:noFill/>
+          <a:ln/>
+        </p:spPr>
+        <p:txBody>
+          <a:bodyPr wrap="square" lIns="0" tIns="0" rIns="0" bIns="0" rtlCol="0" anchor="t"/>
+          <a:lstStyle/>
+          <a:p>
+            <a:pPr algn="ctr" indent="0" marL="0">
+              <a:buNone/>
+            </a:pPr>
+            <a:r>
+              <a:rPr lang="en-US" sz="1400" dirty="0">
+                <a:solidFill>
+                  <a:schemeClr val="tx2"/>
+                </a:solidFill>
+                <a:latin typeface="Inter" pitchFamily="34" charset="0"/>
+                <a:ea typeface="Inter" pitchFamily="34" charset="-122"/>
+                <a:cs typeface="Inter" pitchFamily="34" charset="-120"/>
+              </a:rPr>
+              <a:t>Confirm every payment</a:t>
+            </a:r>
+            <a:endParaRPr lang="en-US" sz="1400" dirty="0"/>
+          </a:p>
+        </p:txBody>
+      </p:sp>
+      <p:sp>
+        <p:nvSpPr>
+          <p:cNvPr id="12" name="Banks"/>
+          <p:cNvSpPr/>
+          <p:nvPr/>
+        </p:nvSpPr>
+        <p:spPr>
+          <a:xfrm>
+            <a:off x="8648700" y="2032000"/>
+            <a:ext cx="1397000" cy="1397000"/>
+          </a:xfrm>
+          <a:prstGeom prst="ellipse">
+            <a:avLst/>
+          </a:prstGeom>
+          <a:solidFill>
+            <a:srgbClr val="0A7A55"/>
+          </a:solidFill>
+          <a:ln/>
+          <a:effectLst>
+            <a:outerShdw sx="100000" sy="100000" kx="0" ky="0" algn="bl" rotWithShape="0" blurRad="228600" dist="76200" dir="5400000">
+              <a:srgbClr val="0E1512">
+                <a:alpha val="15000"/>
+              </a:srgbClr>
+            </a:outerShdw>
+          </a:effectLst>
+        </p:spPr>
+      </p:sp>
       <p:pic>
         <p:nvPicPr>
-          <p:cNvPr id="6" name="App screenshot: Sent by your bank" descr="Sent by your bank">    </p:cNvPr>
+          <p:cNvPr id="13" name="Image 2" descr="Banks">    </p:cNvPr>
           <p:cNvPicPr>
             <a:picLocks noChangeAspect="1"/>
           </p:cNvPicPr>
@@ -5704,17 +5937,161 @@
         </p:blipFill>
         <p:spPr>
           <a:xfrm>
-            <a:off x="4983956" y="1440656"/>
-            <a:ext cx="2008187" cy="3614738"/>
+            <a:off x="9042400" y="2425700"/>
+            <a:ext cx="609600" cy="609600"/>
           </a:xfrm>
           <a:prstGeom prst="rect">
             <a:avLst/>
           </a:prstGeom>
         </p:spPr>
       </p:pic>
+      <p:sp>
+        <p:nvSpPr>
+          <p:cNvPr id="14" name="Text 9"/>
+          <p:cNvSpPr txBox="1"/>
+          <p:nvPr/>
+        </p:nvSpPr>
+        <p:spPr>
+          <a:xfrm>
+            <a:off x="7823200" y="3619500"/>
+            <a:ext cx="3048000" cy="254000"/>
+          </a:xfrm>
+          <a:prstGeom prst="rect">
+            <a:avLst/>
+          </a:prstGeom>
+          <a:noFill/>
+          <a:ln/>
+        </p:spPr>
+        <p:txBody>
+          <a:bodyPr wrap="square" lIns="0" tIns="0" rIns="0" bIns="0" rtlCol="0" anchor="t"/>
+          <a:lstStyle/>
+          <a:p>
+            <a:pPr algn="ctr" indent="0" marL="0">
+              <a:buNone/>
+            </a:pPr>
+            <a:r>
+              <a:rPr lang="en-US" sz="2000" dirty="0">
+                <a:solidFill>
+                  <a:schemeClr val="tx1"/>
+                </a:solidFill>
+                <a:latin typeface="Inter Display SemiBold" pitchFamily="34" charset="0"/>
+                <a:ea typeface="Inter Display SemiBold" pitchFamily="34" charset="-122"/>
+                <a:cs typeface="Inter Display SemiBold" pitchFamily="34" charset="-120"/>
+              </a:rPr>
+              <a:t>Banks</a:t>
+            </a:r>
+            <a:endParaRPr lang="en-US" sz="2000" dirty="0"/>
+          </a:p>
+        </p:txBody>
+      </p:sp>
+      <p:sp>
+        <p:nvSpPr>
+          <p:cNvPr id="15" name="Text 10"/>
+          <p:cNvSpPr txBox="1"/>
+          <p:nvPr/>
+        </p:nvSpPr>
+        <p:spPr>
+          <a:xfrm>
+            <a:off x="7823200" y="3911600"/>
+            <a:ext cx="3048000" cy="203200"/>
+          </a:xfrm>
+          <a:prstGeom prst="rect">
+            <a:avLst/>
+          </a:prstGeom>
+          <a:noFill/>
+          <a:ln/>
+        </p:spPr>
+        <p:txBody>
+          <a:bodyPr wrap="square" lIns="0" tIns="0" rIns="0" bIns="0" rtlCol="0" anchor="t"/>
+          <a:lstStyle/>
+          <a:p>
+            <a:pPr algn="ctr" indent="0" marL="0">
+              <a:buNone/>
+            </a:pPr>
+            <a:r>
+              <a:rPr lang="en-US" sz="1400" dirty="0">
+                <a:solidFill>
+                  <a:schemeClr val="tx2"/>
+                </a:solidFill>
+                <a:latin typeface="Inter" pitchFamily="34" charset="0"/>
+                <a:ea typeface="Inter" pitchFamily="34" charset="-122"/>
+                <a:cs typeface="Inter" pitchFamily="34" charset="-120"/>
+              </a:rPr>
+              <a:t>Spot scam waves early</a:t>
+            </a:r>
+            <a:endParaRPr lang="en-US" sz="1400" dirty="0"/>
+          </a:p>
+        </p:txBody>
+      </p:sp>
+      <p:sp>
+        <p:nvSpPr>
+          <p:cNvPr id="16" name="Text 11"/>
+          <p:cNvSpPr txBox="1"/>
+          <p:nvPr/>
+        </p:nvSpPr>
+        <p:spPr>
+          <a:xfrm>
+            <a:off x="812800" y="4699000"/>
+            <a:ext cx="10566400" cy="203200"/>
+          </a:xfrm>
+          <a:prstGeom prst="rect">
+            <a:avLst/>
+          </a:prstGeom>
+          <a:noFill/>
+          <a:ln/>
+        </p:spPr>
+        <p:txBody>
+          <a:bodyPr wrap="square" lIns="0" tIns="0" rIns="0" bIns="0" rtlCol="0" anchor="t"/>
+          <a:lstStyle/>
+          <a:p>
+            <a:pPr algn="ctr" indent="0" marL="0">
+              <a:buNone/>
+            </a:pPr>
+            <a:r>
+              <a:rPr lang="en-US" sz="1400" dirty="0">
+                <a:solidFill>
+                  <a:schemeClr val="tx2"/>
+                </a:solidFill>
+                <a:latin typeface="Inter Medium" pitchFamily="34" charset="0"/>
+                <a:ea typeface="Inter Medium" pitchFamily="34" charset="-122"/>
+                <a:cs typeface="Inter Medium" pitchFamily="34" charset="-120"/>
+              </a:rPr>
+              <a:t>Works on any phone</a:t>
+            </a:r>
+            <a:endParaRPr lang="en-US" sz="1400" dirty="0"/>
+          </a:p>
+        </p:txBody>
+      </p:sp>
+      <p:sp>
+        <p:nvSpPr>
+          <p:cNvPr id="17" name="Channel: Bank app"/>
+          <p:cNvSpPr/>
+          <p:nvPr/>
+        </p:nvSpPr>
+        <p:spPr>
+          <a:xfrm>
+            <a:off x="1879600" y="5003800"/>
+            <a:ext cx="1981200" cy="482600"/>
+          </a:xfrm>
+          <a:prstGeom prst="roundRect">
+            <a:avLst>
+              <a:gd name="adj" fmla="val 50000"/>
+            </a:avLst>
+          </a:prstGeom>
+          <a:solidFill>
+            <a:srgbClr val="FFFFFF"/>
+          </a:solidFill>
+          <a:ln w="12700">
+            <a:solidFill>
+              <a:srgbClr val="DAD8D2"/>
+            </a:solidFill>
+            <a:prstDash val="solid"/>
+          </a:ln>
+        </p:spPr>
+      </p:sp>
       <p:pic>
         <p:nvPicPr>
-          <p:cNvPr id="7" name="App screenshot: Tampered copy: not confirmed" descr="Tampered copy: not confirmed">    </p:cNvPr>
+          <p:cNvPr id="18" name="Image 3" descr="preencoded.png">    </p:cNvPr>
           <p:cNvPicPr>
             <a:picLocks noChangeAspect="1"/>
           </p:cNvPicPr>
@@ -5728,17 +6105,83 @@
         </p:blipFill>
         <p:spPr>
           <a:xfrm>
-            <a:off x="6901656" y="1440656"/>
-            <a:ext cx="2008187" cy="3614738"/>
+            <a:off x="2032000" y="5130800"/>
+            <a:ext cx="228600" cy="228600"/>
           </a:xfrm>
           <a:prstGeom prst="rect">
             <a:avLst/>
           </a:prstGeom>
         </p:spPr>
       </p:pic>
+      <p:sp>
+        <p:nvSpPr>
+          <p:cNvPr id="19" name="Text 13"/>
+          <p:cNvSpPr txBox="1"/>
+          <p:nvPr/>
+        </p:nvSpPr>
+        <p:spPr>
+          <a:xfrm>
+            <a:off x="2336800" y="5003800"/>
+            <a:ext cx="1422400" cy="482600"/>
+          </a:xfrm>
+          <a:prstGeom prst="rect">
+            <a:avLst/>
+          </a:prstGeom>
+          <a:noFill/>
+          <a:ln/>
+        </p:spPr>
+        <p:txBody>
+          <a:bodyPr wrap="square" lIns="0" tIns="0" rIns="0" bIns="0" rtlCol="0" anchor="ctr"/>
+          <a:lstStyle/>
+          <a:p>
+            <a:pPr algn="l" indent="0" marL="0">
+              <a:buNone/>
+            </a:pPr>
+            <a:r>
+              <a:rPr lang="en-US" sz="1400" dirty="0">
+                <a:solidFill>
+                  <a:schemeClr val="tx1"/>
+                </a:solidFill>
+                <a:latin typeface="Inter Medium" pitchFamily="34" charset="0"/>
+                <a:ea typeface="Inter Medium" pitchFamily="34" charset="-122"/>
+                <a:cs typeface="Inter Medium" pitchFamily="34" charset="-120"/>
+              </a:rPr>
+              <a:t>Bank app</a:t>
+            </a:r>
+            <a:endParaRPr lang="en-US" sz="1400" dirty="0"/>
+          </a:p>
+        </p:txBody>
+      </p:sp>
+      <p:sp>
+        <p:nvSpPr>
+          <p:cNvPr id="20" name="Channel: WhatsApp"/>
+          <p:cNvSpPr/>
+          <p:nvPr/>
+        </p:nvSpPr>
+        <p:spPr>
+          <a:xfrm>
+            <a:off x="4038600" y="5003800"/>
+            <a:ext cx="1981200" cy="482600"/>
+          </a:xfrm>
+          <a:prstGeom prst="roundRect">
+            <a:avLst>
+              <a:gd name="adj" fmla="val 50000"/>
+            </a:avLst>
+          </a:prstGeom>
+          <a:solidFill>
+            <a:srgbClr val="FFFFFF"/>
+          </a:solidFill>
+          <a:ln w="12700">
+            <a:solidFill>
+              <a:srgbClr val="DAD8D2"/>
+            </a:solidFill>
+            <a:prstDash val="solid"/>
+          </a:ln>
+        </p:spPr>
+      </p:sp>
       <p:pic>
         <p:nvPicPr>
-          <p:cNvPr id="8" name="App screenshot: Bank calls: same code" descr="Bank calls: same code">    </p:cNvPr>
+          <p:cNvPr id="21" name="Image 4" descr="preencoded.png">    </p:cNvPr>
           <p:cNvPicPr>
             <a:picLocks noChangeAspect="1"/>
           </p:cNvPicPr>
@@ -5752,8 +6195,8 @@
         </p:blipFill>
         <p:spPr>
           <a:xfrm>
-            <a:off x="8819356" y="1440656"/>
-            <a:ext cx="2008187" cy="3614738"/>
+            <a:off x="4191000" y="5130800"/>
+            <a:ext cx="228600" cy="228600"/>
           </a:xfrm>
           <a:prstGeom prst="rect">
             <a:avLst/>
@@ -5762,114 +6205,14 @@
       </p:pic>
       <p:sp>
         <p:nvSpPr>
-          <p:cNvPr id="9" name="Shape 2"/>
-          <p:cNvSpPr/>
-          <p:nvPr/>
-        </p:nvSpPr>
-        <p:spPr>
-          <a:xfrm>
-            <a:off x="2946400" y="3133725"/>
-            <a:ext cx="254000" cy="228600"/>
-          </a:xfrm>
-          <a:prstGeom prst="rightArrow">
-            <a:avLst/>
-          </a:prstGeom>
-          <a:solidFill>
-            <a:srgbClr val="34C48E"/>
-          </a:solidFill>
-          <a:ln/>
-        </p:spPr>
-      </p:sp>
-      <p:sp>
-        <p:nvSpPr>
-          <p:cNvPr id="10" name="Shape 3"/>
-          <p:cNvSpPr/>
-          <p:nvPr/>
-        </p:nvSpPr>
-        <p:spPr>
-          <a:xfrm>
-            <a:off x="4902200" y="3133725"/>
-            <a:ext cx="254000" cy="228600"/>
-          </a:xfrm>
-          <a:prstGeom prst="rightArrow">
-            <a:avLst/>
-          </a:prstGeom>
-          <a:solidFill>
-            <a:srgbClr val="34C48E"/>
-          </a:solidFill>
-          <a:ln/>
-        </p:spPr>
-      </p:sp>
-      <p:sp>
-        <p:nvSpPr>
-          <p:cNvPr id="11" name="Shape 4"/>
-          <p:cNvSpPr/>
-          <p:nvPr/>
-        </p:nvSpPr>
-        <p:spPr>
-          <a:xfrm>
-            <a:off x="6819900" y="3133725"/>
-            <a:ext cx="254000" cy="228600"/>
-          </a:xfrm>
-          <a:prstGeom prst="rightArrow">
-            <a:avLst/>
-          </a:prstGeom>
-          <a:solidFill>
-            <a:srgbClr val="34C48E"/>
-          </a:solidFill>
-          <a:ln/>
-        </p:spPr>
-      </p:sp>
-      <p:sp>
-        <p:nvSpPr>
-          <p:cNvPr id="12" name="Shape 5"/>
-          <p:cNvSpPr/>
-          <p:nvPr/>
-        </p:nvSpPr>
-        <p:spPr>
-          <a:xfrm>
-            <a:off x="8737600" y="3133725"/>
-            <a:ext cx="254000" cy="228600"/>
-          </a:xfrm>
-          <a:prstGeom prst="rightArrow">
-            <a:avLst/>
-          </a:prstGeom>
-          <a:solidFill>
-            <a:srgbClr val="34C48E"/>
-          </a:solidFill>
-          <a:ln/>
-        </p:spPr>
-      </p:sp>
-      <p:sp>
-        <p:nvSpPr>
-          <p:cNvPr id="13" name="Shape 6"/>
-          <p:cNvSpPr/>
-          <p:nvPr/>
-        </p:nvSpPr>
-        <p:spPr>
-          <a:xfrm>
-            <a:off x="1930400" y="5080000"/>
-            <a:ext cx="254000" cy="254000"/>
-          </a:xfrm>
-          <a:prstGeom prst="ellipse">
-            <a:avLst/>
-          </a:prstGeom>
-          <a:solidFill>
-            <a:srgbClr val="0A7A55"/>
-          </a:solidFill>
-          <a:ln/>
-        </p:spPr>
-      </p:sp>
-      <p:sp>
-        <p:nvSpPr>
-          <p:cNvPr id="14" name="Text 7"/>
+          <p:cNvPr id="22" name="Text 15"/>
           <p:cNvSpPr txBox="1"/>
           <p:nvPr/>
         </p:nvSpPr>
         <p:spPr>
           <a:xfrm>
-            <a:off x="1930400" y="5080000"/>
-            <a:ext cx="254000" cy="254000"/>
+            <a:off x="4495800" y="5003800"/>
+            <a:ext cx="1422400" cy="482600"/>
           </a:xfrm>
           <a:prstGeom prst="rect">
             <a:avLst/>
@@ -5881,58 +6224,19 @@
           <a:bodyPr wrap="square" lIns="0" tIns="0" rIns="0" bIns="0" rtlCol="0" anchor="ctr"/>
           <a:lstStyle/>
           <a:p>
-            <a:pPr algn="ctr" indent="0" marL="0">
+            <a:pPr algn="l" indent="0" marL="0">
               <a:buNone/>
             </a:pPr>
             <a:r>
               <a:rPr lang="en-US" sz="1400" dirty="0">
                 <a:solidFill>
-                  <a:srgbClr val="FFFFFF"/>
-                </a:solidFill>
-                <a:latin typeface="Inter SemiBold" pitchFamily="34" charset="0"/>
-                <a:ea typeface="Inter SemiBold" pitchFamily="34" charset="-122"/>
-                <a:cs typeface="Inter SemiBold" pitchFamily="34" charset="-120"/>
-              </a:rPr>
-              <a:t>1</a:t>
-            </a:r>
-            <a:endParaRPr lang="en-US" sz="1400" dirty="0"/>
-          </a:p>
-        </p:txBody>
-      </p:sp>
-      <p:sp>
-        <p:nvSpPr>
-          <p:cNvPr id="15" name="Text 8"/>
-          <p:cNvSpPr txBox="1"/>
-          <p:nvPr/>
-        </p:nvSpPr>
-        <p:spPr>
-          <a:xfrm>
-            <a:off x="1168400" y="5410200"/>
-            <a:ext cx="1778000" cy="381000"/>
-          </a:xfrm>
-          <a:prstGeom prst="rect">
-            <a:avLst/>
-          </a:prstGeom>
-          <a:noFill/>
-          <a:ln/>
-        </p:spPr>
-        <p:txBody>
-          <a:bodyPr wrap="square" lIns="0" tIns="0" rIns="0" bIns="0" rtlCol="0" anchor="t"/>
-          <a:lstStyle/>
-          <a:p>
-            <a:pPr algn="ctr" indent="0" marL="0">
-              <a:buNone/>
-            </a:pPr>
-            <a:r>
-              <a:rPr lang="en-US" sz="1400" dirty="0">
-                <a:solidFill>
-                  <a:schemeClr val="bg1"/>
+                  <a:schemeClr val="tx1"/>
                 </a:solidFill>
                 <a:latin typeface="Inter Medium" pitchFamily="34" charset="0"/>
                 <a:ea typeface="Inter Medium" pitchFamily="34" charset="-122"/>
                 <a:cs typeface="Inter Medium" pitchFamily="34" charset="-120"/>
               </a:rPr>
-              <a:t>The bank sends a real alert</a:t>
+              <a:t>WhatsApp</a:t>
             </a:r>
             <a:endParaRPr lang="en-US" sz="1400" dirty="0"/>
           </a:p>
@@ -5940,34 +6244,65 @@
       </p:sp>
       <p:sp>
         <p:nvSpPr>
-          <p:cNvPr id="16" name="Shape 9"/>
+          <p:cNvPr id="23" name="Channel: USSD, no data"/>
           <p:cNvSpPr/>
           <p:nvPr/>
         </p:nvSpPr>
         <p:spPr>
           <a:xfrm>
-            <a:off x="3943350" y="5080000"/>
-            <a:ext cx="254000" cy="254000"/>
-          </a:xfrm>
-          <a:prstGeom prst="ellipse">
-            <a:avLst/>
+            <a:off x="6197600" y="5003800"/>
+            <a:ext cx="1981200" cy="482600"/>
+          </a:xfrm>
+          <a:prstGeom prst="roundRect">
+            <a:avLst>
+              <a:gd name="adj" fmla="val 50000"/>
+            </a:avLst>
           </a:prstGeom>
           <a:solidFill>
-            <a:srgbClr val="0A7A55"/>
+            <a:srgbClr val="FFFFFF"/>
           </a:solidFill>
-          <a:ln/>
-        </p:spPr>
-      </p:sp>
-      <p:sp>
-        <p:nvSpPr>
-          <p:cNvPr id="17" name="Text 10"/>
+          <a:ln w="12700">
+            <a:solidFill>
+              <a:srgbClr val="DAD8D2"/>
+            </a:solidFill>
+            <a:prstDash val="solid"/>
+          </a:ln>
+        </p:spPr>
+      </p:sp>
+      <p:pic>
+        <p:nvPicPr>
+          <p:cNvPr id="24" name="Image 5" descr="preencoded.png">    </p:cNvPr>
+          <p:cNvPicPr>
+            <a:picLocks noChangeAspect="1"/>
+          </p:cNvPicPr>
+          <p:nvPr/>
+        </p:nvPicPr>
+        <p:blipFill>
+          <a:blip r:embed="rId6"/>
+          <a:stretch>
+            <a:fillRect/>
+          </a:stretch>
+        </p:blipFill>
+        <p:spPr>
+          <a:xfrm>
+            <a:off x="6350000" y="5130800"/>
+            <a:ext cx="228600" cy="228600"/>
+          </a:xfrm>
+          <a:prstGeom prst="rect">
+            <a:avLst/>
+          </a:prstGeom>
+        </p:spPr>
+      </p:pic>
+      <p:sp>
+        <p:nvSpPr>
+          <p:cNvPr id="25" name="Text 17"/>
           <p:cNvSpPr txBox="1"/>
           <p:nvPr/>
         </p:nvSpPr>
         <p:spPr>
           <a:xfrm>
-            <a:off x="3943350" y="5080000"/>
-            <a:ext cx="254000" cy="254000"/>
+            <a:off x="6654800" y="5003800"/>
+            <a:ext cx="1422400" cy="482600"/>
           </a:xfrm>
           <a:prstGeom prst="rect">
             <a:avLst/>
@@ -5979,58 +6314,19 @@
           <a:bodyPr wrap="square" lIns="0" tIns="0" rIns="0" bIns="0" rtlCol="0" anchor="ctr"/>
           <a:lstStyle/>
           <a:p>
-            <a:pPr algn="ctr" indent="0" marL="0">
+            <a:pPr algn="l" indent="0" marL="0">
               <a:buNone/>
             </a:pPr>
             <a:r>
               <a:rPr lang="en-US" sz="1400" dirty="0">
                 <a:solidFill>
-                  <a:srgbClr val="FFFFFF"/>
-                </a:solidFill>
-                <a:latin typeface="Inter SemiBold" pitchFamily="34" charset="0"/>
-                <a:ea typeface="Inter SemiBold" pitchFamily="34" charset="-122"/>
-                <a:cs typeface="Inter SemiBold" pitchFamily="34" charset="-120"/>
-              </a:rPr>
-              <a:t>2</a:t>
-            </a:r>
-            <a:endParaRPr lang="en-US" sz="1400" dirty="0"/>
-          </a:p>
-        </p:txBody>
-      </p:sp>
-      <p:sp>
-        <p:nvSpPr>
-          <p:cNvPr id="18" name="Text 11"/>
-          <p:cNvSpPr txBox="1"/>
-          <p:nvPr/>
-        </p:nvSpPr>
-        <p:spPr>
-          <a:xfrm>
-            <a:off x="3276600" y="5410200"/>
-            <a:ext cx="1587500" cy="381000"/>
-          </a:xfrm>
-          <a:prstGeom prst="rect">
-            <a:avLst/>
-          </a:prstGeom>
-          <a:noFill/>
-          <a:ln/>
-        </p:spPr>
-        <p:txBody>
-          <a:bodyPr wrap="square" lIns="0" tIns="0" rIns="0" bIns="0" rtlCol="0" anchor="t"/>
-          <a:lstStyle/>
-          <a:p>
-            <a:pPr algn="ctr" indent="0" marL="0">
-              <a:buNone/>
-            </a:pPr>
-            <a:r>
-              <a:rPr lang="en-US" sz="1400" dirty="0">
-                <a:solidFill>
-                  <a:schemeClr val="bg1"/>
+                  <a:schemeClr val="tx1"/>
                 </a:solidFill>
                 <a:latin typeface="Inter Medium" pitchFamily="34" charset="0"/>
                 <a:ea typeface="Inter Medium" pitchFamily="34" charset="-122"/>
                 <a:cs typeface="Inter Medium" pitchFamily="34" charset="-120"/>
               </a:rPr>
-              <a:t>Customer shares it</a:t>
+              <a:t>USSD, no data</a:t>
             </a:r>
             <a:endParaRPr lang="en-US" sz="1400" dirty="0"/>
           </a:p>
@@ -6038,34 +6334,65 @@
       </p:sp>
       <p:sp>
         <p:nvSpPr>
-          <p:cNvPr id="19" name="Shape 12"/>
+          <p:cNvPr id="26" name="Channel: 5 languages"/>
           <p:cNvSpPr/>
           <p:nvPr/>
         </p:nvSpPr>
         <p:spPr>
           <a:xfrm>
-            <a:off x="5861050" y="5080000"/>
-            <a:ext cx="254000" cy="254000"/>
-          </a:xfrm>
-          <a:prstGeom prst="ellipse">
-            <a:avLst/>
+            <a:off x="8356600" y="5003800"/>
+            <a:ext cx="1981200" cy="482600"/>
+          </a:xfrm>
+          <a:prstGeom prst="roundRect">
+            <a:avLst>
+              <a:gd name="adj" fmla="val 50000"/>
+            </a:avLst>
           </a:prstGeom>
           <a:solidFill>
-            <a:srgbClr val="0A7A55"/>
+            <a:srgbClr val="FFFFFF"/>
           </a:solidFill>
-          <a:ln/>
-        </p:spPr>
-      </p:sp>
-      <p:sp>
-        <p:nvSpPr>
-          <p:cNvPr id="20" name="Text 13"/>
+          <a:ln w="12700">
+            <a:solidFill>
+              <a:srgbClr val="DAD8D2"/>
+            </a:solidFill>
+            <a:prstDash val="solid"/>
+          </a:ln>
+        </p:spPr>
+      </p:sp>
+      <p:pic>
+        <p:nvPicPr>
+          <p:cNvPr id="27" name="Image 6" descr="preencoded.png">    </p:cNvPr>
+          <p:cNvPicPr>
+            <a:picLocks noChangeAspect="1"/>
+          </p:cNvPicPr>
+          <p:nvPr/>
+        </p:nvPicPr>
+        <p:blipFill>
+          <a:blip r:embed="rId7"/>
+          <a:stretch>
+            <a:fillRect/>
+          </a:stretch>
+        </p:blipFill>
+        <p:spPr>
+          <a:xfrm>
+            <a:off x="8509000" y="5130800"/>
+            <a:ext cx="228600" cy="228600"/>
+          </a:xfrm>
+          <a:prstGeom prst="rect">
+            <a:avLst/>
+          </a:prstGeom>
+        </p:spPr>
+      </p:pic>
+      <p:sp>
+        <p:nvSpPr>
+          <p:cNvPr id="28" name="Text 19"/>
           <p:cNvSpPr txBox="1"/>
           <p:nvPr/>
         </p:nvSpPr>
         <p:spPr>
           <a:xfrm>
-            <a:off x="5861050" y="5080000"/>
-            <a:ext cx="254000" cy="254000"/>
+            <a:off x="8813800" y="5003800"/>
+            <a:ext cx="1422400" cy="482600"/>
           </a:xfrm>
           <a:prstGeom prst="rect">
             <a:avLst/>
@@ -6077,254 +6404,19 @@
           <a:bodyPr wrap="square" lIns="0" tIns="0" rIns="0" bIns="0" rtlCol="0" anchor="ctr"/>
           <a:lstStyle/>
           <a:p>
-            <a:pPr algn="ctr" indent="0" marL="0">
+            <a:pPr algn="l" indent="0" marL="0">
               <a:buNone/>
             </a:pPr>
             <a:r>
               <a:rPr lang="en-US" sz="1400" dirty="0">
                 <a:solidFill>
-                  <a:srgbClr val="FFFFFF"/>
-                </a:solidFill>
-                <a:latin typeface="Inter SemiBold" pitchFamily="34" charset="0"/>
-                <a:ea typeface="Inter SemiBold" pitchFamily="34" charset="-122"/>
-                <a:cs typeface="Inter SemiBold" pitchFamily="34" charset="-120"/>
-              </a:rPr>
-              <a:t>3</a:t>
-            </a:r>
-            <a:endParaRPr lang="en-US" sz="1400" dirty="0"/>
-          </a:p>
-        </p:txBody>
-      </p:sp>
-      <p:sp>
-        <p:nvSpPr>
-          <p:cNvPr id="21" name="Text 14"/>
-          <p:cNvSpPr txBox="1"/>
-          <p:nvPr/>
-        </p:nvSpPr>
-        <p:spPr>
-          <a:xfrm>
-            <a:off x="5194300" y="5410200"/>
-            <a:ext cx="1587500" cy="381000"/>
-          </a:xfrm>
-          <a:prstGeom prst="rect">
-            <a:avLst/>
-          </a:prstGeom>
-          <a:noFill/>
-          <a:ln/>
-        </p:spPr>
-        <p:txBody>
-          <a:bodyPr wrap="square" lIns="0" tIns="0" rIns="0" bIns="0" rtlCol="0" anchor="t"/>
-          <a:lstStyle/>
-          <a:p>
-            <a:pPr algn="ctr" indent="0" marL="0">
-              <a:buNone/>
-            </a:pPr>
-            <a:r>
-              <a:rPr lang="en-US" sz="1400" dirty="0">
-                <a:solidFill>
-                  <a:schemeClr val="bg1"/>
+                  <a:schemeClr val="tx1"/>
                 </a:solidFill>
                 <a:latin typeface="Inter Medium" pitchFamily="34" charset="0"/>
                 <a:ea typeface="Inter Medium" pitchFamily="34" charset="-122"/>
                 <a:cs typeface="Inter Medium" pitchFamily="34" charset="-120"/>
               </a:rPr>
-              <a:t>Sent by your bank</a:t>
-            </a:r>
-            <a:endParaRPr lang="en-US" sz="1400" dirty="0"/>
-          </a:p>
-        </p:txBody>
-      </p:sp>
-      <p:sp>
-        <p:nvSpPr>
-          <p:cNvPr id="22" name="Shape 15"/>
-          <p:cNvSpPr/>
-          <p:nvPr/>
-        </p:nvSpPr>
-        <p:spPr>
-          <a:xfrm>
-            <a:off x="7778750" y="5080000"/>
-            <a:ext cx="254000" cy="254000"/>
-          </a:xfrm>
-          <a:prstGeom prst="ellipse">
-            <a:avLst/>
-          </a:prstGeom>
-          <a:solidFill>
-            <a:srgbClr val="0A7A55"/>
-          </a:solidFill>
-          <a:ln/>
-        </p:spPr>
-      </p:sp>
-      <p:sp>
-        <p:nvSpPr>
-          <p:cNvPr id="23" name="Text 16"/>
-          <p:cNvSpPr txBox="1"/>
-          <p:nvPr/>
-        </p:nvSpPr>
-        <p:spPr>
-          <a:xfrm>
-            <a:off x="7778750" y="5080000"/>
-            <a:ext cx="254000" cy="254000"/>
-          </a:xfrm>
-          <a:prstGeom prst="rect">
-            <a:avLst/>
-          </a:prstGeom>
-          <a:noFill/>
-          <a:ln/>
-        </p:spPr>
-        <p:txBody>
-          <a:bodyPr wrap="square" lIns="0" tIns="0" rIns="0" bIns="0" rtlCol="0" anchor="ctr"/>
-          <a:lstStyle/>
-          <a:p>
-            <a:pPr algn="ctr" indent="0" marL="0">
-              <a:buNone/>
-            </a:pPr>
-            <a:r>
-              <a:rPr lang="en-US" sz="1400" dirty="0">
-                <a:solidFill>
-                  <a:srgbClr val="FFFFFF"/>
-                </a:solidFill>
-                <a:latin typeface="Inter SemiBold" pitchFamily="34" charset="0"/>
-                <a:ea typeface="Inter SemiBold" pitchFamily="34" charset="-122"/>
-                <a:cs typeface="Inter SemiBold" pitchFamily="34" charset="-120"/>
-              </a:rPr>
-              <a:t>4</a:t>
-            </a:r>
-            <a:endParaRPr lang="en-US" sz="1400" dirty="0"/>
-          </a:p>
-        </p:txBody>
-      </p:sp>
-      <p:sp>
-        <p:nvSpPr>
-          <p:cNvPr id="24" name="Text 17"/>
-          <p:cNvSpPr txBox="1"/>
-          <p:nvPr/>
-        </p:nvSpPr>
-        <p:spPr>
-          <a:xfrm>
-            <a:off x="7112000" y="5410200"/>
-            <a:ext cx="1587500" cy="381000"/>
-          </a:xfrm>
-          <a:prstGeom prst="rect">
-            <a:avLst/>
-          </a:prstGeom>
-          <a:noFill/>
-          <a:ln/>
-        </p:spPr>
-        <p:txBody>
-          <a:bodyPr wrap="square" lIns="0" tIns="0" rIns="0" bIns="0" rtlCol="0" anchor="t"/>
-          <a:lstStyle/>
-          <a:p>
-            <a:pPr algn="ctr" indent="0" marL="0">
-              <a:buNone/>
-            </a:pPr>
-            <a:r>
-              <a:rPr lang="en-US" sz="1400" dirty="0">
-                <a:solidFill>
-                  <a:schemeClr val="bg1"/>
-                </a:solidFill>
-                <a:latin typeface="Inter Medium" pitchFamily="34" charset="0"/>
-                <a:ea typeface="Inter Medium" pitchFamily="34" charset="-122"/>
-                <a:cs typeface="Inter Medium" pitchFamily="34" charset="-120"/>
-              </a:rPr>
-              <a:t>Tampered copy: not confirmed</a:t>
-            </a:r>
-            <a:endParaRPr lang="en-US" sz="1400" dirty="0"/>
-          </a:p>
-        </p:txBody>
-      </p:sp>
-      <p:sp>
-        <p:nvSpPr>
-          <p:cNvPr id="25" name="Shape 18"/>
-          <p:cNvSpPr/>
-          <p:nvPr/>
-        </p:nvSpPr>
-        <p:spPr>
-          <a:xfrm>
-            <a:off x="9696450" y="5080000"/>
-            <a:ext cx="254000" cy="254000"/>
-          </a:xfrm>
-          <a:prstGeom prst="ellipse">
-            <a:avLst/>
-          </a:prstGeom>
-          <a:solidFill>
-            <a:srgbClr val="0A7A55"/>
-          </a:solidFill>
-          <a:ln/>
-        </p:spPr>
-      </p:sp>
-      <p:sp>
-        <p:nvSpPr>
-          <p:cNvPr id="26" name="Text 19"/>
-          <p:cNvSpPr txBox="1"/>
-          <p:nvPr/>
-        </p:nvSpPr>
-        <p:spPr>
-          <a:xfrm>
-            <a:off x="9696450" y="5080000"/>
-            <a:ext cx="254000" cy="254000"/>
-          </a:xfrm>
-          <a:prstGeom prst="rect">
-            <a:avLst/>
-          </a:prstGeom>
-          <a:noFill/>
-          <a:ln/>
-        </p:spPr>
-        <p:txBody>
-          <a:bodyPr wrap="square" lIns="0" tIns="0" rIns="0" bIns="0" rtlCol="0" anchor="ctr"/>
-          <a:lstStyle/>
-          <a:p>
-            <a:pPr algn="ctr" indent="0" marL="0">
-              <a:buNone/>
-            </a:pPr>
-            <a:r>
-              <a:rPr lang="en-US" sz="1400" dirty="0">
-                <a:solidFill>
-                  <a:srgbClr val="FFFFFF"/>
-                </a:solidFill>
-                <a:latin typeface="Inter SemiBold" pitchFamily="34" charset="0"/>
-                <a:ea typeface="Inter SemiBold" pitchFamily="34" charset="-122"/>
-                <a:cs typeface="Inter SemiBold" pitchFamily="34" charset="-120"/>
-              </a:rPr>
-              <a:t>5</a:t>
-            </a:r>
-            <a:endParaRPr lang="en-US" sz="1400" dirty="0"/>
-          </a:p>
-        </p:txBody>
-      </p:sp>
-      <p:sp>
-        <p:nvSpPr>
-          <p:cNvPr id="27" name="Text 20"/>
-          <p:cNvSpPr txBox="1"/>
-          <p:nvPr/>
-        </p:nvSpPr>
-        <p:spPr>
-          <a:xfrm>
-            <a:off x="9029700" y="5410200"/>
-            <a:ext cx="1587500" cy="381000"/>
-          </a:xfrm>
-          <a:prstGeom prst="rect">
-            <a:avLst/>
-          </a:prstGeom>
-          <a:noFill/>
-          <a:ln/>
-        </p:spPr>
-        <p:txBody>
-          <a:bodyPr wrap="square" lIns="0" tIns="0" rIns="0" bIns="0" rtlCol="0" anchor="t"/>
-          <a:lstStyle/>
-          <a:p>
-            <a:pPr algn="ctr" indent="0" marL="0">
-              <a:buNone/>
-            </a:pPr>
-            <a:r>
-              <a:rPr lang="en-US" sz="1400" dirty="0">
-                <a:solidFill>
-                  <a:schemeClr val="bg1"/>
-                </a:solidFill>
-                <a:latin typeface="Inter Medium" pitchFamily="34" charset="0"/>
-                <a:ea typeface="Inter Medium" pitchFamily="34" charset="-122"/>
-                <a:cs typeface="Inter Medium" pitchFamily="34" charset="-120"/>
-              </a:rPr>
-              <a:t>Bank calls: same code on both screens</a:t>
+              <a:t>5 languages</a:t>
             </a:r>
             <a:endParaRPr lang="en-US" sz="1400" dirty="0"/>
           </a:p>
@@ -6360,7 +6452,7 @@
             <a:lvl1pPr>
               <a:defRPr sz="1100">
                 <a:solidFill>
-                  <a:schemeClr val="bg2"/>
+                  <a:schemeClr val="tx2"/>
                 </a:solidFill>
                 <a:latin typeface="Inter Medium"/>
                 <a:ea typeface="Inter Medium"/>
@@ -6432,13 +6524,13 @@
             <a:r>
               <a:rPr lang="en-US" sz="3200" dirty="0">
                 <a:solidFill>
-                  <a:schemeClr val="tx1"/>
+                  <a:schemeClr val="bg1"/>
                 </a:solidFill>
                 <a:latin typeface="Inter Display SemiBold" pitchFamily="34" charset="0"/>
                 <a:ea typeface="Inter Display SemiBold" pitchFamily="34" charset="-122"/>
                 <a:cs typeface="Inter Display SemiBold" pitchFamily="34" charset="-120"/>
               </a:rPr>
-              <a:t>Who it helps</a:t>
+              <a:t>Built to scale</a:t>
             </a:r>
             <a:endParaRPr lang="en-US" sz="3200" dirty="0"/>
           </a:p>
@@ -6446,37 +6538,284 @@
       </p:sp>
       <p:sp>
         <p:nvSpPr>
-          <p:cNvPr id="3" name="Shape 1"/>
+          <p:cNvPr id="3" name="Pill: Bank A"/>
           <p:cNvSpPr/>
           <p:nvPr/>
         </p:nvSpPr>
         <p:spPr>
           <a:xfrm>
-            <a:off x="2844800" y="2730500"/>
-            <a:ext cx="6502400" cy="0"/>
+            <a:off x="1270000" y="2286000"/>
+            <a:ext cx="1905000" cy="508000"/>
+          </a:xfrm>
+          <a:prstGeom prst="roundRect">
+            <a:avLst>
+              <a:gd name="adj" fmla="val 50000"/>
+            </a:avLst>
+          </a:prstGeom>
+          <a:solidFill>
+            <a:srgbClr val="1F2622"/>
+          </a:solidFill>
+          <a:ln w="12700">
+            <a:solidFill>
+              <a:srgbClr val="2F3A35"/>
+            </a:solidFill>
+            <a:prstDash val="solid"/>
+          </a:ln>
+        </p:spPr>
+      </p:sp>
+      <p:sp>
+        <p:nvSpPr>
+          <p:cNvPr id="4" name="Text 2"/>
+          <p:cNvSpPr txBox="1"/>
+          <p:nvPr/>
+        </p:nvSpPr>
+        <p:spPr>
+          <a:xfrm>
+            <a:off x="1270000" y="2286000"/>
+            <a:ext cx="1905000" cy="508000"/>
+          </a:xfrm>
+          <a:prstGeom prst="rect">
+            <a:avLst/>
+          </a:prstGeom>
+          <a:noFill/>
+          <a:ln/>
+        </p:spPr>
+        <p:txBody>
+          <a:bodyPr wrap="square" lIns="0" tIns="0" rIns="0" bIns="0" rtlCol="0" anchor="ctr"/>
+          <a:lstStyle/>
+          <a:p>
+            <a:pPr algn="ctr" indent="0" marL="0">
+              <a:buNone/>
+            </a:pPr>
+            <a:r>
+              <a:rPr lang="en-US" sz="1400" dirty="0">
+                <a:solidFill>
+                  <a:schemeClr val="bg1"/>
+                </a:solidFill>
+                <a:latin typeface="Inter Medium" pitchFamily="34" charset="0"/>
+                <a:ea typeface="Inter Medium" pitchFamily="34" charset="-122"/>
+                <a:cs typeface="Inter Medium" pitchFamily="34" charset="-120"/>
+              </a:rPr>
+              <a:t>Bank A</a:t>
+            </a:r>
+            <a:endParaRPr lang="en-US" sz="1400" dirty="0"/>
+          </a:p>
+        </p:txBody>
+      </p:sp>
+      <p:sp>
+        <p:nvSpPr>
+          <p:cNvPr id="5" name="Shape 3"/>
+          <p:cNvSpPr/>
+          <p:nvPr/>
+        </p:nvSpPr>
+        <p:spPr>
+          <a:xfrm>
+            <a:off x="3175000" y="2540000"/>
+            <a:ext cx="1968500" cy="762000"/>
           </a:xfrm>
           <a:prstGeom prst="line">
             <a:avLst/>
           </a:prstGeom>
           <a:noFill/>
-          <a:ln w="25400">
+          <a:ln w="31750">
             <a:solidFill>
-              <a:srgbClr val="DAD8D2"/>
+              <a:srgbClr val="34C48E"/>
             </a:solidFill>
-            <a:prstDash val="dash"/>
+            <a:prstDash val="solid"/>
+            <a:tailEnd type="triangle"/>
           </a:ln>
         </p:spPr>
       </p:sp>
       <p:sp>
         <p:nvSpPr>
-          <p:cNvPr id="4" name="Customers"/>
+          <p:cNvPr id="6" name="Pill: Bank B"/>
           <p:cNvSpPr/>
           <p:nvPr/>
         </p:nvSpPr>
         <p:spPr>
           <a:xfrm>
-            <a:off x="2146300" y="2032000"/>
-            <a:ext cx="1397000" cy="1397000"/>
+            <a:off x="1270000" y="3048000"/>
+            <a:ext cx="1905000" cy="508000"/>
+          </a:xfrm>
+          <a:prstGeom prst="roundRect">
+            <a:avLst>
+              <a:gd name="adj" fmla="val 50000"/>
+            </a:avLst>
+          </a:prstGeom>
+          <a:solidFill>
+            <a:srgbClr val="1F2622"/>
+          </a:solidFill>
+          <a:ln w="12700">
+            <a:solidFill>
+              <a:srgbClr val="2F3A35"/>
+            </a:solidFill>
+            <a:prstDash val="solid"/>
+          </a:ln>
+        </p:spPr>
+      </p:sp>
+      <p:sp>
+        <p:nvSpPr>
+          <p:cNvPr id="7" name="Text 5"/>
+          <p:cNvSpPr txBox="1"/>
+          <p:nvPr/>
+        </p:nvSpPr>
+        <p:spPr>
+          <a:xfrm>
+            <a:off x="1270000" y="3048000"/>
+            <a:ext cx="1905000" cy="508000"/>
+          </a:xfrm>
+          <a:prstGeom prst="rect">
+            <a:avLst/>
+          </a:prstGeom>
+          <a:noFill/>
+          <a:ln/>
+        </p:spPr>
+        <p:txBody>
+          <a:bodyPr wrap="square" lIns="0" tIns="0" rIns="0" bIns="0" rtlCol="0" anchor="ctr"/>
+          <a:lstStyle/>
+          <a:p>
+            <a:pPr algn="ctr" indent="0" marL="0">
+              <a:buNone/>
+            </a:pPr>
+            <a:r>
+              <a:rPr lang="en-US" sz="1400" dirty="0">
+                <a:solidFill>
+                  <a:schemeClr val="bg1"/>
+                </a:solidFill>
+                <a:latin typeface="Inter Medium" pitchFamily="34" charset="0"/>
+                <a:ea typeface="Inter Medium" pitchFamily="34" charset="-122"/>
+                <a:cs typeface="Inter Medium" pitchFamily="34" charset="-120"/>
+              </a:rPr>
+              <a:t>Bank B</a:t>
+            </a:r>
+            <a:endParaRPr lang="en-US" sz="1400" dirty="0"/>
+          </a:p>
+        </p:txBody>
+      </p:sp>
+      <p:sp>
+        <p:nvSpPr>
+          <p:cNvPr id="8" name="Shape 6"/>
+          <p:cNvSpPr/>
+          <p:nvPr/>
+        </p:nvSpPr>
+        <p:spPr>
+          <a:xfrm>
+            <a:off x="3175000" y="3302000"/>
+            <a:ext cx="1968500" cy="0"/>
+          </a:xfrm>
+          <a:prstGeom prst="line">
+            <a:avLst/>
+          </a:prstGeom>
+          <a:noFill/>
+          <a:ln w="31750">
+            <a:solidFill>
+              <a:srgbClr val="34C48E"/>
+            </a:solidFill>
+            <a:prstDash val="solid"/>
+            <a:tailEnd type="triangle"/>
+          </a:ln>
+        </p:spPr>
+      </p:sp>
+      <p:sp>
+        <p:nvSpPr>
+          <p:cNvPr id="9" name="Pill: Bank C"/>
+          <p:cNvSpPr/>
+          <p:nvPr/>
+        </p:nvSpPr>
+        <p:spPr>
+          <a:xfrm>
+            <a:off x="1270000" y="3810000"/>
+            <a:ext cx="1905000" cy="508000"/>
+          </a:xfrm>
+          <a:prstGeom prst="roundRect">
+            <a:avLst>
+              <a:gd name="adj" fmla="val 50000"/>
+            </a:avLst>
+          </a:prstGeom>
+          <a:solidFill>
+            <a:srgbClr val="1F2622"/>
+          </a:solidFill>
+          <a:ln w="12700">
+            <a:solidFill>
+              <a:srgbClr val="2F3A35"/>
+            </a:solidFill>
+            <a:prstDash val="solid"/>
+          </a:ln>
+        </p:spPr>
+      </p:sp>
+      <p:sp>
+        <p:nvSpPr>
+          <p:cNvPr id="10" name="Text 8"/>
+          <p:cNvSpPr txBox="1"/>
+          <p:nvPr/>
+        </p:nvSpPr>
+        <p:spPr>
+          <a:xfrm>
+            <a:off x="1270000" y="3810000"/>
+            <a:ext cx="1905000" cy="508000"/>
+          </a:xfrm>
+          <a:prstGeom prst="rect">
+            <a:avLst/>
+          </a:prstGeom>
+          <a:noFill/>
+          <a:ln/>
+        </p:spPr>
+        <p:txBody>
+          <a:bodyPr wrap="square" lIns="0" tIns="0" rIns="0" bIns="0" rtlCol="0" anchor="ctr"/>
+          <a:lstStyle/>
+          <a:p>
+            <a:pPr algn="ctr" indent="0" marL="0">
+              <a:buNone/>
+            </a:pPr>
+            <a:r>
+              <a:rPr lang="en-US" sz="1400" dirty="0">
+                <a:solidFill>
+                  <a:schemeClr val="bg1"/>
+                </a:solidFill>
+                <a:latin typeface="Inter Medium" pitchFamily="34" charset="0"/>
+                <a:ea typeface="Inter Medium" pitchFamily="34" charset="-122"/>
+                <a:cs typeface="Inter Medium" pitchFamily="34" charset="-120"/>
+              </a:rPr>
+              <a:t>Bank C</a:t>
+            </a:r>
+            <a:endParaRPr lang="en-US" sz="1400" dirty="0"/>
+          </a:p>
+        </p:txBody>
+      </p:sp>
+      <p:sp>
+        <p:nvSpPr>
+          <p:cNvPr id="11" name="Shape 9"/>
+          <p:cNvSpPr/>
+          <p:nvPr/>
+        </p:nvSpPr>
+        <p:spPr>
+          <a:xfrm flipV="1">
+            <a:off x="3175000" y="3302000"/>
+            <a:ext cx="1968500" cy="762000"/>
+          </a:xfrm>
+          <a:prstGeom prst="line">
+            <a:avLst/>
+          </a:prstGeom>
+          <a:noFill/>
+          <a:ln w="31750">
+            <a:solidFill>
+              <a:srgbClr val="34C48E"/>
+            </a:solidFill>
+            <a:prstDash val="solid"/>
+            <a:tailEnd type="triangle"/>
+          </a:ln>
+        </p:spPr>
+      </p:sp>
+      <p:sp>
+        <p:nvSpPr>
+          <p:cNvPr id="12" name="Gaskiyya registry"/>
+          <p:cNvSpPr/>
+          <p:nvPr/>
+        </p:nvSpPr>
+        <p:spPr>
+          <a:xfrm>
+            <a:off x="5143500" y="2349500"/>
+            <a:ext cx="1905000" cy="1905000"/>
           </a:xfrm>
           <a:prstGeom prst="ellipse">
             <a:avLst/>
@@ -6496,7 +6835,7 @@
       </p:sp>
       <p:pic>
         <p:nvPicPr>
-          <p:cNvPr id="5" name="Image 0" descr="Customers">    </p:cNvPr>
+          <p:cNvPr id="13" name="Image 0" descr="Gaskiyya registry">    </p:cNvPr>
           <p:cNvPicPr>
             <a:picLocks noChangeAspect="1"/>
           </p:cNvPicPr>
@@ -6510,8 +6849,8 @@
         </p:blipFill>
         <p:spPr>
           <a:xfrm>
-            <a:off x="2540000" y="2425700"/>
-            <a:ext cx="609600" cy="609600"/>
+            <a:off x="5556250" y="2762250"/>
+            <a:ext cx="1079500" cy="1079500"/>
           </a:xfrm>
           <a:prstGeom prst="rect">
             <a:avLst/>
@@ -6520,112 +6859,282 @@
       </p:pic>
       <p:sp>
         <p:nvSpPr>
-          <p:cNvPr id="6" name="Text 3"/>
-          <p:cNvSpPr txBox="1"/>
-          <p:nvPr/>
-        </p:nvSpPr>
-        <p:spPr>
-          <a:xfrm>
-            <a:off x="1320800" y="3619500"/>
-            <a:ext cx="3048000" cy="254000"/>
-          </a:xfrm>
-          <a:prstGeom prst="rect">
-            <a:avLst/>
-          </a:prstGeom>
-          <a:noFill/>
-          <a:ln/>
-        </p:spPr>
-        <p:txBody>
-          <a:bodyPr wrap="square" lIns="0" tIns="0" rIns="0" bIns="0" rtlCol="0" anchor="t"/>
-          <a:lstStyle/>
-          <a:p>
-            <a:pPr algn="ctr" indent="0" marL="0">
-              <a:buNone/>
-            </a:pPr>
-            <a:r>
-              <a:rPr lang="en-US" sz="2000" dirty="0">
-                <a:solidFill>
-                  <a:schemeClr val="tx1"/>
-                </a:solidFill>
-                <a:latin typeface="Inter Display SemiBold" pitchFamily="34" charset="0"/>
-                <a:ea typeface="Inter Display SemiBold" pitchFamily="34" charset="-122"/>
-                <a:cs typeface="Inter Display SemiBold" pitchFamily="34" charset="-120"/>
-              </a:rPr>
-              <a:t>Customers</a:t>
-            </a:r>
-            <a:endParaRPr lang="en-US" sz="2000" dirty="0"/>
-          </a:p>
-        </p:txBody>
-      </p:sp>
-      <p:sp>
-        <p:nvSpPr>
-          <p:cNvPr id="7" name="Text 4"/>
-          <p:cNvSpPr txBox="1"/>
-          <p:nvPr/>
-        </p:nvSpPr>
-        <p:spPr>
-          <a:xfrm>
-            <a:off x="1320800" y="3911600"/>
-            <a:ext cx="3048000" cy="203200"/>
-          </a:xfrm>
-          <a:prstGeom prst="rect">
-            <a:avLst/>
-          </a:prstGeom>
-          <a:noFill/>
-          <a:ln/>
-        </p:spPr>
-        <p:txBody>
-          <a:bodyPr wrap="square" lIns="0" tIns="0" rIns="0" bIns="0" rtlCol="0" anchor="t"/>
-          <a:lstStyle/>
-          <a:p>
-            <a:pPr algn="ctr" indent="0" marL="0">
-              <a:buNone/>
-            </a:pPr>
-            <a:r>
-              <a:rPr lang="en-US" sz="1400" dirty="0">
-                <a:solidFill>
-                  <a:schemeClr val="tx2"/>
-                </a:solidFill>
-                <a:latin typeface="Inter" pitchFamily="34" charset="0"/>
-                <a:ea typeface="Inter" pitchFamily="34" charset="-122"/>
-                <a:cs typeface="Inter" pitchFamily="34" charset="-120"/>
-              </a:rPr>
-              <a:t>Check before acting</a:t>
-            </a:r>
-            <a:endParaRPr lang="en-US" sz="1400" dirty="0"/>
-          </a:p>
-        </p:txBody>
-      </p:sp>
-      <p:sp>
-        <p:nvSpPr>
-          <p:cNvPr id="8" name="Traders and SMEs"/>
+          <p:cNvPr id="14" name="Shape 11"/>
           <p:cNvSpPr/>
           <p:nvPr/>
         </p:nvSpPr>
         <p:spPr>
-          <a:xfrm>
-            <a:off x="5397500" y="2032000"/>
-            <a:ext cx="1397000" cy="1397000"/>
-          </a:xfrm>
-          <a:prstGeom prst="ellipse">
-            <a:avLst/>
+          <a:xfrm flipV="1">
+            <a:off x="7048500" y="2540000"/>
+            <a:ext cx="1968500" cy="762000"/>
+          </a:xfrm>
+          <a:prstGeom prst="line">
+            <a:avLst/>
+          </a:prstGeom>
+          <a:noFill/>
+          <a:ln w="31750">
+            <a:solidFill>
+              <a:srgbClr val="34C48E"/>
+            </a:solidFill>
+            <a:prstDash val="solid"/>
+            <a:tailEnd type="triangle"/>
+          </a:ln>
+        </p:spPr>
+      </p:sp>
+      <p:sp>
+        <p:nvSpPr>
+          <p:cNvPr id="15" name="Pill: Bank or Gaskiyya app"/>
+          <p:cNvSpPr/>
+          <p:nvPr/>
+        </p:nvSpPr>
+        <p:spPr>
+          <a:xfrm>
+            <a:off x="9017000" y="2286000"/>
+            <a:ext cx="2362200" cy="508000"/>
+          </a:xfrm>
+          <a:prstGeom prst="roundRect">
+            <a:avLst>
+              <a:gd name="adj" fmla="val 50000"/>
+            </a:avLst>
           </a:prstGeom>
           <a:solidFill>
             <a:srgbClr val="0A7A55"/>
           </a:solidFill>
           <a:ln/>
-          <a:effectLst>
-            <a:outerShdw sx="100000" sy="100000" kx="0" ky="0" algn="bl" rotWithShape="0" blurRad="228600" dist="76200" dir="5400000">
-              <a:srgbClr val="0E1512">
-                <a:alpha val="15000"/>
-              </a:srgbClr>
-            </a:outerShdw>
-          </a:effectLst>
+        </p:spPr>
+      </p:sp>
+      <p:sp>
+        <p:nvSpPr>
+          <p:cNvPr id="16" name="Text 13"/>
+          <p:cNvSpPr txBox="1"/>
+          <p:nvPr/>
+        </p:nvSpPr>
+        <p:spPr>
+          <a:xfrm>
+            <a:off x="9017000" y="2286000"/>
+            <a:ext cx="2362200" cy="508000"/>
+          </a:xfrm>
+          <a:prstGeom prst="rect">
+            <a:avLst/>
+          </a:prstGeom>
+          <a:noFill/>
+          <a:ln/>
+        </p:spPr>
+        <p:txBody>
+          <a:bodyPr wrap="square" lIns="0" tIns="0" rIns="0" bIns="0" rtlCol="0" anchor="ctr"/>
+          <a:lstStyle/>
+          <a:p>
+            <a:pPr algn="ctr" indent="0" marL="0">
+              <a:buNone/>
+            </a:pPr>
+            <a:r>
+              <a:rPr lang="en-US" sz="1400" dirty="0">
+                <a:solidFill>
+                  <a:srgbClr val="FFFFFF"/>
+                </a:solidFill>
+                <a:latin typeface="Inter Medium" pitchFamily="34" charset="0"/>
+                <a:ea typeface="Inter Medium" pitchFamily="34" charset="-122"/>
+                <a:cs typeface="Inter Medium" pitchFamily="34" charset="-120"/>
+              </a:rPr>
+              <a:t>Bank or Gaskiyya app</a:t>
+            </a:r>
+            <a:endParaRPr lang="en-US" sz="1400" dirty="0"/>
+          </a:p>
+        </p:txBody>
+      </p:sp>
+      <p:sp>
+        <p:nvSpPr>
+          <p:cNvPr id="17" name="Shape 14"/>
+          <p:cNvSpPr/>
+          <p:nvPr/>
+        </p:nvSpPr>
+        <p:spPr>
+          <a:xfrm>
+            <a:off x="7048500" y="3302000"/>
+            <a:ext cx="1968500" cy="0"/>
+          </a:xfrm>
+          <a:prstGeom prst="line">
+            <a:avLst/>
+          </a:prstGeom>
+          <a:noFill/>
+          <a:ln w="31750">
+            <a:solidFill>
+              <a:srgbClr val="34C48E"/>
+            </a:solidFill>
+            <a:prstDash val="solid"/>
+            <a:tailEnd type="triangle"/>
+          </a:ln>
+        </p:spPr>
+      </p:sp>
+      <p:sp>
+        <p:nvSpPr>
+          <p:cNvPr id="18" name="Pill: WhatsApp"/>
+          <p:cNvSpPr/>
+          <p:nvPr/>
+        </p:nvSpPr>
+        <p:spPr>
+          <a:xfrm>
+            <a:off x="9017000" y="3048000"/>
+            <a:ext cx="2362200" cy="508000"/>
+          </a:xfrm>
+          <a:prstGeom prst="roundRect">
+            <a:avLst>
+              <a:gd name="adj" fmla="val 50000"/>
+            </a:avLst>
+          </a:prstGeom>
+          <a:solidFill>
+            <a:srgbClr val="0A7A55"/>
+          </a:solidFill>
+          <a:ln/>
+        </p:spPr>
+      </p:sp>
+      <p:sp>
+        <p:nvSpPr>
+          <p:cNvPr id="19" name="Text 16"/>
+          <p:cNvSpPr txBox="1"/>
+          <p:nvPr/>
+        </p:nvSpPr>
+        <p:spPr>
+          <a:xfrm>
+            <a:off x="9017000" y="3048000"/>
+            <a:ext cx="2362200" cy="508000"/>
+          </a:xfrm>
+          <a:prstGeom prst="rect">
+            <a:avLst/>
+          </a:prstGeom>
+          <a:noFill/>
+          <a:ln/>
+        </p:spPr>
+        <p:txBody>
+          <a:bodyPr wrap="square" lIns="0" tIns="0" rIns="0" bIns="0" rtlCol="0" anchor="ctr"/>
+          <a:lstStyle/>
+          <a:p>
+            <a:pPr algn="ctr" indent="0" marL="0">
+              <a:buNone/>
+            </a:pPr>
+            <a:r>
+              <a:rPr lang="en-US" sz="1400" dirty="0">
+                <a:solidFill>
+                  <a:srgbClr val="FFFFFF"/>
+                </a:solidFill>
+                <a:latin typeface="Inter Medium" pitchFamily="34" charset="0"/>
+                <a:ea typeface="Inter Medium" pitchFamily="34" charset="-122"/>
+                <a:cs typeface="Inter Medium" pitchFamily="34" charset="-120"/>
+              </a:rPr>
+              <a:t>WhatsApp</a:t>
+            </a:r>
+            <a:endParaRPr lang="en-US" sz="1400" dirty="0"/>
+          </a:p>
+        </p:txBody>
+      </p:sp>
+      <p:sp>
+        <p:nvSpPr>
+          <p:cNvPr id="20" name="Shape 17"/>
+          <p:cNvSpPr/>
+          <p:nvPr/>
+        </p:nvSpPr>
+        <p:spPr>
+          <a:xfrm>
+            <a:off x="7048500" y="3302000"/>
+            <a:ext cx="1968500" cy="762000"/>
+          </a:xfrm>
+          <a:prstGeom prst="line">
+            <a:avLst/>
+          </a:prstGeom>
+          <a:noFill/>
+          <a:ln w="31750">
+            <a:solidFill>
+              <a:srgbClr val="34C48E"/>
+            </a:solidFill>
+            <a:prstDash val="solid"/>
+            <a:tailEnd type="triangle"/>
+          </a:ln>
+        </p:spPr>
+      </p:sp>
+      <p:sp>
+        <p:nvSpPr>
+          <p:cNvPr id="21" name="Pill: USSD on any phone"/>
+          <p:cNvSpPr/>
+          <p:nvPr/>
+        </p:nvSpPr>
+        <p:spPr>
+          <a:xfrm>
+            <a:off x="9017000" y="3810000"/>
+            <a:ext cx="2362200" cy="508000"/>
+          </a:xfrm>
+          <a:prstGeom prst="roundRect">
+            <a:avLst>
+              <a:gd name="adj" fmla="val 50000"/>
+            </a:avLst>
+          </a:prstGeom>
+          <a:solidFill>
+            <a:srgbClr val="0A7A55"/>
+          </a:solidFill>
+          <a:ln/>
+        </p:spPr>
+      </p:sp>
+      <p:sp>
+        <p:nvSpPr>
+          <p:cNvPr id="22" name="Text 19"/>
+          <p:cNvSpPr txBox="1"/>
+          <p:nvPr/>
+        </p:nvSpPr>
+        <p:spPr>
+          <a:xfrm>
+            <a:off x="9017000" y="3810000"/>
+            <a:ext cx="2362200" cy="508000"/>
+          </a:xfrm>
+          <a:prstGeom prst="rect">
+            <a:avLst/>
+          </a:prstGeom>
+          <a:noFill/>
+          <a:ln/>
+        </p:spPr>
+        <p:txBody>
+          <a:bodyPr wrap="square" lIns="0" tIns="0" rIns="0" bIns="0" rtlCol="0" anchor="ctr"/>
+          <a:lstStyle/>
+          <a:p>
+            <a:pPr algn="ctr" indent="0" marL="0">
+              <a:buNone/>
+            </a:pPr>
+            <a:r>
+              <a:rPr lang="en-US" sz="1400" dirty="0">
+                <a:solidFill>
+                  <a:srgbClr val="FFFFFF"/>
+                </a:solidFill>
+                <a:latin typeface="Inter Medium" pitchFamily="34" charset="0"/>
+                <a:ea typeface="Inter Medium" pitchFamily="34" charset="-122"/>
+                <a:cs typeface="Inter Medium" pitchFamily="34" charset="-120"/>
+              </a:rPr>
+              <a:t>USSD on any phone</a:t>
+            </a:r>
+            <a:endParaRPr lang="en-US" sz="1400" dirty="0"/>
+          </a:p>
+        </p:txBody>
+      </p:sp>
+      <p:sp>
+        <p:nvSpPr>
+          <p:cNvPr id="23" name="Shape 20"/>
+          <p:cNvSpPr/>
+          <p:nvPr/>
+        </p:nvSpPr>
+        <p:spPr>
+          <a:xfrm>
+            <a:off x="812800" y="5080000"/>
+            <a:ext cx="254000" cy="254000"/>
+          </a:xfrm>
+          <a:prstGeom prst="ellipse">
+            <a:avLst/>
+          </a:prstGeom>
+          <a:solidFill>
+            <a:srgbClr val="0A7A55"/>
+          </a:solidFill>
+          <a:ln/>
         </p:spPr>
       </p:sp>
       <p:pic>
         <p:nvPicPr>
-          <p:cNvPr id="9" name="Image 1" descr="Traders and SMEs">    </p:cNvPr>
+          <p:cNvPr id="24" name="Image 1" descr="preencoded.png">    </p:cNvPr>
           <p:cNvPicPr>
             <a:picLocks noChangeAspect="1"/>
           </p:cNvPicPr>
@@ -6639,8 +7148,8 @@
         </p:blipFill>
         <p:spPr>
           <a:xfrm>
-            <a:off x="5791200" y="2425700"/>
-            <a:ext cx="609600" cy="609600"/>
+            <a:off x="876300" y="5143500"/>
+            <a:ext cx="127000" cy="127000"/>
           </a:xfrm>
           <a:prstGeom prst="rect">
             <a:avLst/>
@@ -6649,92 +7158,53 @@
       </p:pic>
       <p:sp>
         <p:nvSpPr>
-          <p:cNvPr id="10" name="Text 6"/>
+          <p:cNvPr id="25" name="Text 21"/>
           <p:cNvSpPr txBox="1"/>
           <p:nvPr/>
         </p:nvSpPr>
         <p:spPr>
           <a:xfrm>
-            <a:off x="4572000" y="3619500"/>
-            <a:ext cx="3048000" cy="254000"/>
-          </a:xfrm>
-          <a:prstGeom prst="rect">
-            <a:avLst/>
-          </a:prstGeom>
-          <a:noFill/>
-          <a:ln/>
-        </p:spPr>
-        <p:txBody>
-          <a:bodyPr wrap="square" lIns="0" tIns="0" rIns="0" bIns="0" rtlCol="0" anchor="t"/>
-          <a:lstStyle/>
-          <a:p>
-            <a:pPr algn="ctr" indent="0" marL="0">
-              <a:buNone/>
-            </a:pPr>
-            <a:r>
-              <a:rPr lang="en-US" sz="2000" dirty="0">
-                <a:solidFill>
-                  <a:schemeClr val="tx1"/>
-                </a:solidFill>
-                <a:latin typeface="Inter Display SemiBold" pitchFamily="34" charset="0"/>
-                <a:ea typeface="Inter Display SemiBold" pitchFamily="34" charset="-122"/>
-                <a:cs typeface="Inter Display SemiBold" pitchFamily="34" charset="-120"/>
-              </a:rPr>
-              <a:t>Traders and SMEs</a:t>
-            </a:r>
-            <a:endParaRPr lang="en-US" sz="2000" dirty="0"/>
-          </a:p>
-        </p:txBody>
-      </p:sp>
-      <p:sp>
-        <p:nvSpPr>
-          <p:cNvPr id="11" name="Text 7"/>
-          <p:cNvSpPr txBox="1"/>
-          <p:nvPr/>
-        </p:nvSpPr>
-        <p:spPr>
-          <a:xfrm>
-            <a:off x="4572000" y="3911600"/>
-            <a:ext cx="3048000" cy="203200"/>
-          </a:xfrm>
-          <a:prstGeom prst="rect">
-            <a:avLst/>
-          </a:prstGeom>
-          <a:noFill/>
-          <a:ln/>
-        </p:spPr>
-        <p:txBody>
-          <a:bodyPr wrap="square" lIns="0" tIns="0" rIns="0" bIns="0" rtlCol="0" anchor="t"/>
-          <a:lstStyle/>
-          <a:p>
-            <a:pPr algn="ctr" indent="0" marL="0">
-              <a:buNone/>
-            </a:pPr>
-            <a:r>
-              <a:rPr lang="en-US" sz="1400" dirty="0">
-                <a:solidFill>
-                  <a:schemeClr val="tx2"/>
+            <a:off x="1168400" y="5080000"/>
+            <a:ext cx="3175000" cy="254000"/>
+          </a:xfrm>
+          <a:prstGeom prst="rect">
+            <a:avLst/>
+          </a:prstGeom>
+          <a:noFill/>
+          <a:ln/>
+        </p:spPr>
+        <p:txBody>
+          <a:bodyPr wrap="square" lIns="0" tIns="0" rIns="0" bIns="0" rtlCol="0" anchor="ctr"/>
+          <a:lstStyle/>
+          <a:p>
+            <a:pPr algn="l" indent="0" marL="0">
+              <a:buNone/>
+            </a:pPr>
+            <a:r>
+              <a:rPr lang="en-US" sz="1600" dirty="0">
+                <a:solidFill>
+                  <a:schemeClr val="bg1"/>
                 </a:solidFill>
                 <a:latin typeface="Inter" pitchFamily="34" charset="0"/>
                 <a:ea typeface="Inter" pitchFamily="34" charset="-122"/>
                 <a:cs typeface="Inter" pitchFamily="34" charset="-120"/>
               </a:rPr>
-              <a:t>Confirm every payment</a:t>
-            </a:r>
-            <a:endParaRPr lang="en-US" sz="1400" dirty="0"/>
-          </a:p>
-        </p:txBody>
-      </p:sp>
-      <p:sp>
-        <p:nvSpPr>
-          <p:cNvPr id="12" name="Banks"/>
+              <a:t>Same API for every bank</a:t>
+            </a:r>
+            <a:endParaRPr lang="en-US" sz="1600" dirty="0"/>
+          </a:p>
+        </p:txBody>
+      </p:sp>
+      <p:sp>
+        <p:nvSpPr>
+          <p:cNvPr id="26" name="Shape 22"/>
           <p:cNvSpPr/>
           <p:nvPr/>
         </p:nvSpPr>
         <p:spPr>
           <a:xfrm>
-            <a:off x="8648700" y="2032000"/>
-            <a:ext cx="1397000" cy="1397000"/>
+            <a:off x="4445000" y="5080000"/>
+            <a:ext cx="254000" cy="254000"/>
           </a:xfrm>
           <a:prstGeom prst="ellipse">
             <a:avLst/>
@@ -6743,18 +7213,11 @@
             <a:srgbClr val="0A7A55"/>
           </a:solidFill>
           <a:ln/>
-          <a:effectLst>
-            <a:outerShdw sx="100000" sy="100000" kx="0" ky="0" algn="bl" rotWithShape="0" blurRad="228600" dist="76200" dir="5400000">
-              <a:srgbClr val="0E1512">
-                <a:alpha val="15000"/>
-              </a:srgbClr>
-            </a:outerShdw>
-          </a:effectLst>
         </p:spPr>
       </p:sp>
       <p:pic>
         <p:nvPicPr>
-          <p:cNvPr id="13" name="Image 2" descr="Banks">    </p:cNvPr>
+          <p:cNvPr id="27" name="Image 2" descr="preencoded.png">    </p:cNvPr>
           <p:cNvPicPr>
             <a:picLocks noChangeAspect="1"/>
           </p:cNvPicPr>
@@ -6768,8 +7231,8 @@
         </p:blipFill>
         <p:spPr>
           <a:xfrm>
-            <a:off x="9042400" y="2425700"/>
-            <a:ext cx="609600" cy="609600"/>
+            <a:off x="4508500" y="5143500"/>
+            <a:ext cx="127000" cy="127000"/>
           </a:xfrm>
           <a:prstGeom prst="rect">
             <a:avLst/>
@@ -6778,151 +7241,66 @@
       </p:pic>
       <p:sp>
         <p:nvSpPr>
-          <p:cNvPr id="14" name="Text 9"/>
+          <p:cNvPr id="28" name="Text 23"/>
           <p:cNvSpPr txBox="1"/>
           <p:nvPr/>
         </p:nvSpPr>
         <p:spPr>
           <a:xfrm>
-            <a:off x="7823200" y="3619500"/>
-            <a:ext cx="3048000" cy="254000"/>
-          </a:xfrm>
-          <a:prstGeom prst="rect">
-            <a:avLst/>
-          </a:prstGeom>
-          <a:noFill/>
-          <a:ln/>
-        </p:spPr>
-        <p:txBody>
-          <a:bodyPr wrap="square" lIns="0" tIns="0" rIns="0" bIns="0" rtlCol="0" anchor="t"/>
-          <a:lstStyle/>
-          <a:p>
-            <a:pPr algn="ctr" indent="0" marL="0">
-              <a:buNone/>
-            </a:pPr>
-            <a:r>
-              <a:rPr lang="en-US" sz="2000" dirty="0">
-                <a:solidFill>
-                  <a:schemeClr val="tx1"/>
-                </a:solidFill>
-                <a:latin typeface="Inter Display SemiBold" pitchFamily="34" charset="0"/>
-                <a:ea typeface="Inter Display SemiBold" pitchFamily="34" charset="-122"/>
-                <a:cs typeface="Inter Display SemiBold" pitchFamily="34" charset="-120"/>
-              </a:rPr>
-              <a:t>Banks</a:t>
-            </a:r>
-            <a:endParaRPr lang="en-US" sz="2000" dirty="0"/>
-          </a:p>
-        </p:txBody>
-      </p:sp>
-      <p:sp>
-        <p:nvSpPr>
-          <p:cNvPr id="15" name="Text 10"/>
-          <p:cNvSpPr txBox="1"/>
-          <p:nvPr/>
-        </p:nvSpPr>
-        <p:spPr>
-          <a:xfrm>
-            <a:off x="7823200" y="3911600"/>
-            <a:ext cx="3048000" cy="203200"/>
-          </a:xfrm>
-          <a:prstGeom prst="rect">
-            <a:avLst/>
-          </a:prstGeom>
-          <a:noFill/>
-          <a:ln/>
-        </p:spPr>
-        <p:txBody>
-          <a:bodyPr wrap="square" lIns="0" tIns="0" rIns="0" bIns="0" rtlCol="0" anchor="t"/>
-          <a:lstStyle/>
-          <a:p>
-            <a:pPr algn="ctr" indent="0" marL="0">
-              <a:buNone/>
-            </a:pPr>
-            <a:r>
-              <a:rPr lang="en-US" sz="1400" dirty="0">
-                <a:solidFill>
-                  <a:schemeClr val="tx2"/>
+            <a:off x="4800600" y="5080000"/>
+            <a:ext cx="3175000" cy="254000"/>
+          </a:xfrm>
+          <a:prstGeom prst="rect">
+            <a:avLst/>
+          </a:prstGeom>
+          <a:noFill/>
+          <a:ln/>
+        </p:spPr>
+        <p:txBody>
+          <a:bodyPr wrap="square" lIns="0" tIns="0" rIns="0" bIns="0" rtlCol="0" anchor="ctr"/>
+          <a:lstStyle/>
+          <a:p>
+            <a:pPr algn="l" indent="0" marL="0">
+              <a:buNone/>
+            </a:pPr>
+            <a:r>
+              <a:rPr lang="en-US" sz="1600" dirty="0">
+                <a:solidFill>
+                  <a:schemeClr val="bg1"/>
                 </a:solidFill>
                 <a:latin typeface="Inter" pitchFamily="34" charset="0"/>
                 <a:ea typeface="Inter" pitchFamily="34" charset="-122"/>
                 <a:cs typeface="Inter" pitchFamily="34" charset="-120"/>
               </a:rPr>
-              <a:t>Spot scam waves early</a:t>
-            </a:r>
-            <a:endParaRPr lang="en-US" sz="1400" dirty="0"/>
-          </a:p>
-        </p:txBody>
-      </p:sp>
-      <p:sp>
-        <p:nvSpPr>
-          <p:cNvPr id="16" name="Text 11"/>
-          <p:cNvSpPr txBox="1"/>
-          <p:nvPr/>
-        </p:nvSpPr>
-        <p:spPr>
-          <a:xfrm>
-            <a:off x="812800" y="4699000"/>
-            <a:ext cx="10566400" cy="203200"/>
-          </a:xfrm>
-          <a:prstGeom prst="rect">
-            <a:avLst/>
-          </a:prstGeom>
-          <a:noFill/>
-          <a:ln/>
-        </p:spPr>
-        <p:txBody>
-          <a:bodyPr wrap="square" lIns="0" tIns="0" rIns="0" bIns="0" rtlCol="0" anchor="t"/>
-          <a:lstStyle/>
-          <a:p>
-            <a:pPr algn="ctr" indent="0" marL="0">
-              <a:buNone/>
-            </a:pPr>
-            <a:r>
-              <a:rPr lang="en-US" sz="1400" dirty="0">
-                <a:solidFill>
-                  <a:schemeClr val="tx2"/>
-                </a:solidFill>
-                <a:latin typeface="Inter Medium" pitchFamily="34" charset="0"/>
-                <a:ea typeface="Inter Medium" pitchFamily="34" charset="-122"/>
-                <a:cs typeface="Inter Medium" pitchFamily="34" charset="-120"/>
-              </a:rPr>
-              <a:t>Works on any phone</a:t>
-            </a:r>
-            <a:endParaRPr lang="en-US" sz="1400" dirty="0"/>
-          </a:p>
-        </p:txBody>
-      </p:sp>
-      <p:sp>
-        <p:nvSpPr>
-          <p:cNvPr id="17" name="Channel: Bank app"/>
+              <a:t>Each bank keeps its own keys</a:t>
+            </a:r>
+            <a:endParaRPr lang="en-US" sz="1600" dirty="0"/>
+          </a:p>
+        </p:txBody>
+      </p:sp>
+      <p:sp>
+        <p:nvSpPr>
+          <p:cNvPr id="29" name="Shape 24"/>
           <p:cNvSpPr/>
           <p:nvPr/>
         </p:nvSpPr>
         <p:spPr>
           <a:xfrm>
-            <a:off x="1879600" y="5003800"/>
-            <a:ext cx="1981200" cy="482600"/>
-          </a:xfrm>
-          <a:prstGeom prst="roundRect">
-            <a:avLst>
-              <a:gd name="adj" fmla="val 50000"/>
-            </a:avLst>
+            <a:off x="8077200" y="5080000"/>
+            <a:ext cx="254000" cy="254000"/>
+          </a:xfrm>
+          <a:prstGeom prst="ellipse">
+            <a:avLst/>
           </a:prstGeom>
           <a:solidFill>
-            <a:srgbClr val="FFFFFF"/>
+            <a:srgbClr val="0A7A55"/>
           </a:solidFill>
-          <a:ln w="12700">
-            <a:solidFill>
-              <a:srgbClr val="DAD8D2"/>
-            </a:solidFill>
-            <a:prstDash val="solid"/>
-          </a:ln>
+          <a:ln/>
         </p:spPr>
       </p:sp>
       <p:pic>
         <p:nvPicPr>
-          <p:cNvPr id="18" name="Image 3" descr="preencoded.png">    </p:cNvPr>
+          <p:cNvPr id="30" name="Image 3" descr="preencoded.png">    </p:cNvPr>
           <p:cNvPicPr>
             <a:picLocks noChangeAspect="1"/>
           </p:cNvPicPr>
@@ -6936,8 +7314,8 @@
         </p:blipFill>
         <p:spPr>
           <a:xfrm>
-            <a:off x="2032000" y="5130800"/>
-            <a:ext cx="228600" cy="228600"/>
+            <a:off x="8140700" y="5143500"/>
+            <a:ext cx="127000" cy="127000"/>
           </a:xfrm>
           <a:prstGeom prst="rect">
             <a:avLst/>
@@ -6946,14 +7324,14 @@
       </p:pic>
       <p:sp>
         <p:nvSpPr>
-          <p:cNvPr id="19" name="Text 13"/>
+          <p:cNvPr id="31" name="Text 25"/>
           <p:cNvSpPr txBox="1"/>
           <p:nvPr/>
         </p:nvSpPr>
         <p:spPr>
           <a:xfrm>
-            <a:off x="2336800" y="5003800"/>
-            <a:ext cx="1422400" cy="482600"/>
+            <a:off x="8432800" y="5080000"/>
+            <a:ext cx="3175000" cy="254000"/>
           </a:xfrm>
           <a:prstGeom prst="rect">
             <a:avLst/>
@@ -6969,287 +7347,17 @@
               <a:buNone/>
             </a:pPr>
             <a:r>
-              <a:rPr lang="en-US" sz="1400" dirty="0">
-                <a:solidFill>
-                  <a:schemeClr val="tx1"/>
-                </a:solidFill>
-                <a:latin typeface="Inter Medium" pitchFamily="34" charset="0"/>
-                <a:ea typeface="Inter Medium" pitchFamily="34" charset="-122"/>
-                <a:cs typeface="Inter Medium" pitchFamily="34" charset="-120"/>
-              </a:rPr>
-              <a:t>Bank app</a:t>
-            </a:r>
-            <a:endParaRPr lang="en-US" sz="1400" dirty="0"/>
-          </a:p>
-        </p:txBody>
-      </p:sp>
-      <p:sp>
-        <p:nvSpPr>
-          <p:cNvPr id="20" name="Channel: WhatsApp"/>
-          <p:cNvSpPr/>
-          <p:nvPr/>
-        </p:nvSpPr>
-        <p:spPr>
-          <a:xfrm>
-            <a:off x="4038600" y="5003800"/>
-            <a:ext cx="1981200" cy="482600"/>
-          </a:xfrm>
-          <a:prstGeom prst="roundRect">
-            <a:avLst>
-              <a:gd name="adj" fmla="val 50000"/>
-            </a:avLst>
-          </a:prstGeom>
-          <a:solidFill>
-            <a:srgbClr val="FFFFFF"/>
-          </a:solidFill>
-          <a:ln w="12700">
-            <a:solidFill>
-              <a:srgbClr val="DAD8D2"/>
-            </a:solidFill>
-            <a:prstDash val="solid"/>
-          </a:ln>
-        </p:spPr>
-      </p:sp>
-      <p:pic>
-        <p:nvPicPr>
-          <p:cNvPr id="21" name="Image 4" descr="preencoded.png">    </p:cNvPr>
-          <p:cNvPicPr>
-            <a:picLocks noChangeAspect="1"/>
-          </p:cNvPicPr>
-          <p:nvPr/>
-        </p:nvPicPr>
-        <p:blipFill>
-          <a:blip r:embed="rId5"/>
-          <a:stretch>
-            <a:fillRect/>
-          </a:stretch>
-        </p:blipFill>
-        <p:spPr>
-          <a:xfrm>
-            <a:off x="4191000" y="5130800"/>
-            <a:ext cx="228600" cy="228600"/>
-          </a:xfrm>
-          <a:prstGeom prst="rect">
-            <a:avLst/>
-          </a:prstGeom>
-        </p:spPr>
-      </p:pic>
-      <p:sp>
-        <p:nvSpPr>
-          <p:cNvPr id="22" name="Text 15"/>
-          <p:cNvSpPr txBox="1"/>
-          <p:nvPr/>
-        </p:nvSpPr>
-        <p:spPr>
-          <a:xfrm>
-            <a:off x="4495800" y="5003800"/>
-            <a:ext cx="1422400" cy="482600"/>
-          </a:xfrm>
-          <a:prstGeom prst="rect">
-            <a:avLst/>
-          </a:prstGeom>
-          <a:noFill/>
-          <a:ln/>
-        </p:spPr>
-        <p:txBody>
-          <a:bodyPr wrap="square" lIns="0" tIns="0" rIns="0" bIns="0" rtlCol="0" anchor="ctr"/>
-          <a:lstStyle/>
-          <a:p>
-            <a:pPr algn="l" indent="0" marL="0">
-              <a:buNone/>
-            </a:pPr>
-            <a:r>
-              <a:rPr lang="en-US" sz="1400" dirty="0">
-                <a:solidFill>
-                  <a:schemeClr val="tx1"/>
-                </a:solidFill>
-                <a:latin typeface="Inter Medium" pitchFamily="34" charset="0"/>
-                <a:ea typeface="Inter Medium" pitchFamily="34" charset="-122"/>
-                <a:cs typeface="Inter Medium" pitchFamily="34" charset="-120"/>
-              </a:rPr>
-              <a:t>WhatsApp</a:t>
-            </a:r>
-            <a:endParaRPr lang="en-US" sz="1400" dirty="0"/>
-          </a:p>
-        </p:txBody>
-      </p:sp>
-      <p:sp>
-        <p:nvSpPr>
-          <p:cNvPr id="23" name="Channel: USSD, no data"/>
-          <p:cNvSpPr/>
-          <p:nvPr/>
-        </p:nvSpPr>
-        <p:spPr>
-          <a:xfrm>
-            <a:off x="6197600" y="5003800"/>
-            <a:ext cx="1981200" cy="482600"/>
-          </a:xfrm>
-          <a:prstGeom prst="roundRect">
-            <a:avLst>
-              <a:gd name="adj" fmla="val 50000"/>
-            </a:avLst>
-          </a:prstGeom>
-          <a:solidFill>
-            <a:srgbClr val="FFFFFF"/>
-          </a:solidFill>
-          <a:ln w="12700">
-            <a:solidFill>
-              <a:srgbClr val="DAD8D2"/>
-            </a:solidFill>
-            <a:prstDash val="solid"/>
-          </a:ln>
-        </p:spPr>
-      </p:sp>
-      <p:pic>
-        <p:nvPicPr>
-          <p:cNvPr id="24" name="Image 5" descr="preencoded.png">    </p:cNvPr>
-          <p:cNvPicPr>
-            <a:picLocks noChangeAspect="1"/>
-          </p:cNvPicPr>
-          <p:nvPr/>
-        </p:nvPicPr>
-        <p:blipFill>
-          <a:blip r:embed="rId6"/>
-          <a:stretch>
-            <a:fillRect/>
-          </a:stretch>
-        </p:blipFill>
-        <p:spPr>
-          <a:xfrm>
-            <a:off x="6350000" y="5130800"/>
-            <a:ext cx="228600" cy="228600"/>
-          </a:xfrm>
-          <a:prstGeom prst="rect">
-            <a:avLst/>
-          </a:prstGeom>
-        </p:spPr>
-      </p:pic>
-      <p:sp>
-        <p:nvSpPr>
-          <p:cNvPr id="25" name="Text 17"/>
-          <p:cNvSpPr txBox="1"/>
-          <p:nvPr/>
-        </p:nvSpPr>
-        <p:spPr>
-          <a:xfrm>
-            <a:off x="6654800" y="5003800"/>
-            <a:ext cx="1422400" cy="482600"/>
-          </a:xfrm>
-          <a:prstGeom prst="rect">
-            <a:avLst/>
-          </a:prstGeom>
-          <a:noFill/>
-          <a:ln/>
-        </p:spPr>
-        <p:txBody>
-          <a:bodyPr wrap="square" lIns="0" tIns="0" rIns="0" bIns="0" rtlCol="0" anchor="ctr"/>
-          <a:lstStyle/>
-          <a:p>
-            <a:pPr algn="l" indent="0" marL="0">
-              <a:buNone/>
-            </a:pPr>
-            <a:r>
-              <a:rPr lang="en-US" sz="1400" dirty="0">
-                <a:solidFill>
-                  <a:schemeClr val="tx1"/>
-                </a:solidFill>
-                <a:latin typeface="Inter Medium" pitchFamily="34" charset="0"/>
-                <a:ea typeface="Inter Medium" pitchFamily="34" charset="-122"/>
-                <a:cs typeface="Inter Medium" pitchFamily="34" charset="-120"/>
-              </a:rPr>
-              <a:t>USSD, no data</a:t>
-            </a:r>
-            <a:endParaRPr lang="en-US" sz="1400" dirty="0"/>
-          </a:p>
-        </p:txBody>
-      </p:sp>
-      <p:sp>
-        <p:nvSpPr>
-          <p:cNvPr id="26" name="Channel: 5 languages"/>
-          <p:cNvSpPr/>
-          <p:nvPr/>
-        </p:nvSpPr>
-        <p:spPr>
-          <a:xfrm>
-            <a:off x="8356600" y="5003800"/>
-            <a:ext cx="1981200" cy="482600"/>
-          </a:xfrm>
-          <a:prstGeom prst="roundRect">
-            <a:avLst>
-              <a:gd name="adj" fmla="val 50000"/>
-            </a:avLst>
-          </a:prstGeom>
-          <a:solidFill>
-            <a:srgbClr val="FFFFFF"/>
-          </a:solidFill>
-          <a:ln w="12700">
-            <a:solidFill>
-              <a:srgbClr val="DAD8D2"/>
-            </a:solidFill>
-            <a:prstDash val="solid"/>
-          </a:ln>
-        </p:spPr>
-      </p:sp>
-      <p:pic>
-        <p:nvPicPr>
-          <p:cNvPr id="27" name="Image 6" descr="preencoded.png">    </p:cNvPr>
-          <p:cNvPicPr>
-            <a:picLocks noChangeAspect="1"/>
-          </p:cNvPicPr>
-          <p:nvPr/>
-        </p:nvPicPr>
-        <p:blipFill>
-          <a:blip r:embed="rId7"/>
-          <a:stretch>
-            <a:fillRect/>
-          </a:stretch>
-        </p:blipFill>
-        <p:spPr>
-          <a:xfrm>
-            <a:off x="8509000" y="5130800"/>
-            <a:ext cx="228600" cy="228600"/>
-          </a:xfrm>
-          <a:prstGeom prst="rect">
-            <a:avLst/>
-          </a:prstGeom>
-        </p:spPr>
-      </p:pic>
-      <p:sp>
-        <p:nvSpPr>
-          <p:cNvPr id="28" name="Text 19"/>
-          <p:cNvSpPr txBox="1"/>
-          <p:nvPr/>
-        </p:nvSpPr>
-        <p:spPr>
-          <a:xfrm>
-            <a:off x="8813800" y="5003800"/>
-            <a:ext cx="1422400" cy="482600"/>
-          </a:xfrm>
-          <a:prstGeom prst="rect">
-            <a:avLst/>
-          </a:prstGeom>
-          <a:noFill/>
-          <a:ln/>
-        </p:spPr>
-        <p:txBody>
-          <a:bodyPr wrap="square" lIns="0" tIns="0" rIns="0" bIns="0" rtlCol="0" anchor="ctr"/>
-          <a:lstStyle/>
-          <a:p>
-            <a:pPr algn="l" indent="0" marL="0">
-              <a:buNone/>
-            </a:pPr>
-            <a:r>
-              <a:rPr lang="en-US" sz="1400" dirty="0">
-                <a:solidFill>
-                  <a:schemeClr val="tx1"/>
-                </a:solidFill>
-                <a:latin typeface="Inter Medium" pitchFamily="34" charset="0"/>
-                <a:ea typeface="Inter Medium" pitchFamily="34" charset="-122"/>
-                <a:cs typeface="Inter Medium" pitchFamily="34" charset="-120"/>
-              </a:rPr>
-              <a:t>5 languages</a:t>
-            </a:r>
-            <a:endParaRPr lang="en-US" sz="1400" dirty="0"/>
+              <a:rPr lang="en-US" sz="1600" dirty="0">
+                <a:solidFill>
+                  <a:schemeClr val="bg1"/>
+                </a:solidFill>
+                <a:latin typeface="Inter" pitchFamily="34" charset="0"/>
+                <a:ea typeface="Inter" pitchFamily="34" charset="-122"/>
+                <a:cs typeface="Inter" pitchFamily="34" charset="-120"/>
+              </a:rPr>
+              <a:t>Customers check every bank in one place</a:t>
+            </a:r>
+            <a:endParaRPr lang="en-US" sz="1600" dirty="0"/>
           </a:p>
         </p:txBody>
       </p:sp>
@@ -7283,7 +7391,7 @@
             <a:lvl1pPr>
               <a:defRPr sz="1100">
                 <a:solidFill>
-                  <a:schemeClr val="tx2"/>
+                  <a:schemeClr val="bg2"/>
                 </a:solidFill>
                 <a:latin typeface="Inter Medium"/>
                 <a:ea typeface="Inter Medium"/>
@@ -7355,13 +7463,13 @@
             <a:r>
               <a:rPr lang="en-US" sz="3200" dirty="0">
                 <a:solidFill>
-                  <a:schemeClr val="bg1"/>
+                  <a:schemeClr val="tx1"/>
                 </a:solidFill>
                 <a:latin typeface="Inter Display SemiBold" pitchFamily="34" charset="0"/>
                 <a:ea typeface="Inter Display SemiBold" pitchFamily="34" charset="-122"/>
                 <a:cs typeface="Inter Display SemiBold" pitchFamily="34" charset="-120"/>
               </a:rPr>
-              <a:t>Built to scale</a:t>
+              <a:t>The next three months</a:t>
             </a:r>
             <a:endParaRPr lang="en-US" sz="3200" dirty="0"/>
           </a:p>
@@ -7369,26 +7477,22 @@
       </p:sp>
       <p:sp>
         <p:nvSpPr>
-          <p:cNvPr id="3" name="Pill: Bank A"/>
+          <p:cNvPr id="3" name="Shape 1"/>
           <p:cNvSpPr/>
           <p:nvPr/>
         </p:nvSpPr>
         <p:spPr>
           <a:xfrm>
-            <a:off x="1270000" y="2286000"/>
-            <a:ext cx="1905000" cy="508000"/>
-          </a:xfrm>
-          <a:prstGeom prst="roundRect">
-            <a:avLst>
-              <a:gd name="adj" fmla="val 50000"/>
-            </a:avLst>
-          </a:prstGeom>
-          <a:solidFill>
-            <a:srgbClr val="1F2622"/>
-          </a:solidFill>
-          <a:ln w="12700">
+            <a:off x="2019300" y="3048000"/>
+            <a:ext cx="8153400" cy="0"/>
+          </a:xfrm>
+          <a:prstGeom prst="line">
+            <a:avLst/>
+          </a:prstGeom>
+          <a:noFill/>
+          <a:ln w="38100">
             <a:solidFill>
-              <a:srgbClr val="2F3A35"/>
+              <a:srgbClr val="DAD8D2"/>
             </a:solidFill>
             <a:prstDash val="solid"/>
           </a:ln>
@@ -7396,23 +7500,46 @@
       </p:sp>
       <p:sp>
         <p:nvSpPr>
-          <p:cNvPr id="4" name="Text 2"/>
+          <p:cNvPr id="4" name="Shape 2"/>
+          <p:cNvSpPr/>
+          <p:nvPr/>
+        </p:nvSpPr>
+        <p:spPr>
+          <a:xfrm>
+            <a:off x="2019300" y="3048000"/>
+            <a:ext cx="2717800" cy="0"/>
+          </a:xfrm>
+          <a:prstGeom prst="line">
+            <a:avLst/>
+          </a:prstGeom>
+          <a:noFill/>
+          <a:ln w="38100">
+            <a:solidFill>
+              <a:srgbClr val="0A7A55"/>
+            </a:solidFill>
+            <a:prstDash val="solid"/>
+          </a:ln>
+        </p:spPr>
+      </p:sp>
+      <p:sp>
+        <p:nvSpPr>
+          <p:cNvPr id="5" name="Text 3"/>
           <p:cNvSpPr txBox="1"/>
           <p:nvPr/>
         </p:nvSpPr>
         <p:spPr>
           <a:xfrm>
-            <a:off x="1270000" y="2286000"/>
-            <a:ext cx="1905000" cy="508000"/>
-          </a:xfrm>
-          <a:prstGeom prst="rect">
-            <a:avLst/>
-          </a:prstGeom>
-          <a:noFill/>
-          <a:ln/>
-        </p:spPr>
-        <p:txBody>
-          <a:bodyPr wrap="square" lIns="0" tIns="0" rIns="0" bIns="0" rtlCol="0" anchor="ctr"/>
+            <a:off x="812800" y="2413000"/>
+            <a:ext cx="2413000" cy="190500"/>
+          </a:xfrm>
+          <a:prstGeom prst="rect">
+            <a:avLst/>
+          </a:prstGeom>
+          <a:noFill/>
+          <a:ln/>
+        </p:spPr>
+        <p:txBody>
+          <a:bodyPr wrap="square" lIns="0" tIns="0" rIns="0" bIns="0" rtlCol="0" anchor="t"/>
           <a:lstStyle/>
           <a:p>
             <a:pPr algn="ctr" indent="0" marL="0">
@@ -7421,13 +7548,13 @@
             <a:r>
               <a:rPr lang="en-US" sz="1400" dirty="0">
                 <a:solidFill>
-                  <a:schemeClr val="bg1"/>
+                  <a:schemeClr val="accent1"/>
                 </a:solidFill>
                 <a:latin typeface="Inter Medium" pitchFamily="34" charset="0"/>
                 <a:ea typeface="Inter Medium" pitchFamily="34" charset="-122"/>
                 <a:cs typeface="Inter Medium" pitchFamily="34" charset="-120"/>
               </a:rPr>
-              <a:t>Bank A</a:t>
+              <a:t>Built in 3 days</a:t>
             </a:r>
             <a:endParaRPr lang="en-US" sz="1400" dirty="0"/>
           </a:p>
@@ -7435,238 +7562,32 @@
       </p:sp>
       <p:sp>
         <p:nvSpPr>
-          <p:cNvPr id="5" name="Shape 3"/>
+          <p:cNvPr id="6" name="Shape 4"/>
           <p:cNvSpPr/>
           <p:nvPr/>
         </p:nvSpPr>
         <p:spPr>
           <a:xfrm>
-            <a:off x="3175000" y="2540000"/>
-            <a:ext cx="1968500" cy="762000"/>
-          </a:xfrm>
-          <a:prstGeom prst="line">
-            <a:avLst/>
-          </a:prstGeom>
-          <a:noFill/>
-          <a:ln w="31750">
+            <a:off x="1816100" y="2844800"/>
+            <a:ext cx="406400" cy="406400"/>
+          </a:xfrm>
+          <a:prstGeom prst="ellipse">
+            <a:avLst/>
+          </a:prstGeom>
+          <a:solidFill>
+            <a:srgbClr val="0A7A55"/>
+          </a:solidFill>
+          <a:ln w="38100">
             <a:solidFill>
-              <a:srgbClr val="34C48E"/>
-            </a:solidFill>
-            <a:prstDash val="solid"/>
-            <a:tailEnd type="triangle"/>
-          </a:ln>
-        </p:spPr>
-      </p:sp>
-      <p:sp>
-        <p:nvSpPr>
-          <p:cNvPr id="6" name="Pill: Bank B"/>
-          <p:cNvSpPr/>
-          <p:nvPr/>
-        </p:nvSpPr>
-        <p:spPr>
-          <a:xfrm>
-            <a:off x="1270000" y="3048000"/>
-            <a:ext cx="1905000" cy="508000"/>
-          </a:xfrm>
-          <a:prstGeom prst="roundRect">
-            <a:avLst>
-              <a:gd name="adj" fmla="val 50000"/>
-            </a:avLst>
-          </a:prstGeom>
-          <a:solidFill>
-            <a:srgbClr val="1F2622"/>
-          </a:solidFill>
-          <a:ln w="12700">
-            <a:solidFill>
-              <a:srgbClr val="2F3A35"/>
+              <a:srgbClr val="0A7A55"/>
             </a:solidFill>
             <a:prstDash val="solid"/>
           </a:ln>
         </p:spPr>
       </p:sp>
-      <p:sp>
-        <p:nvSpPr>
-          <p:cNvPr id="7" name="Text 5"/>
-          <p:cNvSpPr txBox="1"/>
-          <p:nvPr/>
-        </p:nvSpPr>
-        <p:spPr>
-          <a:xfrm>
-            <a:off x="1270000" y="3048000"/>
-            <a:ext cx="1905000" cy="508000"/>
-          </a:xfrm>
-          <a:prstGeom prst="rect">
-            <a:avLst/>
-          </a:prstGeom>
-          <a:noFill/>
-          <a:ln/>
-        </p:spPr>
-        <p:txBody>
-          <a:bodyPr wrap="square" lIns="0" tIns="0" rIns="0" bIns="0" rtlCol="0" anchor="ctr"/>
-          <a:lstStyle/>
-          <a:p>
-            <a:pPr algn="ctr" indent="0" marL="0">
-              <a:buNone/>
-            </a:pPr>
-            <a:r>
-              <a:rPr lang="en-US" sz="1400" dirty="0">
-                <a:solidFill>
-                  <a:schemeClr val="bg1"/>
-                </a:solidFill>
-                <a:latin typeface="Inter Medium" pitchFamily="34" charset="0"/>
-                <a:ea typeface="Inter Medium" pitchFamily="34" charset="-122"/>
-                <a:cs typeface="Inter Medium" pitchFamily="34" charset="-120"/>
-              </a:rPr>
-              <a:t>Bank B</a:t>
-            </a:r>
-            <a:endParaRPr lang="en-US" sz="1400" dirty="0"/>
-          </a:p>
-        </p:txBody>
-      </p:sp>
-      <p:sp>
-        <p:nvSpPr>
-          <p:cNvPr id="8" name="Shape 6"/>
-          <p:cNvSpPr/>
-          <p:nvPr/>
-        </p:nvSpPr>
-        <p:spPr>
-          <a:xfrm>
-            <a:off x="3175000" y="3302000"/>
-            <a:ext cx="1968500" cy="0"/>
-          </a:xfrm>
-          <a:prstGeom prst="line">
-            <a:avLst/>
-          </a:prstGeom>
-          <a:noFill/>
-          <a:ln w="31750">
-            <a:solidFill>
-              <a:srgbClr val="34C48E"/>
-            </a:solidFill>
-            <a:prstDash val="solid"/>
-            <a:tailEnd type="triangle"/>
-          </a:ln>
-        </p:spPr>
-      </p:sp>
-      <p:sp>
-        <p:nvSpPr>
-          <p:cNvPr id="9" name="Pill: Bank C"/>
-          <p:cNvSpPr/>
-          <p:nvPr/>
-        </p:nvSpPr>
-        <p:spPr>
-          <a:xfrm>
-            <a:off x="1270000" y="3810000"/>
-            <a:ext cx="1905000" cy="508000"/>
-          </a:xfrm>
-          <a:prstGeom prst="roundRect">
-            <a:avLst>
-              <a:gd name="adj" fmla="val 50000"/>
-            </a:avLst>
-          </a:prstGeom>
-          <a:solidFill>
-            <a:srgbClr val="1F2622"/>
-          </a:solidFill>
-          <a:ln w="12700">
-            <a:solidFill>
-              <a:srgbClr val="2F3A35"/>
-            </a:solidFill>
-            <a:prstDash val="solid"/>
-          </a:ln>
-        </p:spPr>
-      </p:sp>
-      <p:sp>
-        <p:nvSpPr>
-          <p:cNvPr id="10" name="Text 8"/>
-          <p:cNvSpPr txBox="1"/>
-          <p:nvPr/>
-        </p:nvSpPr>
-        <p:spPr>
-          <a:xfrm>
-            <a:off x="1270000" y="3810000"/>
-            <a:ext cx="1905000" cy="508000"/>
-          </a:xfrm>
-          <a:prstGeom prst="rect">
-            <a:avLst/>
-          </a:prstGeom>
-          <a:noFill/>
-          <a:ln/>
-        </p:spPr>
-        <p:txBody>
-          <a:bodyPr wrap="square" lIns="0" tIns="0" rIns="0" bIns="0" rtlCol="0" anchor="ctr"/>
-          <a:lstStyle/>
-          <a:p>
-            <a:pPr algn="ctr" indent="0" marL="0">
-              <a:buNone/>
-            </a:pPr>
-            <a:r>
-              <a:rPr lang="en-US" sz="1400" dirty="0">
-                <a:solidFill>
-                  <a:schemeClr val="bg1"/>
-                </a:solidFill>
-                <a:latin typeface="Inter Medium" pitchFamily="34" charset="0"/>
-                <a:ea typeface="Inter Medium" pitchFamily="34" charset="-122"/>
-                <a:cs typeface="Inter Medium" pitchFamily="34" charset="-120"/>
-              </a:rPr>
-              <a:t>Bank C</a:t>
-            </a:r>
-            <a:endParaRPr lang="en-US" sz="1400" dirty="0"/>
-          </a:p>
-        </p:txBody>
-      </p:sp>
-      <p:sp>
-        <p:nvSpPr>
-          <p:cNvPr id="11" name="Shape 9"/>
-          <p:cNvSpPr/>
-          <p:nvPr/>
-        </p:nvSpPr>
-        <p:spPr>
-          <a:xfrm flipV="1">
-            <a:off x="3175000" y="3302000"/>
-            <a:ext cx="1968500" cy="762000"/>
-          </a:xfrm>
-          <a:prstGeom prst="line">
-            <a:avLst/>
-          </a:prstGeom>
-          <a:noFill/>
-          <a:ln w="31750">
-            <a:solidFill>
-              <a:srgbClr val="34C48E"/>
-            </a:solidFill>
-            <a:prstDash val="solid"/>
-            <a:tailEnd type="triangle"/>
-          </a:ln>
-        </p:spPr>
-      </p:sp>
-      <p:sp>
-        <p:nvSpPr>
-          <p:cNvPr id="12" name="Gaskiyya registry"/>
-          <p:cNvSpPr/>
-          <p:nvPr/>
-        </p:nvSpPr>
-        <p:spPr>
-          <a:xfrm>
-            <a:off x="5143500" y="2349500"/>
-            <a:ext cx="1905000" cy="1905000"/>
-          </a:xfrm>
-          <a:prstGeom prst="ellipse">
-            <a:avLst/>
-          </a:prstGeom>
-          <a:solidFill>
-            <a:srgbClr val="0A7A55"/>
-          </a:solidFill>
-          <a:ln/>
-          <a:effectLst>
-            <a:outerShdw sx="100000" sy="100000" kx="0" ky="0" algn="bl" rotWithShape="0" blurRad="228600" dist="76200" dir="5400000">
-              <a:srgbClr val="0E1512">
-                <a:alpha val="15000"/>
-              </a:srgbClr>
-            </a:outerShdw>
-          </a:effectLst>
-        </p:spPr>
-      </p:sp>
       <p:pic>
         <p:nvPicPr>
-          <p:cNvPr id="13" name="Image 0" descr="Gaskiyya registry">    </p:cNvPr>
+          <p:cNvPr id="7" name="Image 0" descr="preencoded.png">    </p:cNvPr>
           <p:cNvPicPr>
             <a:picLocks noChangeAspect="1"/>
           </p:cNvPicPr>
@@ -7680,8 +7601,8 @@
         </p:blipFill>
         <p:spPr>
           <a:xfrm>
-            <a:off x="5556250" y="2762250"/>
-            <a:ext cx="1079500" cy="1079500"/>
+            <a:off x="1930400" y="2959100"/>
+            <a:ext cx="177800" cy="177800"/>
           </a:xfrm>
           <a:prstGeom prst="rect">
             <a:avLst/>
@@ -7690,84 +7611,159 @@
       </p:pic>
       <p:sp>
         <p:nvSpPr>
-          <p:cNvPr id="14" name="Shape 11"/>
-          <p:cNvSpPr/>
-          <p:nvPr/>
-        </p:nvSpPr>
-        <p:spPr>
-          <a:xfrm flipV="1">
-            <a:off x="7048500" y="2540000"/>
-            <a:ext cx="1968500" cy="762000"/>
-          </a:xfrm>
-          <a:prstGeom prst="line">
-            <a:avLst/>
-          </a:prstGeom>
-          <a:noFill/>
-          <a:ln w="31750">
-            <a:solidFill>
-              <a:srgbClr val="34C48E"/>
-            </a:solidFill>
-            <a:prstDash val="solid"/>
-            <a:tailEnd type="triangle"/>
-          </a:ln>
-        </p:spPr>
-      </p:sp>
-      <p:sp>
-        <p:nvSpPr>
-          <p:cNvPr id="15" name="Pill: Bank or Gaskiyya app"/>
-          <p:cNvSpPr/>
-          <p:nvPr/>
-        </p:nvSpPr>
-        <p:spPr>
-          <a:xfrm>
-            <a:off x="9017000" y="2286000"/>
-            <a:ext cx="2362200" cy="508000"/>
-          </a:xfrm>
-          <a:prstGeom prst="roundRect">
-            <a:avLst>
-              <a:gd name="adj" fmla="val 50000"/>
-            </a:avLst>
-          </a:prstGeom>
-          <a:solidFill>
-            <a:srgbClr val="0A7A55"/>
-          </a:solidFill>
-          <a:ln/>
-        </p:spPr>
-      </p:sp>
-      <p:sp>
-        <p:nvSpPr>
-          <p:cNvPr id="16" name="Text 13"/>
+          <p:cNvPr id="8" name="Text 5"/>
           <p:cNvSpPr txBox="1"/>
           <p:nvPr/>
         </p:nvSpPr>
         <p:spPr>
           <a:xfrm>
-            <a:off x="9017000" y="2286000"/>
-            <a:ext cx="2362200" cy="508000"/>
-          </a:xfrm>
-          <a:prstGeom prst="rect">
-            <a:avLst/>
-          </a:prstGeom>
-          <a:noFill/>
-          <a:ln/>
-        </p:spPr>
-        <p:txBody>
-          <a:bodyPr wrap="square" lIns="0" tIns="0" rIns="0" bIns="0" rtlCol="0" anchor="ctr"/>
+            <a:off x="812800" y="3454400"/>
+            <a:ext cx="2413000" cy="254000"/>
+          </a:xfrm>
+          <a:prstGeom prst="rect">
+            <a:avLst/>
+          </a:prstGeom>
+          <a:noFill/>
+          <a:ln/>
+        </p:spPr>
+        <p:txBody>
+          <a:bodyPr wrap="square" lIns="0" tIns="0" rIns="0" bIns="0" rtlCol="0" anchor="t"/>
           <a:lstStyle/>
           <a:p>
             <a:pPr algn="ctr" indent="0" marL="0">
               <a:buNone/>
             </a:pPr>
             <a:r>
+              <a:rPr lang="en-US" sz="2000" dirty="0">
+                <a:solidFill>
+                  <a:schemeClr val="tx1"/>
+                </a:solidFill>
+                <a:latin typeface="Inter Display SemiBold" pitchFamily="34" charset="0"/>
+                <a:ea typeface="Inter Display SemiBold" pitchFamily="34" charset="-122"/>
+                <a:cs typeface="Inter Display SemiBold" pitchFamily="34" charset="-120"/>
+              </a:rPr>
+              <a:t>Done</a:t>
+            </a:r>
+            <a:endParaRPr lang="en-US" sz="2000" dirty="0"/>
+          </a:p>
+        </p:txBody>
+      </p:sp>
+      <p:sp>
+        <p:nvSpPr>
+          <p:cNvPr id="9" name="Text 6"/>
+          <p:cNvSpPr txBox="1"/>
+          <p:nvPr/>
+        </p:nvSpPr>
+        <p:spPr>
+          <a:xfrm>
+            <a:off x="812800" y="3784600"/>
+            <a:ext cx="2413000" cy="889000"/>
+          </a:xfrm>
+          <a:prstGeom prst="rect">
+            <a:avLst/>
+          </a:prstGeom>
+          <a:noFill/>
+          <a:ln/>
+        </p:spPr>
+        <p:txBody>
+          <a:bodyPr wrap="square" lIns="0" tIns="0" rIns="0" bIns="0" rtlCol="0" anchor="t"/>
+          <a:lstStyle/>
+          <a:p>
+            <a:pPr algn="ctr" indent="0" marL="0">
+              <a:lnSpc>
+                <a:spcPct val="135000"/>
+              </a:lnSpc>
+              <a:buNone/>
+            </a:pPr>
+            <a:r>
               <a:rPr lang="en-US" sz="1400" dirty="0">
                 <a:solidFill>
-                  <a:srgbClr val="FFFFFF"/>
+                  <a:schemeClr val="tx2"/>
+                </a:solidFill>
+                <a:latin typeface="Inter" pitchFamily="34" charset="0"/>
+                <a:ea typeface="Inter" pitchFamily="34" charset="-122"/>
+                <a:cs typeface="Inter" pitchFamily="34" charset="-120"/>
+              </a:rPr>
+              <a:t>Registry live on AWS</a:t>
+            </a:r>
+            <a:endParaRPr lang="en-US" sz="1400" dirty="0"/>
+          </a:p>
+          <a:p>
+            <a:pPr algn="ctr" indent="0" marL="0">
+              <a:lnSpc>
+                <a:spcPct val="135000"/>
+              </a:lnSpc>
+              <a:buNone/>
+            </a:pPr>
+            <a:r>
+              <a:rPr lang="en-US" sz="1400" dirty="0">
+                <a:solidFill>
+                  <a:schemeClr val="tx2"/>
+                </a:solidFill>
+                <a:latin typeface="Inter" pitchFamily="34" charset="0"/>
+                <a:ea typeface="Inter" pitchFamily="34" charset="-122"/>
+                <a:cs typeface="Inter" pitchFamily="34" charset="-120"/>
+              </a:rPr>
+              <a:t>iOS and Android app</a:t>
+            </a:r>
+            <a:endParaRPr lang="en-US" sz="1400" dirty="0"/>
+          </a:p>
+          <a:p>
+            <a:pPr algn="ctr" indent="0" marL="0">
+              <a:lnSpc>
+                <a:spcPct val="135000"/>
+              </a:lnSpc>
+              <a:buNone/>
+            </a:pPr>
+            <a:r>
+              <a:rPr lang="en-US" sz="1400" dirty="0">
+                <a:solidFill>
+                  <a:schemeClr val="tx2"/>
+                </a:solidFill>
+                <a:latin typeface="Inter" pitchFamily="34" charset="0"/>
+                <a:ea typeface="Inter" pitchFamily="34" charset="-122"/>
+                <a:cs typeface="Inter" pitchFamily="34" charset="-120"/>
+              </a:rPr>
+              <a:t>WhatsApp, USSD, CI/CD</a:t>
+            </a:r>
+            <a:endParaRPr lang="en-US" sz="1400" dirty="0"/>
+          </a:p>
+        </p:txBody>
+      </p:sp>
+      <p:sp>
+        <p:nvSpPr>
+          <p:cNvPr id="10" name="Text 7"/>
+          <p:cNvSpPr txBox="1"/>
+          <p:nvPr/>
+        </p:nvSpPr>
+        <p:spPr>
+          <a:xfrm>
+            <a:off x="3530600" y="2413000"/>
+            <a:ext cx="2413000" cy="190500"/>
+          </a:xfrm>
+          <a:prstGeom prst="rect">
+            <a:avLst/>
+          </a:prstGeom>
+          <a:noFill/>
+          <a:ln/>
+        </p:spPr>
+        <p:txBody>
+          <a:bodyPr wrap="square" lIns="0" tIns="0" rIns="0" bIns="0" rtlCol="0" anchor="t"/>
+          <a:lstStyle/>
+          <a:p>
+            <a:pPr algn="ctr" indent="0" marL="0">
+              <a:buNone/>
+            </a:pPr>
+            <a:r>
+              <a:rPr lang="en-US" sz="1400" dirty="0">
+                <a:solidFill>
+                  <a:schemeClr val="tx2"/>
                 </a:solidFill>
                 <a:latin typeface="Inter Medium" pitchFamily="34" charset="0"/>
                 <a:ea typeface="Inter Medium" pitchFamily="34" charset="-122"/>
                 <a:cs typeface="Inter Medium" pitchFamily="34" charset="-120"/>
               </a:rPr>
-              <a:t>Bank or Gaskiyya app</a:t>
+              <a:t>Month 1</a:t>
             </a:r>
             <a:endParaRPr lang="en-US" sz="1400" dirty="0"/>
           </a:p>
@@ -7775,60 +7771,39 @@
       </p:sp>
       <p:sp>
         <p:nvSpPr>
-          <p:cNvPr id="17" name="Shape 14"/>
+          <p:cNvPr id="11" name="Shape 8"/>
           <p:cNvSpPr/>
           <p:nvPr/>
         </p:nvSpPr>
         <p:spPr>
           <a:xfrm>
-            <a:off x="7048500" y="3302000"/>
-            <a:ext cx="1968500" cy="0"/>
-          </a:xfrm>
-          <a:prstGeom prst="line">
-            <a:avLst/>
-          </a:prstGeom>
-          <a:noFill/>
-          <a:ln w="31750">
+            <a:off x="4533900" y="2844800"/>
+            <a:ext cx="406400" cy="406400"/>
+          </a:xfrm>
+          <a:prstGeom prst="ellipse">
+            <a:avLst/>
+          </a:prstGeom>
+          <a:solidFill>
+            <a:srgbClr val="FFFFFF"/>
+          </a:solidFill>
+          <a:ln w="38100">
             <a:solidFill>
-              <a:srgbClr val="34C48E"/>
+              <a:srgbClr val="0A7A55"/>
             </a:solidFill>
             <a:prstDash val="solid"/>
-            <a:tailEnd type="triangle"/>
           </a:ln>
         </p:spPr>
       </p:sp>
       <p:sp>
         <p:nvSpPr>
-          <p:cNvPr id="18" name="Pill: WhatsApp"/>
-          <p:cNvSpPr/>
-          <p:nvPr/>
-        </p:nvSpPr>
-        <p:spPr>
-          <a:xfrm>
-            <a:off x="9017000" y="3048000"/>
-            <a:ext cx="2362200" cy="508000"/>
-          </a:xfrm>
-          <a:prstGeom prst="roundRect">
-            <a:avLst>
-              <a:gd name="adj" fmla="val 50000"/>
-            </a:avLst>
-          </a:prstGeom>
-          <a:solidFill>
-            <a:srgbClr val="0A7A55"/>
-          </a:solidFill>
-          <a:ln/>
-        </p:spPr>
-      </p:sp>
-      <p:sp>
-        <p:nvSpPr>
-          <p:cNvPr id="19" name="Text 16"/>
+          <p:cNvPr id="12" name="Text 9"/>
           <p:cNvSpPr txBox="1"/>
           <p:nvPr/>
         </p:nvSpPr>
         <p:spPr>
           <a:xfrm>
-            <a:off x="9017000" y="3048000"/>
-            <a:ext cx="2362200" cy="508000"/>
+            <a:off x="4533900" y="2844800"/>
+            <a:ext cx="406400" cy="406400"/>
           </a:xfrm>
           <a:prstGeom prst="rect">
             <a:avLst/>
@@ -7844,15 +7819,155 @@
               <a:buNone/>
             </a:pPr>
             <a:r>
+              <a:rPr lang="en-US" sz="1800" dirty="0">
+                <a:solidFill>
+                  <a:schemeClr val="accent1"/>
+                </a:solidFill>
+                <a:latin typeface="Inter SemiBold" pitchFamily="34" charset="0"/>
+                <a:ea typeface="Inter SemiBold" pitchFamily="34" charset="-122"/>
+                <a:cs typeface="Inter SemiBold" pitchFamily="34" charset="-120"/>
+              </a:rPr>
+              <a:t>1</a:t>
+            </a:r>
+            <a:endParaRPr lang="en-US" sz="1800" dirty="0"/>
+          </a:p>
+        </p:txBody>
+      </p:sp>
+      <p:sp>
+        <p:nvSpPr>
+          <p:cNvPr id="13" name="Text 10"/>
+          <p:cNvSpPr txBox="1"/>
+          <p:nvPr/>
+        </p:nvSpPr>
+        <p:spPr>
+          <a:xfrm>
+            <a:off x="3530600" y="3454400"/>
+            <a:ext cx="2413000" cy="254000"/>
+          </a:xfrm>
+          <a:prstGeom prst="rect">
+            <a:avLst/>
+          </a:prstGeom>
+          <a:noFill/>
+          <a:ln/>
+        </p:spPr>
+        <p:txBody>
+          <a:bodyPr wrap="square" lIns="0" tIns="0" rIns="0" bIns="0" rtlCol="0" anchor="t"/>
+          <a:lstStyle/>
+          <a:p>
+            <a:pPr algn="ctr" indent="0" marL="0">
+              <a:buNone/>
+            </a:pPr>
+            <a:r>
+              <a:rPr lang="en-US" sz="2000" dirty="0">
+                <a:solidFill>
+                  <a:schemeClr val="tx1"/>
+                </a:solidFill>
+                <a:latin typeface="Inter Display SemiBold" pitchFamily="34" charset="0"/>
+                <a:ea typeface="Inter Display SemiBold" pitchFamily="34" charset="-122"/>
+                <a:cs typeface="Inter Display SemiBold" pitchFamily="34" charset="-120"/>
+              </a:rPr>
+              <a:t>Validate</a:t>
+            </a:r>
+            <a:endParaRPr lang="en-US" sz="2000" dirty="0"/>
+          </a:p>
+        </p:txBody>
+      </p:sp>
+      <p:sp>
+        <p:nvSpPr>
+          <p:cNvPr id="14" name="Text 11"/>
+          <p:cNvSpPr txBox="1"/>
+          <p:nvPr/>
+        </p:nvSpPr>
+        <p:spPr>
+          <a:xfrm>
+            <a:off x="3530600" y="3784600"/>
+            <a:ext cx="2413000" cy="889000"/>
+          </a:xfrm>
+          <a:prstGeom prst="rect">
+            <a:avLst/>
+          </a:prstGeom>
+          <a:noFill/>
+          <a:ln/>
+        </p:spPr>
+        <p:txBody>
+          <a:bodyPr wrap="square" lIns="0" tIns="0" rIns="0" bIns="0" rtlCol="0" anchor="t"/>
+          <a:lstStyle/>
+          <a:p>
+            <a:pPr algn="ctr" indent="0" marL="0">
+              <a:lnSpc>
+                <a:spcPct val="135000"/>
+              </a:lnSpc>
+              <a:buNone/>
+            </a:pPr>
+            <a:r>
               <a:rPr lang="en-US" sz="1400" dirty="0">
                 <a:solidFill>
-                  <a:srgbClr val="FFFFFF"/>
+                  <a:schemeClr val="tx2"/>
+                </a:solidFill>
+                <a:latin typeface="Inter" pitchFamily="34" charset="0"/>
+                <a:ea typeface="Inter" pitchFamily="34" charset="-122"/>
+                <a:cs typeface="Inter" pitchFamily="34" charset="-120"/>
+              </a:rPr>
+              <a:t>Test with real users</a:t>
+            </a:r>
+            <a:endParaRPr lang="en-US" sz="1400" dirty="0"/>
+          </a:p>
+          <a:p>
+            <a:pPr algn="ctr" indent="0" marL="0">
+              <a:lnSpc>
+                <a:spcPct val="135000"/>
+              </a:lnSpc>
+              <a:buNone/>
+            </a:pPr>
+            <a:r>
+              <a:rPr lang="en-US" sz="1400" dirty="0">
+                <a:solidFill>
+                  <a:schemeClr val="tx2"/>
+                </a:solidFill>
+                <a:latin typeface="Inter" pitchFamily="34" charset="0"/>
+                <a:ea typeface="Inter" pitchFamily="34" charset="-122"/>
+                <a:cs typeface="Inter" pitchFamily="34" charset="-120"/>
+              </a:rPr>
+              <a:t>Make every result clear</a:t>
+            </a:r>
+            <a:endParaRPr lang="en-US" sz="1400" dirty="0"/>
+          </a:p>
+        </p:txBody>
+      </p:sp>
+      <p:sp>
+        <p:nvSpPr>
+          <p:cNvPr id="15" name="Text 12"/>
+          <p:cNvSpPr txBox="1"/>
+          <p:nvPr/>
+        </p:nvSpPr>
+        <p:spPr>
+          <a:xfrm>
+            <a:off x="6248400" y="2413000"/>
+            <a:ext cx="2413000" cy="190500"/>
+          </a:xfrm>
+          <a:prstGeom prst="rect">
+            <a:avLst/>
+          </a:prstGeom>
+          <a:noFill/>
+          <a:ln/>
+        </p:spPr>
+        <p:txBody>
+          <a:bodyPr wrap="square" lIns="0" tIns="0" rIns="0" bIns="0" rtlCol="0" anchor="t"/>
+          <a:lstStyle/>
+          <a:p>
+            <a:pPr algn="ctr" indent="0" marL="0">
+              <a:buNone/>
+            </a:pPr>
+            <a:r>
+              <a:rPr lang="en-US" sz="1400" dirty="0">
+                <a:solidFill>
+                  <a:schemeClr val="tx2"/>
                 </a:solidFill>
                 <a:latin typeface="Inter Medium" pitchFamily="34" charset="0"/>
                 <a:ea typeface="Inter Medium" pitchFamily="34" charset="-122"/>
                 <a:cs typeface="Inter Medium" pitchFamily="34" charset="-120"/>
               </a:rPr>
-              <a:t>WhatsApp</a:t>
+              <a:t>Month 2</a:t>
             </a:r>
             <a:endParaRPr lang="en-US" sz="1400" dirty="0"/>
           </a:p>
@@ -7860,60 +7975,39 @@
       </p:sp>
       <p:sp>
         <p:nvSpPr>
-          <p:cNvPr id="20" name="Shape 17"/>
+          <p:cNvPr id="16" name="Shape 13"/>
           <p:cNvSpPr/>
           <p:nvPr/>
         </p:nvSpPr>
         <p:spPr>
           <a:xfrm>
-            <a:off x="7048500" y="3302000"/>
-            <a:ext cx="1968500" cy="762000"/>
-          </a:xfrm>
-          <a:prstGeom prst="line">
-            <a:avLst/>
-          </a:prstGeom>
-          <a:noFill/>
-          <a:ln w="31750">
+            <a:off x="7251700" y="2844800"/>
+            <a:ext cx="406400" cy="406400"/>
+          </a:xfrm>
+          <a:prstGeom prst="ellipse">
+            <a:avLst/>
+          </a:prstGeom>
+          <a:solidFill>
+            <a:srgbClr val="FFFFFF"/>
+          </a:solidFill>
+          <a:ln w="38100">
             <a:solidFill>
-              <a:srgbClr val="34C48E"/>
+              <a:srgbClr val="0A7A55"/>
             </a:solidFill>
             <a:prstDash val="solid"/>
-            <a:tailEnd type="triangle"/>
           </a:ln>
         </p:spPr>
       </p:sp>
       <p:sp>
         <p:nvSpPr>
-          <p:cNvPr id="21" name="Pill: USSD on any phone"/>
-          <p:cNvSpPr/>
-          <p:nvPr/>
-        </p:nvSpPr>
-        <p:spPr>
-          <a:xfrm>
-            <a:off x="9017000" y="3810000"/>
-            <a:ext cx="2362200" cy="508000"/>
-          </a:xfrm>
-          <a:prstGeom prst="roundRect">
-            <a:avLst>
-              <a:gd name="adj" fmla="val 50000"/>
-            </a:avLst>
-          </a:prstGeom>
-          <a:solidFill>
-            <a:srgbClr val="0A7A55"/>
-          </a:solidFill>
-          <a:ln/>
-        </p:spPr>
-      </p:sp>
-      <p:sp>
-        <p:nvSpPr>
-          <p:cNvPr id="22" name="Text 19"/>
+          <p:cNvPr id="17" name="Text 14"/>
           <p:cNvSpPr txBox="1"/>
           <p:nvPr/>
         </p:nvSpPr>
         <p:spPr>
           <a:xfrm>
-            <a:off x="9017000" y="3810000"/>
-            <a:ext cx="2362200" cy="508000"/>
+            <a:off x="7251700" y="2844800"/>
+            <a:ext cx="406400" cy="406400"/>
           </a:xfrm>
           <a:prstGeom prst="rect">
             <a:avLst/>
@@ -7929,15 +8023,155 @@
               <a:buNone/>
             </a:pPr>
             <a:r>
+              <a:rPr lang="en-US" sz="1800" dirty="0">
+                <a:solidFill>
+                  <a:schemeClr val="accent1"/>
+                </a:solidFill>
+                <a:latin typeface="Inter SemiBold" pitchFamily="34" charset="0"/>
+                <a:ea typeface="Inter SemiBold" pitchFamily="34" charset="-122"/>
+                <a:cs typeface="Inter SemiBold" pitchFamily="34" charset="-120"/>
+              </a:rPr>
+              <a:t>2</a:t>
+            </a:r>
+            <a:endParaRPr lang="en-US" sz="1800" dirty="0"/>
+          </a:p>
+        </p:txBody>
+      </p:sp>
+      <p:sp>
+        <p:nvSpPr>
+          <p:cNvPr id="18" name="Text 15"/>
+          <p:cNvSpPr txBox="1"/>
+          <p:nvPr/>
+        </p:nvSpPr>
+        <p:spPr>
+          <a:xfrm>
+            <a:off x="6248400" y="3454400"/>
+            <a:ext cx="2413000" cy="254000"/>
+          </a:xfrm>
+          <a:prstGeom prst="rect">
+            <a:avLst/>
+          </a:prstGeom>
+          <a:noFill/>
+          <a:ln/>
+        </p:spPr>
+        <p:txBody>
+          <a:bodyPr wrap="square" lIns="0" tIns="0" rIns="0" bIns="0" rtlCol="0" anchor="t"/>
+          <a:lstStyle/>
+          <a:p>
+            <a:pPr algn="ctr" indent="0" marL="0">
+              <a:buNone/>
+            </a:pPr>
+            <a:r>
+              <a:rPr lang="en-US" sz="2000" dirty="0">
+                <a:solidFill>
+                  <a:schemeClr val="tx1"/>
+                </a:solidFill>
+                <a:latin typeface="Inter Display SemiBold" pitchFamily="34" charset="0"/>
+                <a:ea typeface="Inter Display SemiBold" pitchFamily="34" charset="-122"/>
+                <a:cs typeface="Inter Display SemiBold" pitchFamily="34" charset="-120"/>
+              </a:rPr>
+              <a:t>Strengthen</a:t>
+            </a:r>
+            <a:endParaRPr lang="en-US" sz="2000" dirty="0"/>
+          </a:p>
+        </p:txBody>
+      </p:sp>
+      <p:sp>
+        <p:nvSpPr>
+          <p:cNvPr id="19" name="Text 16"/>
+          <p:cNvSpPr txBox="1"/>
+          <p:nvPr/>
+        </p:nvSpPr>
+        <p:spPr>
+          <a:xfrm>
+            <a:off x="6248400" y="3784600"/>
+            <a:ext cx="2413000" cy="889000"/>
+          </a:xfrm>
+          <a:prstGeom prst="rect">
+            <a:avLst/>
+          </a:prstGeom>
+          <a:noFill/>
+          <a:ln/>
+        </p:spPr>
+        <p:txBody>
+          <a:bodyPr wrap="square" lIns="0" tIns="0" rIns="0" bIns="0" rtlCol="0" anchor="t"/>
+          <a:lstStyle/>
+          <a:p>
+            <a:pPr algn="ctr" indent="0" marL="0">
+              <a:lnSpc>
+                <a:spcPct val="135000"/>
+              </a:lnSpc>
+              <a:buNone/>
+            </a:pPr>
+            <a:r>
               <a:rPr lang="en-US" sz="1400" dirty="0">
                 <a:solidFill>
-                  <a:srgbClr val="FFFFFF"/>
+                  <a:schemeClr val="tx2"/>
+                </a:solidFill>
+                <a:latin typeface="Inter" pitchFamily="34" charset="0"/>
+                <a:ea typeface="Inter" pitchFamily="34" charset="-122"/>
+                <a:cs typeface="Inter" pitchFamily="34" charset="-120"/>
+              </a:rPr>
+              <a:t>Security and privacy review</a:t>
+            </a:r>
+            <a:endParaRPr lang="en-US" sz="1400" dirty="0"/>
+          </a:p>
+          <a:p>
+            <a:pPr algn="ctr" indent="0" marL="0">
+              <a:lnSpc>
+                <a:spcPct val="135000"/>
+              </a:lnSpc>
+              <a:buNone/>
+            </a:pPr>
+            <a:r>
+              <a:rPr lang="en-US" sz="1400" dirty="0">
+                <a:solidFill>
+                  <a:schemeClr val="tx2"/>
+                </a:solidFill>
+                <a:latin typeface="Inter" pitchFamily="34" charset="0"/>
+                <a:ea typeface="Inter" pitchFamily="34" charset="-122"/>
+                <a:cs typeface="Inter" pitchFamily="34" charset="-120"/>
+              </a:rPr>
+              <a:t>Bank integration requirements</a:t>
+            </a:r>
+            <a:endParaRPr lang="en-US" sz="1400" dirty="0"/>
+          </a:p>
+        </p:txBody>
+      </p:sp>
+      <p:sp>
+        <p:nvSpPr>
+          <p:cNvPr id="20" name="Text 17"/>
+          <p:cNvSpPr txBox="1"/>
+          <p:nvPr/>
+        </p:nvSpPr>
+        <p:spPr>
+          <a:xfrm>
+            <a:off x="8966200" y="2413000"/>
+            <a:ext cx="2413000" cy="190500"/>
+          </a:xfrm>
+          <a:prstGeom prst="rect">
+            <a:avLst/>
+          </a:prstGeom>
+          <a:noFill/>
+          <a:ln/>
+        </p:spPr>
+        <p:txBody>
+          <a:bodyPr wrap="square" lIns="0" tIns="0" rIns="0" bIns="0" rtlCol="0" anchor="t"/>
+          <a:lstStyle/>
+          <a:p>
+            <a:pPr algn="ctr" indent="0" marL="0">
+              <a:buNone/>
+            </a:pPr>
+            <a:r>
+              <a:rPr lang="en-US" sz="1400" dirty="0">
+                <a:solidFill>
+                  <a:schemeClr val="tx2"/>
                 </a:solidFill>
                 <a:latin typeface="Inter Medium" pitchFamily="34" charset="0"/>
                 <a:ea typeface="Inter Medium" pitchFamily="34" charset="-122"/>
                 <a:cs typeface="Inter Medium" pitchFamily="34" charset="-120"/>
               </a:rPr>
-              <a:t>USSD on any phone</a:t>
+              <a:t>Month 3</a:t>
             </a:r>
             <a:endParaRPr lang="en-US" sz="1400" dirty="0"/>
           </a:p>
@@ -7945,58 +8179,39 @@
       </p:sp>
       <p:sp>
         <p:nvSpPr>
-          <p:cNvPr id="23" name="Shape 20"/>
+          <p:cNvPr id="21" name="Shape 18"/>
           <p:cNvSpPr/>
           <p:nvPr/>
         </p:nvSpPr>
         <p:spPr>
           <a:xfrm>
-            <a:off x="812800" y="5080000"/>
-            <a:ext cx="254000" cy="254000"/>
+            <a:off x="9969500" y="2844800"/>
+            <a:ext cx="406400" cy="406400"/>
           </a:xfrm>
           <a:prstGeom prst="ellipse">
             <a:avLst/>
           </a:prstGeom>
           <a:solidFill>
-            <a:srgbClr val="0A7A55"/>
+            <a:srgbClr val="FFFFFF"/>
           </a:solidFill>
-          <a:ln/>
-        </p:spPr>
-      </p:sp>
-      <p:pic>
-        <p:nvPicPr>
-          <p:cNvPr id="24" name="Image 1" descr="preencoded.png">    </p:cNvPr>
-          <p:cNvPicPr>
-            <a:picLocks noChangeAspect="1"/>
-          </p:cNvPicPr>
-          <p:nvPr/>
-        </p:nvPicPr>
-        <p:blipFill>
-          <a:blip r:embed="rId2"/>
-          <a:stretch>
-            <a:fillRect/>
-          </a:stretch>
-        </p:blipFill>
-        <p:spPr>
-          <a:xfrm>
-            <a:off x="876300" y="5143500"/>
-            <a:ext cx="127000" cy="127000"/>
-          </a:xfrm>
-          <a:prstGeom prst="rect">
-            <a:avLst/>
-          </a:prstGeom>
-        </p:spPr>
-      </p:pic>
-      <p:sp>
-        <p:nvSpPr>
-          <p:cNvPr id="25" name="Text 21"/>
+          <a:ln w="38100">
+            <a:solidFill>
+              <a:srgbClr val="0A7A55"/>
+            </a:solidFill>
+            <a:prstDash val="solid"/>
+          </a:ln>
+        </p:spPr>
+      </p:sp>
+      <p:sp>
+        <p:nvSpPr>
+          <p:cNvPr id="22" name="Text 19"/>
           <p:cNvSpPr txBox="1"/>
           <p:nvPr/>
         </p:nvSpPr>
         <p:spPr>
           <a:xfrm>
-            <a:off x="1168400" y="5080000"/>
-            <a:ext cx="3175000" cy="254000"/>
+            <a:off x="9969500" y="2844800"/>
+            <a:ext cx="406400" cy="406400"/>
           </a:xfrm>
           <a:prstGeom prst="rect">
             <a:avLst/>
@@ -8008,187 +8223,122 @@
           <a:bodyPr wrap="square" lIns="0" tIns="0" rIns="0" bIns="0" rtlCol="0" anchor="ctr"/>
           <a:lstStyle/>
           <a:p>
-            <a:pPr algn="l" indent="0" marL="0">
-              <a:buNone/>
-            </a:pPr>
-            <a:r>
-              <a:rPr lang="en-US" sz="1600" dirty="0">
-                <a:solidFill>
-                  <a:schemeClr val="bg1"/>
+            <a:pPr algn="ctr" indent="0" marL="0">
+              <a:buNone/>
+            </a:pPr>
+            <a:r>
+              <a:rPr lang="en-US" sz="1800" dirty="0">
+                <a:solidFill>
+                  <a:schemeClr val="accent1"/>
+                </a:solidFill>
+                <a:latin typeface="Inter SemiBold" pitchFamily="34" charset="0"/>
+                <a:ea typeface="Inter SemiBold" pitchFamily="34" charset="-122"/>
+                <a:cs typeface="Inter SemiBold" pitchFamily="34" charset="-120"/>
+              </a:rPr>
+              <a:t>3</a:t>
+            </a:r>
+            <a:endParaRPr lang="en-US" sz="1800" dirty="0"/>
+          </a:p>
+        </p:txBody>
+      </p:sp>
+      <p:sp>
+        <p:nvSpPr>
+          <p:cNvPr id="23" name="Text 20"/>
+          <p:cNvSpPr txBox="1"/>
+          <p:nvPr/>
+        </p:nvSpPr>
+        <p:spPr>
+          <a:xfrm>
+            <a:off x="8966200" y="3454400"/>
+            <a:ext cx="2413000" cy="254000"/>
+          </a:xfrm>
+          <a:prstGeom prst="rect">
+            <a:avLst/>
+          </a:prstGeom>
+          <a:noFill/>
+          <a:ln/>
+        </p:spPr>
+        <p:txBody>
+          <a:bodyPr wrap="square" lIns="0" tIns="0" rIns="0" bIns="0" rtlCol="0" anchor="t"/>
+          <a:lstStyle/>
+          <a:p>
+            <a:pPr algn="ctr" indent="0" marL="0">
+              <a:buNone/>
+            </a:pPr>
+            <a:r>
+              <a:rPr lang="en-US" sz="2000" dirty="0">
+                <a:solidFill>
+                  <a:schemeClr val="tx1"/>
+                </a:solidFill>
+                <a:latin typeface="Inter Display SemiBold" pitchFamily="34" charset="0"/>
+                <a:ea typeface="Inter Display SemiBold" pitchFamily="34" charset="-122"/>
+                <a:cs typeface="Inter Display SemiBold" pitchFamily="34" charset="-120"/>
+              </a:rPr>
+              <a:t>Pilot</a:t>
+            </a:r>
+            <a:endParaRPr lang="en-US" sz="2000" dirty="0"/>
+          </a:p>
+        </p:txBody>
+      </p:sp>
+      <p:sp>
+        <p:nvSpPr>
+          <p:cNvPr id="24" name="Text 21"/>
+          <p:cNvSpPr txBox="1"/>
+          <p:nvPr/>
+        </p:nvSpPr>
+        <p:spPr>
+          <a:xfrm>
+            <a:off x="8966200" y="3784600"/>
+            <a:ext cx="2413000" cy="889000"/>
+          </a:xfrm>
+          <a:prstGeom prst="rect">
+            <a:avLst/>
+          </a:prstGeom>
+          <a:noFill/>
+          <a:ln/>
+        </p:spPr>
+        <p:txBody>
+          <a:bodyPr wrap="square" lIns="0" tIns="0" rIns="0" bIns="0" rtlCol="0" anchor="t"/>
+          <a:lstStyle/>
+          <a:p>
+            <a:pPr algn="ctr" indent="0" marL="0">
+              <a:lnSpc>
+                <a:spcPct val="135000"/>
+              </a:lnSpc>
+              <a:buNone/>
+            </a:pPr>
+            <a:r>
+              <a:rPr lang="en-US" sz="1400" dirty="0">
+                <a:solidFill>
+                  <a:schemeClr val="tx2"/>
                 </a:solidFill>
                 <a:latin typeface="Inter" pitchFamily="34" charset="0"/>
                 <a:ea typeface="Inter" pitchFamily="34" charset="-122"/>
                 <a:cs typeface="Inter" pitchFamily="34" charset="-120"/>
               </a:rPr>
-              <a:t>Same API for every bank</a:t>
-            </a:r>
-            <a:endParaRPr lang="en-US" sz="1600" dirty="0"/>
-          </a:p>
-        </p:txBody>
-      </p:sp>
-      <p:sp>
-        <p:nvSpPr>
-          <p:cNvPr id="26" name="Shape 22"/>
-          <p:cNvSpPr/>
-          <p:nvPr/>
-        </p:nvSpPr>
-        <p:spPr>
-          <a:xfrm>
-            <a:off x="4445000" y="5080000"/>
-            <a:ext cx="254000" cy="254000"/>
-          </a:xfrm>
-          <a:prstGeom prst="ellipse">
-            <a:avLst/>
-          </a:prstGeom>
-          <a:solidFill>
-            <a:srgbClr val="0A7A55"/>
-          </a:solidFill>
-          <a:ln/>
-        </p:spPr>
-      </p:sp>
-      <p:pic>
-        <p:nvPicPr>
-          <p:cNvPr id="27" name="Image 2" descr="preencoded.png">    </p:cNvPr>
-          <p:cNvPicPr>
-            <a:picLocks noChangeAspect="1"/>
-          </p:cNvPicPr>
-          <p:nvPr/>
-        </p:nvPicPr>
-        <p:blipFill>
-          <a:blip r:embed="rId3"/>
-          <a:stretch>
-            <a:fillRect/>
-          </a:stretch>
-        </p:blipFill>
-        <p:spPr>
-          <a:xfrm>
-            <a:off x="4508500" y="5143500"/>
-            <a:ext cx="127000" cy="127000"/>
-          </a:xfrm>
-          <a:prstGeom prst="rect">
-            <a:avLst/>
-          </a:prstGeom>
-        </p:spPr>
-      </p:pic>
-      <p:sp>
-        <p:nvSpPr>
-          <p:cNvPr id="28" name="Text 23"/>
-          <p:cNvSpPr txBox="1"/>
-          <p:nvPr/>
-        </p:nvSpPr>
-        <p:spPr>
-          <a:xfrm>
-            <a:off x="4800600" y="5080000"/>
-            <a:ext cx="3175000" cy="254000"/>
-          </a:xfrm>
-          <a:prstGeom prst="rect">
-            <a:avLst/>
-          </a:prstGeom>
-          <a:noFill/>
-          <a:ln/>
-        </p:spPr>
-        <p:txBody>
-          <a:bodyPr wrap="square" lIns="0" tIns="0" rIns="0" bIns="0" rtlCol="0" anchor="ctr"/>
-          <a:lstStyle/>
-          <a:p>
-            <a:pPr algn="l" indent="0" marL="0">
-              <a:buNone/>
-            </a:pPr>
-            <a:r>
-              <a:rPr lang="en-US" sz="1600" dirty="0">
-                <a:solidFill>
-                  <a:schemeClr val="bg1"/>
+              <a:t>Controlled pilot with a partner bank</a:t>
+            </a:r>
+            <a:endParaRPr lang="en-US" sz="1400" dirty="0"/>
+          </a:p>
+          <a:p>
+            <a:pPr algn="ctr" indent="0" marL="0">
+              <a:lnSpc>
+                <a:spcPct val="135000"/>
+              </a:lnSpc>
+              <a:buNone/>
+            </a:pPr>
+            <a:r>
+              <a:rPr lang="en-US" sz="1400" dirty="0">
+                <a:solidFill>
+                  <a:schemeClr val="tx2"/>
                 </a:solidFill>
                 <a:latin typeface="Inter" pitchFamily="34" charset="0"/>
                 <a:ea typeface="Inter" pitchFamily="34" charset="-122"/>
                 <a:cs typeface="Inter" pitchFamily="34" charset="-120"/>
               </a:rPr>
-              <a:t>Each bank keeps its own keys</a:t>
-            </a:r>
-            <a:endParaRPr lang="en-US" sz="1600" dirty="0"/>
-          </a:p>
-        </p:txBody>
-      </p:sp>
-      <p:sp>
-        <p:nvSpPr>
-          <p:cNvPr id="29" name="Shape 24"/>
-          <p:cNvSpPr/>
-          <p:nvPr/>
-        </p:nvSpPr>
-        <p:spPr>
-          <a:xfrm>
-            <a:off x="8077200" y="5080000"/>
-            <a:ext cx="254000" cy="254000"/>
-          </a:xfrm>
-          <a:prstGeom prst="ellipse">
-            <a:avLst/>
-          </a:prstGeom>
-          <a:solidFill>
-            <a:srgbClr val="0A7A55"/>
-          </a:solidFill>
-          <a:ln/>
-        </p:spPr>
-      </p:sp>
-      <p:pic>
-        <p:nvPicPr>
-          <p:cNvPr id="30" name="Image 3" descr="preencoded.png">    </p:cNvPr>
-          <p:cNvPicPr>
-            <a:picLocks noChangeAspect="1"/>
-          </p:cNvPicPr>
-          <p:nvPr/>
-        </p:nvPicPr>
-        <p:blipFill>
-          <a:blip r:embed="rId4"/>
-          <a:stretch>
-            <a:fillRect/>
-          </a:stretch>
-        </p:blipFill>
-        <p:spPr>
-          <a:xfrm>
-            <a:off x="8140700" y="5143500"/>
-            <a:ext cx="127000" cy="127000"/>
-          </a:xfrm>
-          <a:prstGeom prst="rect">
-            <a:avLst/>
-          </a:prstGeom>
-        </p:spPr>
-      </p:pic>
-      <p:sp>
-        <p:nvSpPr>
-          <p:cNvPr id="31" name="Text 25"/>
-          <p:cNvSpPr txBox="1"/>
-          <p:nvPr/>
-        </p:nvSpPr>
-        <p:spPr>
-          <a:xfrm>
-            <a:off x="8432800" y="5080000"/>
-            <a:ext cx="3175000" cy="254000"/>
-          </a:xfrm>
-          <a:prstGeom prst="rect">
-            <a:avLst/>
-          </a:prstGeom>
-          <a:noFill/>
-          <a:ln/>
-        </p:spPr>
-        <p:txBody>
-          <a:bodyPr wrap="square" lIns="0" tIns="0" rIns="0" bIns="0" rtlCol="0" anchor="ctr"/>
-          <a:lstStyle/>
-          <a:p>
-            <a:pPr algn="l" indent="0" marL="0">
-              <a:buNone/>
-            </a:pPr>
-            <a:r>
-              <a:rPr lang="en-US" sz="1600" dirty="0">
-                <a:solidFill>
-                  <a:schemeClr val="bg1"/>
-                </a:solidFill>
-                <a:latin typeface="Inter" pitchFamily="34" charset="0"/>
-                <a:ea typeface="Inter" pitchFamily="34" charset="-122"/>
-                <a:cs typeface="Inter" pitchFamily="34" charset="-120"/>
-              </a:rPr>
-              <a:t>Customers check every bank in one place</a:t>
-            </a:r>
-            <a:endParaRPr lang="en-US" sz="1600" dirty="0"/>
+              <a:t>Measure, then decide on rollout</a:t>
+            </a:r>
+            <a:endParaRPr lang="en-US" sz="1400" dirty="0"/>
           </a:p>
         </p:txBody>
       </p:sp>
@@ -8222,7 +8372,7 @@
             <a:lvl1pPr>
               <a:defRPr sz="1100">
                 <a:solidFill>
-                  <a:schemeClr val="bg2"/>
+                  <a:schemeClr val="tx2"/>
                 </a:solidFill>
                 <a:latin typeface="Inter Medium"/>
                 <a:ea typeface="Inter Medium"/>
@@ -8294,13 +8444,13 @@
             <a:r>
               <a:rPr lang="en-US" sz="3200" dirty="0">
                 <a:solidFill>
-                  <a:schemeClr val="tx1"/>
+                  <a:schemeClr val="bg1"/>
                 </a:solidFill>
                 <a:latin typeface="Inter Display SemiBold" pitchFamily="34" charset="0"/>
                 <a:ea typeface="Inter Display SemiBold" pitchFamily="34" charset="-122"/>
                 <a:cs typeface="Inter Display SemiBold" pitchFamily="34" charset="-120"/>
               </a:rPr>
-              <a:t>The next three months</a:t>
+              <a:t>Live demo</a:t>
             </a:r>
             <a:endParaRPr lang="en-US" sz="3200" dirty="0"/>
           </a:p>
@@ -8308,99 +8458,14 @@
       </p:sp>
       <p:sp>
         <p:nvSpPr>
-          <p:cNvPr id="3" name="Shape 1"/>
+          <p:cNvPr id="3" name="The bank sends"/>
           <p:cNvSpPr/>
           <p:nvPr/>
         </p:nvSpPr>
         <p:spPr>
           <a:xfrm>
-            <a:off x="2019300" y="3048000"/>
-            <a:ext cx="8153400" cy="0"/>
-          </a:xfrm>
-          <a:prstGeom prst="line">
-            <a:avLst/>
-          </a:prstGeom>
-          <a:noFill/>
-          <a:ln w="38100">
-            <a:solidFill>
-              <a:srgbClr val="DAD8D2"/>
-            </a:solidFill>
-            <a:prstDash val="solid"/>
-          </a:ln>
-        </p:spPr>
-      </p:sp>
-      <p:sp>
-        <p:nvSpPr>
-          <p:cNvPr id="4" name="Shape 2"/>
-          <p:cNvSpPr/>
-          <p:nvPr/>
-        </p:nvSpPr>
-        <p:spPr>
-          <a:xfrm>
-            <a:off x="2019300" y="3048000"/>
-            <a:ext cx="2717800" cy="0"/>
-          </a:xfrm>
-          <a:prstGeom prst="line">
-            <a:avLst/>
-          </a:prstGeom>
-          <a:noFill/>
-          <a:ln w="38100">
-            <a:solidFill>
-              <a:srgbClr val="0A7A55"/>
-            </a:solidFill>
-            <a:prstDash val="solid"/>
-          </a:ln>
-        </p:spPr>
-      </p:sp>
-      <p:sp>
-        <p:nvSpPr>
-          <p:cNvPr id="5" name="Text 3"/>
-          <p:cNvSpPr txBox="1"/>
-          <p:nvPr/>
-        </p:nvSpPr>
-        <p:spPr>
-          <a:xfrm>
-            <a:off x="812800" y="2413000"/>
-            <a:ext cx="2413000" cy="190500"/>
-          </a:xfrm>
-          <a:prstGeom prst="rect">
-            <a:avLst/>
-          </a:prstGeom>
-          <a:noFill/>
-          <a:ln/>
-        </p:spPr>
-        <p:txBody>
-          <a:bodyPr wrap="square" lIns="0" tIns="0" rIns="0" bIns="0" rtlCol="0" anchor="t"/>
-          <a:lstStyle/>
-          <a:p>
-            <a:pPr algn="ctr" indent="0" marL="0">
-              <a:buNone/>
-            </a:pPr>
-            <a:r>
-              <a:rPr lang="en-US" sz="1400" dirty="0">
-                <a:solidFill>
-                  <a:schemeClr val="accent1"/>
-                </a:solidFill>
-                <a:latin typeface="Inter Medium" pitchFamily="34" charset="0"/>
-                <a:ea typeface="Inter Medium" pitchFamily="34" charset="-122"/>
-                <a:cs typeface="Inter Medium" pitchFamily="34" charset="-120"/>
-              </a:rPr>
-              <a:t>Built in 3 days</a:t>
-            </a:r>
-            <a:endParaRPr lang="en-US" sz="1400" dirty="0"/>
-          </a:p>
-        </p:txBody>
-      </p:sp>
-      <p:sp>
-        <p:nvSpPr>
-          <p:cNvPr id="6" name="Shape 4"/>
-          <p:cNvSpPr/>
-          <p:nvPr/>
-        </p:nvSpPr>
-        <p:spPr>
-          <a:xfrm>
-            <a:off x="1816100" y="2844800"/>
-            <a:ext cx="406400" cy="406400"/>
+            <a:off x="1003300" y="2600325"/>
+            <a:ext cx="1016000" cy="1016000"/>
           </a:xfrm>
           <a:prstGeom prst="ellipse">
             <a:avLst/>
@@ -8408,17 +8473,19 @@
           <a:solidFill>
             <a:srgbClr val="0A7A55"/>
           </a:solidFill>
-          <a:ln w="38100">
-            <a:solidFill>
-              <a:srgbClr val="0A7A55"/>
-            </a:solidFill>
-            <a:prstDash val="solid"/>
-          </a:ln>
+          <a:ln/>
+          <a:effectLst>
+            <a:outerShdw sx="100000" sy="100000" kx="0" ky="0" algn="bl" rotWithShape="0" blurRad="228600" dist="76200" dir="5400000">
+              <a:srgbClr val="0E1512">
+                <a:alpha val="15000"/>
+              </a:srgbClr>
+            </a:outerShdw>
+          </a:effectLst>
         </p:spPr>
       </p:sp>
       <p:pic>
         <p:nvPicPr>
-          <p:cNvPr id="7" name="Image 0" descr="preencoded.png">    </p:cNvPr>
+          <p:cNvPr id="4" name="Image 0" descr="The bank sends">    </p:cNvPr>
           <p:cNvPicPr>
             <a:picLocks noChangeAspect="1"/>
           </p:cNvPicPr>
@@ -8432,24 +8499,259 @@
         </p:blipFill>
         <p:spPr>
           <a:xfrm>
-            <a:off x="1930400" y="2959100"/>
-            <a:ext cx="177800" cy="177800"/>
+            <a:off x="1270000" y="2867025"/>
+            <a:ext cx="482600" cy="482600"/>
           </a:xfrm>
           <a:prstGeom prst="rect">
             <a:avLst/>
           </a:prstGeom>
         </p:spPr>
       </p:pic>
-      <p:sp>
-        <p:nvSpPr>
-          <p:cNvPr id="8" name="Text 5"/>
+      <p:pic>
+        <p:nvPicPr>
+          <p:cNvPr id="5" name="App screenshot: Customer shares it" descr="Customer shares it">    </p:cNvPr>
+          <p:cNvPicPr>
+            <a:picLocks noChangeAspect="1"/>
+          </p:cNvPicPr>
+          <p:nvPr/>
+        </p:nvPicPr>
+        <p:blipFill>
+          <a:blip r:embed="rId2"/>
+          <a:stretch>
+            <a:fillRect/>
+          </a:stretch>
+        </p:blipFill>
+        <p:spPr>
+          <a:xfrm>
+            <a:off x="2504281" y="1615281"/>
+            <a:ext cx="1658938" cy="2986088"/>
+          </a:xfrm>
+          <a:prstGeom prst="rect">
+            <a:avLst/>
+          </a:prstGeom>
+        </p:spPr>
+      </p:pic>
+      <p:pic>
+        <p:nvPicPr>
+          <p:cNvPr id="6" name="App screenshot: Sent by your bank" descr="Sent by your bank">    </p:cNvPr>
+          <p:cNvPicPr>
+            <a:picLocks noChangeAspect="1"/>
+          </p:cNvPicPr>
+          <p:nvPr/>
+        </p:nvPicPr>
+        <p:blipFill>
+          <a:blip r:embed="rId3"/>
+          <a:stretch>
+            <a:fillRect/>
+          </a:stretch>
+        </p:blipFill>
+        <p:spPr>
+          <a:xfrm>
+            <a:off x="4028281" y="1615281"/>
+            <a:ext cx="1658938" cy="2986088"/>
+          </a:xfrm>
+          <a:prstGeom prst="rect">
+            <a:avLst/>
+          </a:prstGeom>
+        </p:spPr>
+      </p:pic>
+      <p:pic>
+        <p:nvPicPr>
+          <p:cNvPr id="7" name="App screenshot: Tampered copy: not confirmed" descr="Tampered copy: not confirmed">    </p:cNvPr>
+          <p:cNvPicPr>
+            <a:picLocks noChangeAspect="1"/>
+          </p:cNvPicPr>
+          <p:nvPr/>
+        </p:nvPicPr>
+        <p:blipFill>
+          <a:blip r:embed="rId4"/>
+          <a:stretch>
+            <a:fillRect/>
+          </a:stretch>
+        </p:blipFill>
+        <p:spPr>
+          <a:xfrm>
+            <a:off x="5552281" y="1615281"/>
+            <a:ext cx="1658938" cy="2986088"/>
+          </a:xfrm>
+          <a:prstGeom prst="rect">
+            <a:avLst/>
+          </a:prstGeom>
+        </p:spPr>
+      </p:pic>
+      <p:pic>
+        <p:nvPicPr>
+          <p:cNvPr id="8" name="App screenshot: Bank calls: same code" descr="Bank calls: same code">    </p:cNvPr>
+          <p:cNvPicPr>
+            <a:picLocks noChangeAspect="1"/>
+          </p:cNvPicPr>
+          <p:nvPr/>
+        </p:nvPicPr>
+        <p:blipFill>
+          <a:blip r:embed="rId5"/>
+          <a:stretch>
+            <a:fillRect/>
+          </a:stretch>
+        </p:blipFill>
+        <p:spPr>
+          <a:xfrm>
+            <a:off x="7076281" y="1615281"/>
+            <a:ext cx="1658938" cy="2986088"/>
+          </a:xfrm>
+          <a:prstGeom prst="rect">
+            <a:avLst/>
+          </a:prstGeom>
+        </p:spPr>
+      </p:pic>
+      <p:sp>
+        <p:nvSpPr>
+          <p:cNvPr id="9" name="Shape 2"/>
+          <p:cNvSpPr/>
+          <p:nvPr/>
+        </p:nvSpPr>
+        <p:spPr>
+          <a:xfrm>
+            <a:off x="2476500" y="3013075"/>
+            <a:ext cx="304800" cy="190500"/>
+          </a:xfrm>
+          <a:prstGeom prst="rightArrow">
+            <a:avLst/>
+          </a:prstGeom>
+          <a:solidFill>
+            <a:srgbClr val="34C48E"/>
+          </a:solidFill>
+          <a:ln/>
+        </p:spPr>
+      </p:sp>
+      <p:sp>
+        <p:nvSpPr>
+          <p:cNvPr id="10" name="Shape 3"/>
+          <p:cNvSpPr/>
+          <p:nvPr/>
+        </p:nvSpPr>
+        <p:spPr>
+          <a:xfrm>
+            <a:off x="4013200" y="3013075"/>
+            <a:ext cx="165100" cy="190500"/>
+          </a:xfrm>
+          <a:prstGeom prst="rightArrow">
+            <a:avLst/>
+          </a:prstGeom>
+          <a:solidFill>
+            <a:srgbClr val="34C48E"/>
+          </a:solidFill>
+          <a:ln/>
+        </p:spPr>
+      </p:sp>
+      <p:sp>
+        <p:nvSpPr>
+          <p:cNvPr id="11" name="Shape 4"/>
+          <p:cNvSpPr/>
+          <p:nvPr/>
+        </p:nvSpPr>
+        <p:spPr>
+          <a:xfrm>
+            <a:off x="5537200" y="3013075"/>
+            <a:ext cx="165100" cy="190500"/>
+          </a:xfrm>
+          <a:prstGeom prst="rightArrow">
+            <a:avLst/>
+          </a:prstGeom>
+          <a:solidFill>
+            <a:srgbClr val="34C48E"/>
+          </a:solidFill>
+          <a:ln/>
+        </p:spPr>
+      </p:sp>
+      <p:sp>
+        <p:nvSpPr>
+          <p:cNvPr id="12" name="Shape 5"/>
+          <p:cNvSpPr/>
+          <p:nvPr/>
+        </p:nvSpPr>
+        <p:spPr>
+          <a:xfrm>
+            <a:off x="7061200" y="3013075"/>
+            <a:ext cx="165100" cy="190500"/>
+          </a:xfrm>
+          <a:prstGeom prst="rightArrow">
+            <a:avLst/>
+          </a:prstGeom>
+          <a:solidFill>
+            <a:srgbClr val="34C48E"/>
+          </a:solidFill>
+          <a:ln/>
+        </p:spPr>
+      </p:sp>
+      <p:sp>
+        <p:nvSpPr>
+          <p:cNvPr id="13" name="Shape 6"/>
+          <p:cNvSpPr/>
+          <p:nvPr/>
+        </p:nvSpPr>
+        <p:spPr>
+          <a:xfrm>
+            <a:off x="1384300" y="4699000"/>
+            <a:ext cx="254000" cy="254000"/>
+          </a:xfrm>
+          <a:prstGeom prst="ellipse">
+            <a:avLst/>
+          </a:prstGeom>
+          <a:solidFill>
+            <a:srgbClr val="0A7A55"/>
+          </a:solidFill>
+          <a:ln/>
+        </p:spPr>
+      </p:sp>
+      <p:sp>
+        <p:nvSpPr>
+          <p:cNvPr id="14" name="Text 7"/>
           <p:cNvSpPr txBox="1"/>
           <p:nvPr/>
         </p:nvSpPr>
         <p:spPr>
           <a:xfrm>
-            <a:off x="812800" y="3454400"/>
-            <a:ext cx="2413000" cy="254000"/>
+            <a:off x="1384300" y="4699000"/>
+            <a:ext cx="254000" cy="254000"/>
+          </a:xfrm>
+          <a:prstGeom prst="rect">
+            <a:avLst/>
+          </a:prstGeom>
+          <a:noFill/>
+          <a:ln/>
+        </p:spPr>
+        <p:txBody>
+          <a:bodyPr wrap="square" lIns="0" tIns="0" rIns="0" bIns="0" rtlCol="0" anchor="ctr"/>
+          <a:lstStyle/>
+          <a:p>
+            <a:pPr algn="ctr" indent="0" marL="0">
+              <a:buNone/>
+            </a:pPr>
+            <a:r>
+              <a:rPr lang="en-US" sz="1400" dirty="0">
+                <a:solidFill>
+                  <a:srgbClr val="FFFFFF"/>
+                </a:solidFill>
+                <a:latin typeface="Inter SemiBold" pitchFamily="34" charset="0"/>
+                <a:ea typeface="Inter SemiBold" pitchFamily="34" charset="-122"/>
+                <a:cs typeface="Inter SemiBold" pitchFamily="34" charset="-120"/>
+              </a:rPr>
+              <a:t>1</a:t>
+            </a:r>
+            <a:endParaRPr lang="en-US" sz="1400" dirty="0"/>
+          </a:p>
+        </p:txBody>
+      </p:sp>
+      <p:sp>
+        <p:nvSpPr>
+          <p:cNvPr id="15" name="Text 8"/>
+          <p:cNvSpPr txBox="1"/>
+          <p:nvPr/>
+        </p:nvSpPr>
+        <p:spPr>
+          <a:xfrm>
+            <a:off x="685800" y="5029200"/>
+            <a:ext cx="1651000" cy="381000"/>
           </a:xfrm>
           <a:prstGeom prst="rect">
             <a:avLst/>
@@ -8465,30 +8767,89 @@
               <a:buNone/>
             </a:pPr>
             <a:r>
-              <a:rPr lang="en-US" sz="2000" dirty="0">
-                <a:solidFill>
-                  <a:schemeClr val="tx1"/>
-                </a:solidFill>
-                <a:latin typeface="Inter Display SemiBold" pitchFamily="34" charset="0"/>
-                <a:ea typeface="Inter Display SemiBold" pitchFamily="34" charset="-122"/>
-                <a:cs typeface="Inter Display SemiBold" pitchFamily="34" charset="-120"/>
-              </a:rPr>
-              <a:t>Done</a:t>
-            </a:r>
-            <a:endParaRPr lang="en-US" sz="2000" dirty="0"/>
-          </a:p>
-        </p:txBody>
-      </p:sp>
-      <p:sp>
-        <p:nvSpPr>
-          <p:cNvPr id="9" name="Text 6"/>
+              <a:rPr lang="en-US" sz="1400" dirty="0">
+                <a:solidFill>
+                  <a:schemeClr val="bg1"/>
+                </a:solidFill>
+                <a:latin typeface="Inter Medium" pitchFamily="34" charset="0"/>
+                <a:ea typeface="Inter Medium" pitchFamily="34" charset="-122"/>
+                <a:cs typeface="Inter Medium" pitchFamily="34" charset="-120"/>
+              </a:rPr>
+              <a:t>The bank sends a real alert</a:t>
+            </a:r>
+            <a:endParaRPr lang="en-US" sz="1400" dirty="0"/>
+          </a:p>
+        </p:txBody>
+      </p:sp>
+      <p:sp>
+        <p:nvSpPr>
+          <p:cNvPr id="16" name="Shape 9"/>
+          <p:cNvSpPr/>
+          <p:nvPr/>
+        </p:nvSpPr>
+        <p:spPr>
+          <a:xfrm>
+            <a:off x="3206750" y="4699000"/>
+            <a:ext cx="254000" cy="254000"/>
+          </a:xfrm>
+          <a:prstGeom prst="ellipse">
+            <a:avLst/>
+          </a:prstGeom>
+          <a:solidFill>
+            <a:srgbClr val="0A7A55"/>
+          </a:solidFill>
+          <a:ln/>
+        </p:spPr>
+      </p:sp>
+      <p:sp>
+        <p:nvSpPr>
+          <p:cNvPr id="17" name="Text 10"/>
           <p:cNvSpPr txBox="1"/>
           <p:nvPr/>
         </p:nvSpPr>
         <p:spPr>
           <a:xfrm>
-            <a:off x="812800" y="3784600"/>
-            <a:ext cx="2413000" cy="889000"/>
+            <a:off x="3206750" y="4699000"/>
+            <a:ext cx="254000" cy="254000"/>
+          </a:xfrm>
+          <a:prstGeom prst="rect">
+            <a:avLst/>
+          </a:prstGeom>
+          <a:noFill/>
+          <a:ln/>
+        </p:spPr>
+        <p:txBody>
+          <a:bodyPr wrap="square" lIns="0" tIns="0" rIns="0" bIns="0" rtlCol="0" anchor="ctr"/>
+          <a:lstStyle/>
+          <a:p>
+            <a:pPr algn="ctr" indent="0" marL="0">
+              <a:buNone/>
+            </a:pPr>
+            <a:r>
+              <a:rPr lang="en-US" sz="1400" dirty="0">
+                <a:solidFill>
+                  <a:srgbClr val="FFFFFF"/>
+                </a:solidFill>
+                <a:latin typeface="Inter SemiBold" pitchFamily="34" charset="0"/>
+                <a:ea typeface="Inter SemiBold" pitchFamily="34" charset="-122"/>
+                <a:cs typeface="Inter SemiBold" pitchFamily="34" charset="-120"/>
+              </a:rPr>
+              <a:t>2</a:t>
+            </a:r>
+            <a:endParaRPr lang="en-US" sz="1400" dirty="0"/>
+          </a:p>
+        </p:txBody>
+      </p:sp>
+      <p:sp>
+        <p:nvSpPr>
+          <p:cNvPr id="18" name="Text 11"/>
+          <p:cNvSpPr txBox="1"/>
+          <p:nvPr/>
+        </p:nvSpPr>
+        <p:spPr>
+          <a:xfrm>
+            <a:off x="2603500" y="5029200"/>
+            <a:ext cx="1460500" cy="381000"/>
           </a:xfrm>
           <a:prstGeom prst="rect">
             <a:avLst/>
@@ -8501,675 +8862,624 @@
           <a:lstStyle/>
           <a:p>
             <a:pPr algn="ctr" indent="0" marL="0">
-              <a:lnSpc>
-                <a:spcPct val="135000"/>
-              </a:lnSpc>
               <a:buNone/>
             </a:pPr>
             <a:r>
               <a:rPr lang="en-US" sz="1400" dirty="0">
                 <a:solidFill>
-                  <a:schemeClr val="tx2"/>
+                  <a:schemeClr val="bg1"/>
+                </a:solidFill>
+                <a:latin typeface="Inter Medium" pitchFamily="34" charset="0"/>
+                <a:ea typeface="Inter Medium" pitchFamily="34" charset="-122"/>
+                <a:cs typeface="Inter Medium" pitchFamily="34" charset="-120"/>
+              </a:rPr>
+              <a:t>Customer shares it</a:t>
+            </a:r>
+            <a:endParaRPr lang="en-US" sz="1400" dirty="0"/>
+          </a:p>
+        </p:txBody>
+      </p:sp>
+      <p:sp>
+        <p:nvSpPr>
+          <p:cNvPr id="19" name="Shape 12"/>
+          <p:cNvSpPr/>
+          <p:nvPr/>
+        </p:nvSpPr>
+        <p:spPr>
+          <a:xfrm>
+            <a:off x="4730750" y="4699000"/>
+            <a:ext cx="254000" cy="254000"/>
+          </a:xfrm>
+          <a:prstGeom prst="ellipse">
+            <a:avLst/>
+          </a:prstGeom>
+          <a:solidFill>
+            <a:srgbClr val="0A7A55"/>
+          </a:solidFill>
+          <a:ln/>
+        </p:spPr>
+      </p:sp>
+      <p:sp>
+        <p:nvSpPr>
+          <p:cNvPr id="20" name="Text 13"/>
+          <p:cNvSpPr txBox="1"/>
+          <p:nvPr/>
+        </p:nvSpPr>
+        <p:spPr>
+          <a:xfrm>
+            <a:off x="4730750" y="4699000"/>
+            <a:ext cx="254000" cy="254000"/>
+          </a:xfrm>
+          <a:prstGeom prst="rect">
+            <a:avLst/>
+          </a:prstGeom>
+          <a:noFill/>
+          <a:ln/>
+        </p:spPr>
+        <p:txBody>
+          <a:bodyPr wrap="square" lIns="0" tIns="0" rIns="0" bIns="0" rtlCol="0" anchor="ctr"/>
+          <a:lstStyle/>
+          <a:p>
+            <a:pPr algn="ctr" indent="0" marL="0">
+              <a:buNone/>
+            </a:pPr>
+            <a:r>
+              <a:rPr lang="en-US" sz="1400" dirty="0">
+                <a:solidFill>
+                  <a:srgbClr val="FFFFFF"/>
+                </a:solidFill>
+                <a:latin typeface="Inter SemiBold" pitchFamily="34" charset="0"/>
+                <a:ea typeface="Inter SemiBold" pitchFamily="34" charset="-122"/>
+                <a:cs typeface="Inter SemiBold" pitchFamily="34" charset="-120"/>
+              </a:rPr>
+              <a:t>3</a:t>
+            </a:r>
+            <a:endParaRPr lang="en-US" sz="1400" dirty="0"/>
+          </a:p>
+        </p:txBody>
+      </p:sp>
+      <p:sp>
+        <p:nvSpPr>
+          <p:cNvPr id="21" name="Text 14"/>
+          <p:cNvSpPr txBox="1"/>
+          <p:nvPr/>
+        </p:nvSpPr>
+        <p:spPr>
+          <a:xfrm>
+            <a:off x="4127500" y="5029200"/>
+            <a:ext cx="1460500" cy="381000"/>
+          </a:xfrm>
+          <a:prstGeom prst="rect">
+            <a:avLst/>
+          </a:prstGeom>
+          <a:noFill/>
+          <a:ln/>
+        </p:spPr>
+        <p:txBody>
+          <a:bodyPr wrap="square" lIns="0" tIns="0" rIns="0" bIns="0" rtlCol="0" anchor="t"/>
+          <a:lstStyle/>
+          <a:p>
+            <a:pPr algn="ctr" indent="0" marL="0">
+              <a:buNone/>
+            </a:pPr>
+            <a:r>
+              <a:rPr lang="en-US" sz="1400" dirty="0">
+                <a:solidFill>
+                  <a:schemeClr val="bg1"/>
+                </a:solidFill>
+                <a:latin typeface="Inter Medium" pitchFamily="34" charset="0"/>
+                <a:ea typeface="Inter Medium" pitchFamily="34" charset="-122"/>
+                <a:cs typeface="Inter Medium" pitchFamily="34" charset="-120"/>
+              </a:rPr>
+              <a:t>Sent by your bank</a:t>
+            </a:r>
+            <a:endParaRPr lang="en-US" sz="1400" dirty="0"/>
+          </a:p>
+        </p:txBody>
+      </p:sp>
+      <p:sp>
+        <p:nvSpPr>
+          <p:cNvPr id="22" name="Shape 15"/>
+          <p:cNvSpPr/>
+          <p:nvPr/>
+        </p:nvSpPr>
+        <p:spPr>
+          <a:xfrm>
+            <a:off x="6254750" y="4699000"/>
+            <a:ext cx="254000" cy="254000"/>
+          </a:xfrm>
+          <a:prstGeom prst="ellipse">
+            <a:avLst/>
+          </a:prstGeom>
+          <a:solidFill>
+            <a:srgbClr val="0A7A55"/>
+          </a:solidFill>
+          <a:ln/>
+        </p:spPr>
+      </p:sp>
+      <p:sp>
+        <p:nvSpPr>
+          <p:cNvPr id="23" name="Text 16"/>
+          <p:cNvSpPr txBox="1"/>
+          <p:nvPr/>
+        </p:nvSpPr>
+        <p:spPr>
+          <a:xfrm>
+            <a:off x="6254750" y="4699000"/>
+            <a:ext cx="254000" cy="254000"/>
+          </a:xfrm>
+          <a:prstGeom prst="rect">
+            <a:avLst/>
+          </a:prstGeom>
+          <a:noFill/>
+          <a:ln/>
+        </p:spPr>
+        <p:txBody>
+          <a:bodyPr wrap="square" lIns="0" tIns="0" rIns="0" bIns="0" rtlCol="0" anchor="ctr"/>
+          <a:lstStyle/>
+          <a:p>
+            <a:pPr algn="ctr" indent="0" marL="0">
+              <a:buNone/>
+            </a:pPr>
+            <a:r>
+              <a:rPr lang="en-US" sz="1400" dirty="0">
+                <a:solidFill>
+                  <a:srgbClr val="FFFFFF"/>
+                </a:solidFill>
+                <a:latin typeface="Inter SemiBold" pitchFamily="34" charset="0"/>
+                <a:ea typeface="Inter SemiBold" pitchFamily="34" charset="-122"/>
+                <a:cs typeface="Inter SemiBold" pitchFamily="34" charset="-120"/>
+              </a:rPr>
+              <a:t>4</a:t>
+            </a:r>
+            <a:endParaRPr lang="en-US" sz="1400" dirty="0"/>
+          </a:p>
+        </p:txBody>
+      </p:sp>
+      <p:sp>
+        <p:nvSpPr>
+          <p:cNvPr id="24" name="Text 17"/>
+          <p:cNvSpPr txBox="1"/>
+          <p:nvPr/>
+        </p:nvSpPr>
+        <p:spPr>
+          <a:xfrm>
+            <a:off x="5651500" y="5029200"/>
+            <a:ext cx="1460500" cy="381000"/>
+          </a:xfrm>
+          <a:prstGeom prst="rect">
+            <a:avLst/>
+          </a:prstGeom>
+          <a:noFill/>
+          <a:ln/>
+        </p:spPr>
+        <p:txBody>
+          <a:bodyPr wrap="square" lIns="0" tIns="0" rIns="0" bIns="0" rtlCol="0" anchor="t"/>
+          <a:lstStyle/>
+          <a:p>
+            <a:pPr algn="ctr" indent="0" marL="0">
+              <a:buNone/>
+            </a:pPr>
+            <a:r>
+              <a:rPr lang="en-US" sz="1400" dirty="0">
+                <a:solidFill>
+                  <a:schemeClr val="bg1"/>
+                </a:solidFill>
+                <a:latin typeface="Inter Medium" pitchFamily="34" charset="0"/>
+                <a:ea typeface="Inter Medium" pitchFamily="34" charset="-122"/>
+                <a:cs typeface="Inter Medium" pitchFamily="34" charset="-120"/>
+              </a:rPr>
+              <a:t>Tampered copy: not confirmed</a:t>
+            </a:r>
+            <a:endParaRPr lang="en-US" sz="1400" dirty="0"/>
+          </a:p>
+        </p:txBody>
+      </p:sp>
+      <p:sp>
+        <p:nvSpPr>
+          <p:cNvPr id="25" name="Shape 18"/>
+          <p:cNvSpPr/>
+          <p:nvPr/>
+        </p:nvSpPr>
+        <p:spPr>
+          <a:xfrm>
+            <a:off x="7778750" y="4699000"/>
+            <a:ext cx="254000" cy="254000"/>
+          </a:xfrm>
+          <a:prstGeom prst="ellipse">
+            <a:avLst/>
+          </a:prstGeom>
+          <a:solidFill>
+            <a:srgbClr val="0A7A55"/>
+          </a:solidFill>
+          <a:ln/>
+        </p:spPr>
+      </p:sp>
+      <p:sp>
+        <p:nvSpPr>
+          <p:cNvPr id="26" name="Text 19"/>
+          <p:cNvSpPr txBox="1"/>
+          <p:nvPr/>
+        </p:nvSpPr>
+        <p:spPr>
+          <a:xfrm>
+            <a:off x="7778750" y="4699000"/>
+            <a:ext cx="254000" cy="254000"/>
+          </a:xfrm>
+          <a:prstGeom prst="rect">
+            <a:avLst/>
+          </a:prstGeom>
+          <a:noFill/>
+          <a:ln/>
+        </p:spPr>
+        <p:txBody>
+          <a:bodyPr wrap="square" lIns="0" tIns="0" rIns="0" bIns="0" rtlCol="0" anchor="ctr"/>
+          <a:lstStyle/>
+          <a:p>
+            <a:pPr algn="ctr" indent="0" marL="0">
+              <a:buNone/>
+            </a:pPr>
+            <a:r>
+              <a:rPr lang="en-US" sz="1400" dirty="0">
+                <a:solidFill>
+                  <a:srgbClr val="FFFFFF"/>
+                </a:solidFill>
+                <a:latin typeface="Inter SemiBold" pitchFamily="34" charset="0"/>
+                <a:ea typeface="Inter SemiBold" pitchFamily="34" charset="-122"/>
+                <a:cs typeface="Inter SemiBold" pitchFamily="34" charset="-120"/>
+              </a:rPr>
+              <a:t>5</a:t>
+            </a:r>
+            <a:endParaRPr lang="en-US" sz="1400" dirty="0"/>
+          </a:p>
+        </p:txBody>
+      </p:sp>
+      <p:sp>
+        <p:nvSpPr>
+          <p:cNvPr id="27" name="Text 20"/>
+          <p:cNvSpPr txBox="1"/>
+          <p:nvPr/>
+        </p:nvSpPr>
+        <p:spPr>
+          <a:xfrm>
+            <a:off x="7175500" y="5029200"/>
+            <a:ext cx="1460500" cy="381000"/>
+          </a:xfrm>
+          <a:prstGeom prst="rect">
+            <a:avLst/>
+          </a:prstGeom>
+          <a:noFill/>
+          <a:ln/>
+        </p:spPr>
+        <p:txBody>
+          <a:bodyPr wrap="square" lIns="0" tIns="0" rIns="0" bIns="0" rtlCol="0" anchor="t"/>
+          <a:lstStyle/>
+          <a:p>
+            <a:pPr algn="ctr" indent="0" marL="0">
+              <a:buNone/>
+            </a:pPr>
+            <a:r>
+              <a:rPr lang="en-US" sz="1400" dirty="0">
+                <a:solidFill>
+                  <a:schemeClr val="bg1"/>
+                </a:solidFill>
+                <a:latin typeface="Inter Medium" pitchFamily="34" charset="0"/>
+                <a:ea typeface="Inter Medium" pitchFamily="34" charset="-122"/>
+                <a:cs typeface="Inter Medium" pitchFamily="34" charset="-120"/>
+              </a:rPr>
+              <a:t>Bank calls: same code on both screens</a:t>
+            </a:r>
+            <a:endParaRPr lang="en-US" sz="1400" dirty="0"/>
+          </a:p>
+        </p:txBody>
+      </p:sp>
+      <p:sp>
+        <p:nvSpPr>
+          <p:cNvPr id="28" name="Shape 21"/>
+          <p:cNvSpPr/>
+          <p:nvPr/>
+        </p:nvSpPr>
+        <p:spPr>
+          <a:xfrm>
+            <a:off x="9017000" y="1587500"/>
+            <a:ext cx="0" cy="3937000"/>
+          </a:xfrm>
+          <a:prstGeom prst="line">
+            <a:avLst/>
+          </a:prstGeom>
+          <a:noFill/>
+          <a:ln w="19050">
+            <a:solidFill>
+              <a:srgbClr val="2F3A35"/>
+            </a:solidFill>
+            <a:prstDash val="solid"/>
+          </a:ln>
+        </p:spPr>
+      </p:sp>
+      <p:sp>
+        <p:nvSpPr>
+          <p:cNvPr id="29" name="Text 22"/>
+          <p:cNvSpPr txBox="1"/>
+          <p:nvPr/>
+        </p:nvSpPr>
+        <p:spPr>
+          <a:xfrm>
+            <a:off x="9271000" y="1587500"/>
+            <a:ext cx="2108200" cy="190500"/>
+          </a:xfrm>
+          <a:prstGeom prst="rect">
+            <a:avLst/>
+          </a:prstGeom>
+          <a:noFill/>
+          <a:ln/>
+        </p:spPr>
+        <p:txBody>
+          <a:bodyPr wrap="square" lIns="0" tIns="0" rIns="0" bIns="0" rtlCol="0" anchor="t"/>
+          <a:lstStyle/>
+          <a:p>
+            <a:pPr algn="ctr" indent="0" marL="0">
+              <a:buNone/>
+            </a:pPr>
+            <a:r>
+              <a:rPr lang="en-US" sz="1400" dirty="0">
+                <a:solidFill>
+                  <a:srgbClr val="34C48E"/>
+                </a:solidFill>
+                <a:latin typeface="Inter SemiBold" pitchFamily="34" charset="0"/>
+                <a:ea typeface="Inter SemiBold" pitchFamily="34" charset="-122"/>
+                <a:cs typeface="Inter SemiBold" pitchFamily="34" charset="-120"/>
+              </a:rPr>
+              <a:t>Scan to try it</a:t>
+            </a:r>
+            <a:endParaRPr lang="en-US" sz="1400" dirty="0"/>
+          </a:p>
+        </p:txBody>
+      </p:sp>
+      <p:sp>
+        <p:nvSpPr>
+          <p:cNvPr id="30" name="QR card: Website"/>
+          <p:cNvSpPr/>
+          <p:nvPr/>
+        </p:nvSpPr>
+        <p:spPr>
+          <a:xfrm>
+            <a:off x="9690100" y="1879600"/>
+            <a:ext cx="1270000" cy="1270000"/>
+          </a:xfrm>
+          <a:prstGeom prst="roundRect">
+            <a:avLst>
+              <a:gd name="adj" fmla="val 8000"/>
+            </a:avLst>
+          </a:prstGeom>
+          <a:solidFill>
+            <a:srgbClr val="FFFFFF"/>
+          </a:solidFill>
+          <a:ln/>
+        </p:spPr>
+      </p:sp>
+      <p:pic>
+        <p:nvPicPr>
+          <p:cNvPr id="31" name="QR code: Website" descr="QR code: gaskiyya-io.web.app">    </p:cNvPr>
+          <p:cNvPicPr>
+            <a:picLocks noChangeAspect="1"/>
+          </p:cNvPicPr>
+          <p:nvPr/>
+        </p:nvPicPr>
+        <p:blipFill>
+          <a:blip r:embed="rId6"/>
+          <a:stretch>
+            <a:fillRect/>
+          </a:stretch>
+        </p:blipFill>
+        <p:spPr>
+          <a:xfrm>
+            <a:off x="9766300" y="1955800"/>
+            <a:ext cx="1117600" cy="1117600"/>
+          </a:xfrm>
+          <a:prstGeom prst="rect">
+            <a:avLst/>
+          </a:prstGeom>
+        </p:spPr>
+      </p:pic>
+      <p:sp>
+        <p:nvSpPr>
+          <p:cNvPr id="32" name="Text 24"/>
+          <p:cNvSpPr txBox="1"/>
+          <p:nvPr/>
+        </p:nvSpPr>
+        <p:spPr>
+          <a:xfrm>
+            <a:off x="9271000" y="3238500"/>
+            <a:ext cx="2108200" cy="177800"/>
+          </a:xfrm>
+          <a:prstGeom prst="rect">
+            <a:avLst/>
+          </a:prstGeom>
+          <a:noFill/>
+          <a:ln/>
+        </p:spPr>
+        <p:txBody>
+          <a:bodyPr wrap="square" lIns="0" tIns="0" rIns="0" bIns="0" rtlCol="0" anchor="t"/>
+          <a:lstStyle/>
+          <a:p>
+            <a:pPr algn="ctr" indent="0" marL="0">
+              <a:buNone/>
+            </a:pPr>
+            <a:r>
+              <a:rPr lang="en-US" sz="1400" dirty="0">
+                <a:solidFill>
+                  <a:schemeClr val="bg1"/>
+                </a:solidFill>
+                <a:latin typeface="Inter SemiBold" pitchFamily="34" charset="0"/>
+                <a:ea typeface="Inter SemiBold" pitchFamily="34" charset="-122"/>
+                <a:cs typeface="Inter SemiBold" pitchFamily="34" charset="-120"/>
+              </a:rPr>
+              <a:t>Website</a:t>
+            </a:r>
+            <a:endParaRPr lang="en-US" sz="1400" dirty="0"/>
+          </a:p>
+        </p:txBody>
+      </p:sp>
+      <p:sp>
+        <p:nvSpPr>
+          <p:cNvPr id="33" name="Text 25"/>
+          <p:cNvSpPr txBox="1"/>
+          <p:nvPr/>
+        </p:nvSpPr>
+        <p:spPr>
+          <a:xfrm>
+            <a:off x="9271000" y="3416300"/>
+            <a:ext cx="2108200" cy="152400"/>
+          </a:xfrm>
+          <a:prstGeom prst="rect">
+            <a:avLst/>
+          </a:prstGeom>
+          <a:noFill/>
+          <a:ln/>
+        </p:spPr>
+        <p:txBody>
+          <a:bodyPr wrap="square" lIns="0" tIns="0" rIns="0" bIns="0" rtlCol="0" anchor="t"/>
+          <a:lstStyle/>
+          <a:p>
+            <a:pPr algn="ctr" indent="0" marL="0">
+              <a:buNone/>
+            </a:pPr>
+            <a:r>
+              <a:rPr lang="en-US" sz="1100" dirty="0">
+                <a:solidFill>
+                  <a:srgbClr val="A3ADA8"/>
                 </a:solidFill>
                 <a:latin typeface="Inter" pitchFamily="34" charset="0"/>
                 <a:ea typeface="Inter" pitchFamily="34" charset="-122"/>
                 <a:cs typeface="Inter" pitchFamily="34" charset="-120"/>
               </a:rPr>
-              <a:t>Registry live on AWS</a:t>
+              <a:t>gaskiyya-io.web.app</a:t>
+            </a:r>
+            <a:endParaRPr lang="en-US" sz="1100" dirty="0"/>
+          </a:p>
+        </p:txBody>
+      </p:sp>
+      <p:sp>
+        <p:nvSpPr>
+          <p:cNvPr id="34" name="QR card: Bank sandbox"/>
+          <p:cNvSpPr/>
+          <p:nvPr/>
+        </p:nvSpPr>
+        <p:spPr>
+          <a:xfrm>
+            <a:off x="9690100" y="3746500"/>
+            <a:ext cx="1270000" cy="1270000"/>
+          </a:xfrm>
+          <a:prstGeom prst="roundRect">
+            <a:avLst>
+              <a:gd name="adj" fmla="val 8000"/>
+            </a:avLst>
+          </a:prstGeom>
+          <a:solidFill>
+            <a:srgbClr val="FFFFFF"/>
+          </a:solidFill>
+          <a:ln/>
+        </p:spPr>
+      </p:sp>
+      <p:pic>
+        <p:nvPicPr>
+          <p:cNvPr id="35" name="QR code: Bank sandbox" descr="QR code: gaskiyya-io.web.app/console">    </p:cNvPr>
+          <p:cNvPicPr>
+            <a:picLocks noChangeAspect="1"/>
+          </p:cNvPicPr>
+          <p:nvPr/>
+        </p:nvPicPr>
+        <p:blipFill>
+          <a:blip r:embed="rId7"/>
+          <a:stretch>
+            <a:fillRect/>
+          </a:stretch>
+        </p:blipFill>
+        <p:spPr>
+          <a:xfrm>
+            <a:off x="9766300" y="3822700"/>
+            <a:ext cx="1117600" cy="1117600"/>
+          </a:xfrm>
+          <a:prstGeom prst="rect">
+            <a:avLst/>
+          </a:prstGeom>
+        </p:spPr>
+      </p:pic>
+      <p:sp>
+        <p:nvSpPr>
+          <p:cNvPr id="36" name="Text 27"/>
+          <p:cNvSpPr txBox="1"/>
+          <p:nvPr/>
+        </p:nvSpPr>
+        <p:spPr>
+          <a:xfrm>
+            <a:off x="9271000" y="5105400"/>
+            <a:ext cx="2108200" cy="177800"/>
+          </a:xfrm>
+          <a:prstGeom prst="rect">
+            <a:avLst/>
+          </a:prstGeom>
+          <a:noFill/>
+          <a:ln/>
+        </p:spPr>
+        <p:txBody>
+          <a:bodyPr wrap="square" lIns="0" tIns="0" rIns="0" bIns="0" rtlCol="0" anchor="t"/>
+          <a:lstStyle/>
+          <a:p>
+            <a:pPr algn="ctr" indent="0" marL="0">
+              <a:buNone/>
+            </a:pPr>
+            <a:r>
+              <a:rPr lang="en-US" sz="1400" dirty="0">
+                <a:solidFill>
+                  <a:schemeClr val="bg1"/>
+                </a:solidFill>
+                <a:latin typeface="Inter SemiBold" pitchFamily="34" charset="0"/>
+                <a:ea typeface="Inter SemiBold" pitchFamily="34" charset="-122"/>
+                <a:cs typeface="Inter SemiBold" pitchFamily="34" charset="-120"/>
+              </a:rPr>
+              <a:t>Bank sandbox</a:t>
             </a:r>
             <a:endParaRPr lang="en-US" sz="1400" dirty="0"/>
           </a:p>
+        </p:txBody>
+      </p:sp>
+      <p:sp>
+        <p:nvSpPr>
+          <p:cNvPr id="37" name="Text 28"/>
+          <p:cNvSpPr txBox="1"/>
+          <p:nvPr/>
+        </p:nvSpPr>
+        <p:spPr>
+          <a:xfrm>
+            <a:off x="9271000" y="5283200"/>
+            <a:ext cx="2108200" cy="152400"/>
+          </a:xfrm>
+          <a:prstGeom prst="rect">
+            <a:avLst/>
+          </a:prstGeom>
+          <a:noFill/>
+          <a:ln/>
+        </p:spPr>
+        <p:txBody>
+          <a:bodyPr wrap="square" lIns="0" tIns="0" rIns="0" bIns="0" rtlCol="0" anchor="t"/>
+          <a:lstStyle/>
           <a:p>
             <a:pPr algn="ctr" indent="0" marL="0">
-              <a:lnSpc>
-                <a:spcPct val="135000"/>
-              </a:lnSpc>
-              <a:buNone/>
-            </a:pPr>
-            <a:r>
-              <a:rPr lang="en-US" sz="1400" dirty="0">
-                <a:solidFill>
-                  <a:schemeClr val="tx2"/>
+              <a:buNone/>
+            </a:pPr>
+            <a:r>
+              <a:rPr lang="en-US" sz="1100" dirty="0">
+                <a:solidFill>
+                  <a:srgbClr val="A3ADA8"/>
                 </a:solidFill>
                 <a:latin typeface="Inter" pitchFamily="34" charset="0"/>
                 <a:ea typeface="Inter" pitchFamily="34" charset="-122"/>
                 <a:cs typeface="Inter" pitchFamily="34" charset="-120"/>
               </a:rPr>
-              <a:t>iOS and Android app</a:t>
-            </a:r>
-            <a:endParaRPr lang="en-US" sz="1400" dirty="0"/>
-          </a:p>
-          <a:p>
-            <a:pPr algn="ctr" indent="0" marL="0">
-              <a:lnSpc>
-                <a:spcPct val="135000"/>
-              </a:lnSpc>
-              <a:buNone/>
-            </a:pPr>
-            <a:r>
-              <a:rPr lang="en-US" sz="1400" dirty="0">
-                <a:solidFill>
-                  <a:schemeClr val="tx2"/>
-                </a:solidFill>
-                <a:latin typeface="Inter" pitchFamily="34" charset="0"/>
-                <a:ea typeface="Inter" pitchFamily="34" charset="-122"/>
-                <a:cs typeface="Inter" pitchFamily="34" charset="-120"/>
-              </a:rPr>
-              <a:t>WhatsApp, USSD, CI/CD</a:t>
-            </a:r>
-            <a:endParaRPr lang="en-US" sz="1400" dirty="0"/>
-          </a:p>
-        </p:txBody>
-      </p:sp>
-      <p:sp>
-        <p:nvSpPr>
-          <p:cNvPr id="10" name="Text 7"/>
-          <p:cNvSpPr txBox="1"/>
-          <p:nvPr/>
-        </p:nvSpPr>
-        <p:spPr>
-          <a:xfrm>
-            <a:off x="3530600" y="2413000"/>
-            <a:ext cx="2413000" cy="190500"/>
-          </a:xfrm>
-          <a:prstGeom prst="rect">
-            <a:avLst/>
-          </a:prstGeom>
-          <a:noFill/>
-          <a:ln/>
-        </p:spPr>
-        <p:txBody>
-          <a:bodyPr wrap="square" lIns="0" tIns="0" rIns="0" bIns="0" rtlCol="0" anchor="t"/>
-          <a:lstStyle/>
-          <a:p>
-            <a:pPr algn="ctr" indent="0" marL="0">
-              <a:buNone/>
-            </a:pPr>
-            <a:r>
-              <a:rPr lang="en-US" sz="1400" dirty="0">
-                <a:solidFill>
-                  <a:schemeClr val="tx2"/>
-                </a:solidFill>
-                <a:latin typeface="Inter Medium" pitchFamily="34" charset="0"/>
-                <a:ea typeface="Inter Medium" pitchFamily="34" charset="-122"/>
-                <a:cs typeface="Inter Medium" pitchFamily="34" charset="-120"/>
-              </a:rPr>
-              <a:t>Month 1</a:t>
-            </a:r>
-            <a:endParaRPr lang="en-US" sz="1400" dirty="0"/>
-          </a:p>
-        </p:txBody>
-      </p:sp>
-      <p:sp>
-        <p:nvSpPr>
-          <p:cNvPr id="11" name="Shape 8"/>
-          <p:cNvSpPr/>
-          <p:nvPr/>
-        </p:nvSpPr>
-        <p:spPr>
-          <a:xfrm>
-            <a:off x="4533900" y="2844800"/>
-            <a:ext cx="406400" cy="406400"/>
-          </a:xfrm>
-          <a:prstGeom prst="ellipse">
-            <a:avLst/>
-          </a:prstGeom>
-          <a:solidFill>
-            <a:srgbClr val="FFFFFF"/>
-          </a:solidFill>
-          <a:ln w="38100">
-            <a:solidFill>
-              <a:srgbClr val="0A7A55"/>
-            </a:solidFill>
-            <a:prstDash val="solid"/>
-          </a:ln>
-        </p:spPr>
-      </p:sp>
-      <p:sp>
-        <p:nvSpPr>
-          <p:cNvPr id="12" name="Text 9"/>
-          <p:cNvSpPr txBox="1"/>
-          <p:nvPr/>
-        </p:nvSpPr>
-        <p:spPr>
-          <a:xfrm>
-            <a:off x="4533900" y="2844800"/>
-            <a:ext cx="406400" cy="406400"/>
-          </a:xfrm>
-          <a:prstGeom prst="rect">
-            <a:avLst/>
-          </a:prstGeom>
-          <a:noFill/>
-          <a:ln/>
-        </p:spPr>
-        <p:txBody>
-          <a:bodyPr wrap="square" lIns="0" tIns="0" rIns="0" bIns="0" rtlCol="0" anchor="ctr"/>
-          <a:lstStyle/>
-          <a:p>
-            <a:pPr algn="ctr" indent="0" marL="0">
-              <a:buNone/>
-            </a:pPr>
-            <a:r>
-              <a:rPr lang="en-US" sz="1800" dirty="0">
-                <a:solidFill>
-                  <a:schemeClr val="accent1"/>
-                </a:solidFill>
-                <a:latin typeface="Inter SemiBold" pitchFamily="34" charset="0"/>
-                <a:ea typeface="Inter SemiBold" pitchFamily="34" charset="-122"/>
-                <a:cs typeface="Inter SemiBold" pitchFamily="34" charset="-120"/>
-              </a:rPr>
-              <a:t>1</a:t>
-            </a:r>
-            <a:endParaRPr lang="en-US" sz="1800" dirty="0"/>
-          </a:p>
-        </p:txBody>
-      </p:sp>
-      <p:sp>
-        <p:nvSpPr>
-          <p:cNvPr id="13" name="Text 10"/>
-          <p:cNvSpPr txBox="1"/>
-          <p:nvPr/>
-        </p:nvSpPr>
-        <p:spPr>
-          <a:xfrm>
-            <a:off x="3530600" y="3454400"/>
-            <a:ext cx="2413000" cy="254000"/>
-          </a:xfrm>
-          <a:prstGeom prst="rect">
-            <a:avLst/>
-          </a:prstGeom>
-          <a:noFill/>
-          <a:ln/>
-        </p:spPr>
-        <p:txBody>
-          <a:bodyPr wrap="square" lIns="0" tIns="0" rIns="0" bIns="0" rtlCol="0" anchor="t"/>
-          <a:lstStyle/>
-          <a:p>
-            <a:pPr algn="ctr" indent="0" marL="0">
-              <a:buNone/>
-            </a:pPr>
-            <a:r>
-              <a:rPr lang="en-US" sz="2000" dirty="0">
-                <a:solidFill>
-                  <a:schemeClr val="tx1"/>
-                </a:solidFill>
-                <a:latin typeface="Inter Display SemiBold" pitchFamily="34" charset="0"/>
-                <a:ea typeface="Inter Display SemiBold" pitchFamily="34" charset="-122"/>
-                <a:cs typeface="Inter Display SemiBold" pitchFamily="34" charset="-120"/>
-              </a:rPr>
-              <a:t>Validate</a:t>
-            </a:r>
-            <a:endParaRPr lang="en-US" sz="2000" dirty="0"/>
-          </a:p>
-        </p:txBody>
-      </p:sp>
-      <p:sp>
-        <p:nvSpPr>
-          <p:cNvPr id="14" name="Text 11"/>
-          <p:cNvSpPr txBox="1"/>
-          <p:nvPr/>
-        </p:nvSpPr>
-        <p:spPr>
-          <a:xfrm>
-            <a:off x="3530600" y="3784600"/>
-            <a:ext cx="2413000" cy="889000"/>
-          </a:xfrm>
-          <a:prstGeom prst="rect">
-            <a:avLst/>
-          </a:prstGeom>
-          <a:noFill/>
-          <a:ln/>
-        </p:spPr>
-        <p:txBody>
-          <a:bodyPr wrap="square" lIns="0" tIns="0" rIns="0" bIns="0" rtlCol="0" anchor="t"/>
-          <a:lstStyle/>
-          <a:p>
-            <a:pPr algn="ctr" indent="0" marL="0">
-              <a:lnSpc>
-                <a:spcPct val="135000"/>
-              </a:lnSpc>
-              <a:buNone/>
-            </a:pPr>
-            <a:r>
-              <a:rPr lang="en-US" sz="1400" dirty="0">
-                <a:solidFill>
-                  <a:schemeClr val="tx2"/>
-                </a:solidFill>
-                <a:latin typeface="Inter" pitchFamily="34" charset="0"/>
-                <a:ea typeface="Inter" pitchFamily="34" charset="-122"/>
-                <a:cs typeface="Inter" pitchFamily="34" charset="-120"/>
-              </a:rPr>
-              <a:t>Test with real users</a:t>
-            </a:r>
-            <a:endParaRPr lang="en-US" sz="1400" dirty="0"/>
-          </a:p>
-          <a:p>
-            <a:pPr algn="ctr" indent="0" marL="0">
-              <a:lnSpc>
-                <a:spcPct val="135000"/>
-              </a:lnSpc>
-              <a:buNone/>
-            </a:pPr>
-            <a:r>
-              <a:rPr lang="en-US" sz="1400" dirty="0">
-                <a:solidFill>
-                  <a:schemeClr val="tx2"/>
-                </a:solidFill>
-                <a:latin typeface="Inter" pitchFamily="34" charset="0"/>
-                <a:ea typeface="Inter" pitchFamily="34" charset="-122"/>
-                <a:cs typeface="Inter" pitchFamily="34" charset="-120"/>
-              </a:rPr>
-              <a:t>Make every result clear</a:t>
-            </a:r>
-            <a:endParaRPr lang="en-US" sz="1400" dirty="0"/>
-          </a:p>
-        </p:txBody>
-      </p:sp>
-      <p:sp>
-        <p:nvSpPr>
-          <p:cNvPr id="15" name="Text 12"/>
-          <p:cNvSpPr txBox="1"/>
-          <p:nvPr/>
-        </p:nvSpPr>
-        <p:spPr>
-          <a:xfrm>
-            <a:off x="6248400" y="2413000"/>
-            <a:ext cx="2413000" cy="190500"/>
-          </a:xfrm>
-          <a:prstGeom prst="rect">
-            <a:avLst/>
-          </a:prstGeom>
-          <a:noFill/>
-          <a:ln/>
-        </p:spPr>
-        <p:txBody>
-          <a:bodyPr wrap="square" lIns="0" tIns="0" rIns="0" bIns="0" rtlCol="0" anchor="t"/>
-          <a:lstStyle/>
-          <a:p>
-            <a:pPr algn="ctr" indent="0" marL="0">
-              <a:buNone/>
-            </a:pPr>
-            <a:r>
-              <a:rPr lang="en-US" sz="1400" dirty="0">
-                <a:solidFill>
-                  <a:schemeClr val="tx2"/>
-                </a:solidFill>
-                <a:latin typeface="Inter Medium" pitchFamily="34" charset="0"/>
-                <a:ea typeface="Inter Medium" pitchFamily="34" charset="-122"/>
-                <a:cs typeface="Inter Medium" pitchFamily="34" charset="-120"/>
-              </a:rPr>
-              <a:t>Month 2</a:t>
-            </a:r>
-            <a:endParaRPr lang="en-US" sz="1400" dirty="0"/>
-          </a:p>
-        </p:txBody>
-      </p:sp>
-      <p:sp>
-        <p:nvSpPr>
-          <p:cNvPr id="16" name="Shape 13"/>
-          <p:cNvSpPr/>
-          <p:nvPr/>
-        </p:nvSpPr>
-        <p:spPr>
-          <a:xfrm>
-            <a:off x="7251700" y="2844800"/>
-            <a:ext cx="406400" cy="406400"/>
-          </a:xfrm>
-          <a:prstGeom prst="ellipse">
-            <a:avLst/>
-          </a:prstGeom>
-          <a:solidFill>
-            <a:srgbClr val="FFFFFF"/>
-          </a:solidFill>
-          <a:ln w="38100">
-            <a:solidFill>
-              <a:srgbClr val="0A7A55"/>
-            </a:solidFill>
-            <a:prstDash val="solid"/>
-          </a:ln>
-        </p:spPr>
-      </p:sp>
-      <p:sp>
-        <p:nvSpPr>
-          <p:cNvPr id="17" name="Text 14"/>
-          <p:cNvSpPr txBox="1"/>
-          <p:nvPr/>
-        </p:nvSpPr>
-        <p:spPr>
-          <a:xfrm>
-            <a:off x="7251700" y="2844800"/>
-            <a:ext cx="406400" cy="406400"/>
-          </a:xfrm>
-          <a:prstGeom prst="rect">
-            <a:avLst/>
-          </a:prstGeom>
-          <a:noFill/>
-          <a:ln/>
-        </p:spPr>
-        <p:txBody>
-          <a:bodyPr wrap="square" lIns="0" tIns="0" rIns="0" bIns="0" rtlCol="0" anchor="ctr"/>
-          <a:lstStyle/>
-          <a:p>
-            <a:pPr algn="ctr" indent="0" marL="0">
-              <a:buNone/>
-            </a:pPr>
-            <a:r>
-              <a:rPr lang="en-US" sz="1800" dirty="0">
-                <a:solidFill>
-                  <a:schemeClr val="accent1"/>
-                </a:solidFill>
-                <a:latin typeface="Inter SemiBold" pitchFamily="34" charset="0"/>
-                <a:ea typeface="Inter SemiBold" pitchFamily="34" charset="-122"/>
-                <a:cs typeface="Inter SemiBold" pitchFamily="34" charset="-120"/>
-              </a:rPr>
-              <a:t>2</a:t>
-            </a:r>
-            <a:endParaRPr lang="en-US" sz="1800" dirty="0"/>
-          </a:p>
-        </p:txBody>
-      </p:sp>
-      <p:sp>
-        <p:nvSpPr>
-          <p:cNvPr id="18" name="Text 15"/>
-          <p:cNvSpPr txBox="1"/>
-          <p:nvPr/>
-        </p:nvSpPr>
-        <p:spPr>
-          <a:xfrm>
-            <a:off x="6248400" y="3454400"/>
-            <a:ext cx="2413000" cy="254000"/>
-          </a:xfrm>
-          <a:prstGeom prst="rect">
-            <a:avLst/>
-          </a:prstGeom>
-          <a:noFill/>
-          <a:ln/>
-        </p:spPr>
-        <p:txBody>
-          <a:bodyPr wrap="square" lIns="0" tIns="0" rIns="0" bIns="0" rtlCol="0" anchor="t"/>
-          <a:lstStyle/>
-          <a:p>
-            <a:pPr algn="ctr" indent="0" marL="0">
-              <a:buNone/>
-            </a:pPr>
-            <a:r>
-              <a:rPr lang="en-US" sz="2000" dirty="0">
-                <a:solidFill>
-                  <a:schemeClr val="tx1"/>
-                </a:solidFill>
-                <a:latin typeface="Inter Display SemiBold" pitchFamily="34" charset="0"/>
-                <a:ea typeface="Inter Display SemiBold" pitchFamily="34" charset="-122"/>
-                <a:cs typeface="Inter Display SemiBold" pitchFamily="34" charset="-120"/>
-              </a:rPr>
-              <a:t>Strengthen</a:t>
-            </a:r>
-            <a:endParaRPr lang="en-US" sz="2000" dirty="0"/>
-          </a:p>
-        </p:txBody>
-      </p:sp>
-      <p:sp>
-        <p:nvSpPr>
-          <p:cNvPr id="19" name="Text 16"/>
-          <p:cNvSpPr txBox="1"/>
-          <p:nvPr/>
-        </p:nvSpPr>
-        <p:spPr>
-          <a:xfrm>
-            <a:off x="6248400" y="3784600"/>
-            <a:ext cx="2413000" cy="889000"/>
-          </a:xfrm>
-          <a:prstGeom prst="rect">
-            <a:avLst/>
-          </a:prstGeom>
-          <a:noFill/>
-          <a:ln/>
-        </p:spPr>
-        <p:txBody>
-          <a:bodyPr wrap="square" lIns="0" tIns="0" rIns="0" bIns="0" rtlCol="0" anchor="t"/>
-          <a:lstStyle/>
-          <a:p>
-            <a:pPr algn="ctr" indent="0" marL="0">
-              <a:lnSpc>
-                <a:spcPct val="135000"/>
-              </a:lnSpc>
-              <a:buNone/>
-            </a:pPr>
-            <a:r>
-              <a:rPr lang="en-US" sz="1400" dirty="0">
-                <a:solidFill>
-                  <a:schemeClr val="tx2"/>
-                </a:solidFill>
-                <a:latin typeface="Inter" pitchFamily="34" charset="0"/>
-                <a:ea typeface="Inter" pitchFamily="34" charset="-122"/>
-                <a:cs typeface="Inter" pitchFamily="34" charset="-120"/>
-              </a:rPr>
-              <a:t>Security and privacy review</a:t>
-            </a:r>
-            <a:endParaRPr lang="en-US" sz="1400" dirty="0"/>
-          </a:p>
-          <a:p>
-            <a:pPr algn="ctr" indent="0" marL="0">
-              <a:lnSpc>
-                <a:spcPct val="135000"/>
-              </a:lnSpc>
-              <a:buNone/>
-            </a:pPr>
-            <a:r>
-              <a:rPr lang="en-US" sz="1400" dirty="0">
-                <a:solidFill>
-                  <a:schemeClr val="tx2"/>
-                </a:solidFill>
-                <a:latin typeface="Inter" pitchFamily="34" charset="0"/>
-                <a:ea typeface="Inter" pitchFamily="34" charset="-122"/>
-                <a:cs typeface="Inter" pitchFamily="34" charset="-120"/>
-              </a:rPr>
-              <a:t>Bank integration requirements</a:t>
-            </a:r>
-            <a:endParaRPr lang="en-US" sz="1400" dirty="0"/>
-          </a:p>
-        </p:txBody>
-      </p:sp>
-      <p:sp>
-        <p:nvSpPr>
-          <p:cNvPr id="20" name="Text 17"/>
-          <p:cNvSpPr txBox="1"/>
-          <p:nvPr/>
-        </p:nvSpPr>
-        <p:spPr>
-          <a:xfrm>
-            <a:off x="8966200" y="2413000"/>
-            <a:ext cx="2413000" cy="190500"/>
-          </a:xfrm>
-          <a:prstGeom prst="rect">
-            <a:avLst/>
-          </a:prstGeom>
-          <a:noFill/>
-          <a:ln/>
-        </p:spPr>
-        <p:txBody>
-          <a:bodyPr wrap="square" lIns="0" tIns="0" rIns="0" bIns="0" rtlCol="0" anchor="t"/>
-          <a:lstStyle/>
-          <a:p>
-            <a:pPr algn="ctr" indent="0" marL="0">
-              <a:buNone/>
-            </a:pPr>
-            <a:r>
-              <a:rPr lang="en-US" sz="1400" dirty="0">
-                <a:solidFill>
-                  <a:schemeClr val="tx2"/>
-                </a:solidFill>
-                <a:latin typeface="Inter Medium" pitchFamily="34" charset="0"/>
-                <a:ea typeface="Inter Medium" pitchFamily="34" charset="-122"/>
-                <a:cs typeface="Inter Medium" pitchFamily="34" charset="-120"/>
-              </a:rPr>
-              <a:t>Month 3</a:t>
-            </a:r>
-            <a:endParaRPr lang="en-US" sz="1400" dirty="0"/>
-          </a:p>
-        </p:txBody>
-      </p:sp>
-      <p:sp>
-        <p:nvSpPr>
-          <p:cNvPr id="21" name="Shape 18"/>
-          <p:cNvSpPr/>
-          <p:nvPr/>
-        </p:nvSpPr>
-        <p:spPr>
-          <a:xfrm>
-            <a:off x="9969500" y="2844800"/>
-            <a:ext cx="406400" cy="406400"/>
-          </a:xfrm>
-          <a:prstGeom prst="ellipse">
-            <a:avLst/>
-          </a:prstGeom>
-          <a:solidFill>
-            <a:srgbClr val="FFFFFF"/>
-          </a:solidFill>
-          <a:ln w="38100">
-            <a:solidFill>
-              <a:srgbClr val="0A7A55"/>
-            </a:solidFill>
-            <a:prstDash val="solid"/>
-          </a:ln>
-        </p:spPr>
-      </p:sp>
-      <p:sp>
-        <p:nvSpPr>
-          <p:cNvPr id="22" name="Text 19"/>
-          <p:cNvSpPr txBox="1"/>
-          <p:nvPr/>
-        </p:nvSpPr>
-        <p:spPr>
-          <a:xfrm>
-            <a:off x="9969500" y="2844800"/>
-            <a:ext cx="406400" cy="406400"/>
-          </a:xfrm>
-          <a:prstGeom prst="rect">
-            <a:avLst/>
-          </a:prstGeom>
-          <a:noFill/>
-          <a:ln/>
-        </p:spPr>
-        <p:txBody>
-          <a:bodyPr wrap="square" lIns="0" tIns="0" rIns="0" bIns="0" rtlCol="0" anchor="ctr"/>
-          <a:lstStyle/>
-          <a:p>
-            <a:pPr algn="ctr" indent="0" marL="0">
-              <a:buNone/>
-            </a:pPr>
-            <a:r>
-              <a:rPr lang="en-US" sz="1800" dirty="0">
-                <a:solidFill>
-                  <a:schemeClr val="accent1"/>
-                </a:solidFill>
-                <a:latin typeface="Inter SemiBold" pitchFamily="34" charset="0"/>
-                <a:ea typeface="Inter SemiBold" pitchFamily="34" charset="-122"/>
-                <a:cs typeface="Inter SemiBold" pitchFamily="34" charset="-120"/>
-              </a:rPr>
-              <a:t>3</a:t>
-            </a:r>
-            <a:endParaRPr lang="en-US" sz="1800" dirty="0"/>
-          </a:p>
-        </p:txBody>
-      </p:sp>
-      <p:sp>
-        <p:nvSpPr>
-          <p:cNvPr id="23" name="Text 20"/>
-          <p:cNvSpPr txBox="1"/>
-          <p:nvPr/>
-        </p:nvSpPr>
-        <p:spPr>
-          <a:xfrm>
-            <a:off x="8966200" y="3454400"/>
-            <a:ext cx="2413000" cy="254000"/>
-          </a:xfrm>
-          <a:prstGeom prst="rect">
-            <a:avLst/>
-          </a:prstGeom>
-          <a:noFill/>
-          <a:ln/>
-        </p:spPr>
-        <p:txBody>
-          <a:bodyPr wrap="square" lIns="0" tIns="0" rIns="0" bIns="0" rtlCol="0" anchor="t"/>
-          <a:lstStyle/>
-          <a:p>
-            <a:pPr algn="ctr" indent="0" marL="0">
-              <a:buNone/>
-            </a:pPr>
-            <a:r>
-              <a:rPr lang="en-US" sz="2000" dirty="0">
-                <a:solidFill>
-                  <a:schemeClr val="tx1"/>
-                </a:solidFill>
-                <a:latin typeface="Inter Display SemiBold" pitchFamily="34" charset="0"/>
-                <a:ea typeface="Inter Display SemiBold" pitchFamily="34" charset="-122"/>
-                <a:cs typeface="Inter Display SemiBold" pitchFamily="34" charset="-120"/>
-              </a:rPr>
-              <a:t>Pilot</a:t>
-            </a:r>
-            <a:endParaRPr lang="en-US" sz="2000" dirty="0"/>
-          </a:p>
-        </p:txBody>
-      </p:sp>
-      <p:sp>
-        <p:nvSpPr>
-          <p:cNvPr id="24" name="Text 21"/>
-          <p:cNvSpPr txBox="1"/>
-          <p:nvPr/>
-        </p:nvSpPr>
-        <p:spPr>
-          <a:xfrm>
-            <a:off x="8966200" y="3784600"/>
-            <a:ext cx="2413000" cy="889000"/>
-          </a:xfrm>
-          <a:prstGeom prst="rect">
-            <a:avLst/>
-          </a:prstGeom>
-          <a:noFill/>
-          <a:ln/>
-        </p:spPr>
-        <p:txBody>
-          <a:bodyPr wrap="square" lIns="0" tIns="0" rIns="0" bIns="0" rtlCol="0" anchor="t"/>
-          <a:lstStyle/>
-          <a:p>
-            <a:pPr algn="ctr" indent="0" marL="0">
-              <a:lnSpc>
-                <a:spcPct val="135000"/>
-              </a:lnSpc>
-              <a:buNone/>
-            </a:pPr>
-            <a:r>
-              <a:rPr lang="en-US" sz="1400" dirty="0">
-                <a:solidFill>
-                  <a:schemeClr val="tx2"/>
-                </a:solidFill>
-                <a:latin typeface="Inter" pitchFamily="34" charset="0"/>
-                <a:ea typeface="Inter" pitchFamily="34" charset="-122"/>
-                <a:cs typeface="Inter" pitchFamily="34" charset="-120"/>
-              </a:rPr>
-              <a:t>Controlled pilot with a partner bank</a:t>
-            </a:r>
-            <a:endParaRPr lang="en-US" sz="1400" dirty="0"/>
-          </a:p>
-          <a:p>
-            <a:pPr algn="ctr" indent="0" marL="0">
-              <a:lnSpc>
-                <a:spcPct val="135000"/>
-              </a:lnSpc>
-              <a:buNone/>
-            </a:pPr>
-            <a:r>
-              <a:rPr lang="en-US" sz="1400" dirty="0">
-                <a:solidFill>
-                  <a:schemeClr val="tx2"/>
-                </a:solidFill>
-                <a:latin typeface="Inter" pitchFamily="34" charset="0"/>
-                <a:ea typeface="Inter" pitchFamily="34" charset="-122"/>
-                <a:cs typeface="Inter" pitchFamily="34" charset="-120"/>
-              </a:rPr>
-              <a:t>Measure, then decide on rollout</a:t>
-            </a:r>
-            <a:endParaRPr lang="en-US" sz="1400" dirty="0"/>
+              <a:t>gaskiyya-io.web.app/console</a:t>
+            </a:r>
+            <a:endParaRPr lang="en-US" sz="1100" dirty="0"/>
           </a:p>
         </p:txBody>
       </p:sp>
@@ -9203,7 +9513,7 @@
             <a:lvl1pPr>
               <a:defRPr sz="1100">
                 <a:solidFill>
-                  <a:schemeClr val="tx2"/>
+                  <a:schemeClr val="bg2"/>
                 </a:solidFill>
                 <a:latin typeface="Inter Medium"/>
                 <a:ea typeface="Inter Medium"/>
